--- a/public/wedding-mentor-files/S8_Posvenda_Escala.pptx
+++ b/public/wedding-mentor-files/S8_Posvenda_Escala.pptx
@@ -2726,7 +2726,7 @@
     <p:bg>
       <p:bgPr>
         <a:solidFill>
-          <a:srgbClr val="0B1D33"/>
+          <a:srgbClr val="F8F6F3"/>
         </a:solidFill>
       </p:bgPr>
     </p:bg>
@@ -2744,60 +2744,40 @@
           <a:chExt cx="0" cy="0"/>
         </a:xfrm>
       </p:grpSpPr>
-      <p:sp>
-        <p:nvSpPr>
-          <p:cNvPr id="2" name="Shape 0"/>
-          <p:cNvSpPr/>
-          <p:nvPr/>
-        </p:nvSpPr>
-        <p:spPr>
-          <a:xfrm>
-            <a:off x="8046720" y="-1645920"/>
-            <a:ext cx="5943600" cy="5943600"/>
-          </a:xfrm>
-          <a:prstGeom prst="ellipse">
-            <a:avLst/>
-          </a:prstGeom>
-          <a:solidFill>
-            <a:srgbClr val="4A9EFF">
-              <a:alpha val="14000"/>
-            </a:srgbClr>
-          </a:solidFill>
-          <a:ln/>
-        </p:spPr>
-      </p:sp>
-      <p:sp>
-        <p:nvSpPr>
-          <p:cNvPr id="3" name="Shape 1"/>
-          <p:cNvSpPr/>
-          <p:nvPr/>
-        </p:nvSpPr>
-        <p:spPr>
-          <a:xfrm>
-            <a:off x="-1828800" y="4389120"/>
-            <a:ext cx="5029200" cy="5029200"/>
-          </a:xfrm>
-          <a:prstGeom prst="ellipse">
-            <a:avLst/>
-          </a:prstGeom>
-          <a:solidFill>
-            <a:srgbClr val="C9A961">
-              <a:alpha val="10000"/>
-            </a:srgbClr>
-          </a:solidFill>
-          <a:ln/>
-        </p:spPr>
-      </p:sp>
-      <p:sp>
-        <p:nvSpPr>
-          <p:cNvPr id="4" name="Text 2"/>
-          <p:cNvSpPr/>
-          <p:nvPr/>
-        </p:nvSpPr>
-        <p:spPr>
-          <a:xfrm>
-            <a:off x="640080" y="548640"/>
-            <a:ext cx="7315200" cy="365760"/>
+      <p:pic>
+        <p:nvPicPr>
+          <p:cNvPr id="2" name="Image 0" descr="preencoded.png">    </p:cNvPr>
+          <p:cNvPicPr>
+            <a:picLocks noChangeAspect="1"/>
+          </p:cNvPicPr>
+          <p:nvPr/>
+        </p:nvPicPr>
+        <p:blipFill>
+          <a:blip r:embed="rId1"/>
+          <a:stretch>
+            <a:fillRect/>
+          </a:stretch>
+        </p:blipFill>
+        <p:spPr>
+          <a:xfrm>
+            <a:off x="603504" y="457200"/>
+            <a:ext cx="1371600" cy="1415143"/>
+          </a:xfrm>
+          <a:prstGeom prst="rect">
+            <a:avLst/>
+          </a:prstGeom>
+        </p:spPr>
+      </p:pic>
+      <p:sp>
+        <p:nvSpPr>
+          <p:cNvPr id="3" name="Text 0"/>
+          <p:cNvSpPr/>
+          <p:nvPr/>
+        </p:nvSpPr>
+        <p:spPr>
+          <a:xfrm>
+            <a:off x="640080" y="2286000"/>
+            <a:ext cx="5486400" cy="457200"/>
           </a:xfrm>
           <a:prstGeom prst="rect">
             <a:avLst/>
@@ -2813,53 +2793,14 @@
               <a:buNone/>
             </a:pPr>
             <a:r>
-              <a:rPr lang="en-US" sz="1300" b="1" spc="500" kern="0" dirty="0">
-                <a:solidFill>
-                  <a:srgbClr val="9FB2C9"/>
+              <a:rPr lang="en-US" sz="1500" b="1" spc="600" kern="0" dirty="0">
+                <a:solidFill>
+                  <a:srgbClr val="B1937E"/>
                 </a:solidFill>
                 <a:latin typeface="Calibri" pitchFamily="34" charset="0"/>
                 <a:ea typeface="Calibri" pitchFamily="34" charset="-122"/>
                 <a:cs typeface="Calibri" pitchFamily="34" charset="-120"/>
               </a:rPr>
-              <a:t>MENTORIA · RL</a:t>
-            </a:r>
-            <a:endParaRPr lang="en-US" sz="1300" dirty="0"/>
-          </a:p>
-        </p:txBody>
-      </p:sp>
-      <p:sp>
-        <p:nvSpPr>
-          <p:cNvPr id="5" name="Text 3"/>
-          <p:cNvSpPr/>
-          <p:nvPr/>
-        </p:nvSpPr>
-        <p:spPr>
-          <a:xfrm>
-            <a:off x="640080" y="2286000"/>
-            <a:ext cx="5486400" cy="457200"/>
-          </a:xfrm>
-          <a:prstGeom prst="rect">
-            <a:avLst/>
-          </a:prstGeom>
-          <a:noFill/>
-          <a:ln/>
-        </p:spPr>
-        <p:txBody>
-          <a:bodyPr wrap="square" lIns="0" tIns="0" rIns="0" bIns="0" rtlCol="0" anchor="ctr"/>
-          <a:lstStyle/>
-          <a:p>
-            <a:pPr indent="0" marL="0">
-              <a:buNone/>
-            </a:pPr>
-            <a:r>
-              <a:rPr lang="en-US" sz="1500" b="1" spc="600" kern="0" dirty="0">
-                <a:solidFill>
-                  <a:srgbClr val="C9A961"/>
-                </a:solidFill>
-                <a:latin typeface="Calibri" pitchFamily="34" charset="0"/>
-                <a:ea typeface="Calibri" pitchFamily="34" charset="-122"/>
-                <a:cs typeface="Calibri" pitchFamily="34" charset="-120"/>
-              </a:rPr>
               <a:t>SESSÃO 08</a:t>
             </a:r>
             <a:endParaRPr lang="en-US" sz="1500" dirty="0"/>
@@ -2868,7 +2809,7 @@
       </p:sp>
       <p:sp>
         <p:nvSpPr>
-          <p:cNvPr id="6" name="Text 4"/>
+          <p:cNvPr id="4" name="Text 1"/>
           <p:cNvSpPr/>
           <p:nvPr/>
         </p:nvSpPr>
@@ -2894,17 +2835,17 @@
               <a:buNone/>
             </a:pPr>
             <a:r>
-              <a:rPr lang="en-US" sz="5000" b="1" dirty="0">
-                <a:solidFill>
-                  <a:srgbClr val="EAF1FA"/>
-                </a:solidFill>
-                <a:latin typeface="Bookman Old Style" pitchFamily="34" charset="0"/>
-                <a:ea typeface="Bookman Old Style" pitchFamily="34" charset="-122"/>
-                <a:cs typeface="Bookman Old Style" pitchFamily="34" charset="-120"/>
+              <a:rPr lang="en-US" sz="4400" b="1" dirty="0">
+                <a:solidFill>
+                  <a:srgbClr val="33302B"/>
+                </a:solidFill>
+                <a:latin typeface="Georgia" pitchFamily="34" charset="0"/>
+                <a:ea typeface="Georgia" pitchFamily="34" charset="-122"/>
+                <a:cs typeface="Georgia" pitchFamily="34" charset="-120"/>
               </a:rPr>
               <a:t>Pós-venda, Escala</a:t>
             </a:r>
-            <a:endParaRPr lang="en-US" sz="5000" dirty="0"/>
+            <a:endParaRPr lang="en-US" sz="4400" dirty="0"/>
           </a:p>
           <a:p>
             <a:pPr indent="0" marL="0">
@@ -2914,23 +2855,23 @@
               <a:buNone/>
             </a:pPr>
             <a:r>
-              <a:rPr lang="en-US" sz="5000" b="1" dirty="0">
-                <a:solidFill>
-                  <a:srgbClr val="EAF1FA"/>
-                </a:solidFill>
-                <a:latin typeface="Bookman Old Style" pitchFamily="34" charset="0"/>
-                <a:ea typeface="Bookman Old Style" pitchFamily="34" charset="-122"/>
-                <a:cs typeface="Bookman Old Style" pitchFamily="34" charset="-120"/>
+              <a:rPr lang="en-US" sz="4400" b="1" dirty="0">
+                <a:solidFill>
+                  <a:srgbClr val="33302B"/>
+                </a:solidFill>
+                <a:latin typeface="Georgia" pitchFamily="34" charset="0"/>
+                <a:ea typeface="Georgia" pitchFamily="34" charset="-122"/>
+                <a:cs typeface="Georgia" pitchFamily="34" charset="-120"/>
               </a:rPr>
               <a:t>e Sistemas</a:t>
             </a:r>
-            <a:endParaRPr lang="en-US" sz="5000" dirty="0"/>
-          </a:p>
-        </p:txBody>
-      </p:sp>
-      <p:sp>
-        <p:nvSpPr>
-          <p:cNvPr id="7" name="Text 5"/>
+            <a:endParaRPr lang="en-US" sz="4400" dirty="0"/>
+          </a:p>
+        </p:txBody>
+      </p:sp>
+      <p:sp>
+        <p:nvSpPr>
+          <p:cNvPr id="5" name="Text 2"/>
           <p:cNvSpPr/>
           <p:nvPr/>
         </p:nvSpPr>
@@ -2955,7 +2896,7 @@
             <a:r>
               <a:rPr lang="en-US" sz="1700" dirty="0">
                 <a:solidFill>
-                  <a:srgbClr val="9FB2C9"/>
+                  <a:srgbClr val="8A7E72"/>
                 </a:solidFill>
                 <a:latin typeface="Calibri" pitchFamily="34" charset="0"/>
                 <a:ea typeface="Calibri" pitchFamily="34" charset="-122"/>
@@ -2969,7 +2910,7 @@
       </p:sp>
       <p:sp>
         <p:nvSpPr>
-          <p:cNvPr id="8" name="Text 6"/>
+          <p:cNvPr id="6" name="Text 3"/>
           <p:cNvSpPr/>
           <p:nvPr/>
         </p:nvSpPr>
@@ -2994,11 +2935,11 @@
             <a:r>
               <a:rPr lang="en-US" sz="12000" b="1" dirty="0">
                 <a:solidFill>
-                  <a:srgbClr val="16314F"/>
-                </a:solidFill>
-                <a:latin typeface="Bookman Old Style" pitchFamily="34" charset="0"/>
-                <a:ea typeface="Bookman Old Style" pitchFamily="34" charset="-122"/>
-                <a:cs typeface="Bookman Old Style" pitchFamily="34" charset="-120"/>
+                  <a:srgbClr val="EADFD0"/>
+                </a:solidFill>
+                <a:latin typeface="Georgia" pitchFamily="34" charset="0"/>
+                <a:ea typeface="Georgia" pitchFamily="34" charset="-122"/>
+                <a:cs typeface="Georgia" pitchFamily="34" charset="-120"/>
               </a:rPr>
               <a:t>08</a:t>
             </a:r>
@@ -3008,7 +2949,7 @@
       </p:sp>
       <p:sp>
         <p:nvSpPr>
-          <p:cNvPr id="9" name="Shape 7"/>
+          <p:cNvPr id="7" name="Shape 4"/>
           <p:cNvSpPr/>
           <p:nvPr/>
         </p:nvSpPr>
@@ -3023,7 +2964,7 @@
           <a:noFill/>
           <a:ln w="31750">
             <a:solidFill>
-              <a:srgbClr val="C9A961"/>
+              <a:srgbClr val="B1937E"/>
             </a:solidFill>
             <a:prstDash val="solid"/>
           </a:ln>
@@ -3043,7 +2984,7 @@
     <p:bg>
       <p:bgPr>
         <a:solidFill>
-          <a:srgbClr val="0B1D33"/>
+          <a:srgbClr val="F8F6F3"/>
         </a:solidFill>
       </p:bgPr>
     </p:bg>
@@ -3088,7 +3029,7 @@
             <a:r>
               <a:rPr lang="en-US" sz="1200" b="1" spc="300" kern="0" dirty="0">
                 <a:solidFill>
-                  <a:srgbClr val="4A9EFF"/>
+                  <a:srgbClr val="9A7B66"/>
                 </a:solidFill>
                 <a:latin typeface="Calibri" pitchFamily="34" charset="0"/>
                 <a:ea typeface="Calibri" pitchFamily="34" charset="-122"/>
@@ -3130,11 +3071,11 @@
             <a:r>
               <a:rPr lang="en-US" sz="3200" b="1" dirty="0">
                 <a:solidFill>
-                  <a:srgbClr val="EAF1FA"/>
-                </a:solidFill>
-                <a:latin typeface="Bookman Old Style" pitchFamily="34" charset="0"/>
-                <a:ea typeface="Bookman Old Style" pitchFamily="34" charset="-122"/>
-                <a:cs typeface="Bookman Old Style" pitchFamily="34" charset="-120"/>
+                  <a:srgbClr val="33302B"/>
+                </a:solidFill>
+                <a:latin typeface="Georgia" pitchFamily="34" charset="0"/>
+                <a:ea typeface="Georgia" pitchFamily="34" charset="-122"/>
+                <a:cs typeface="Georgia" pitchFamily="34" charset="-120"/>
               </a:rPr>
               <a:t>Reservas antecipadas</a:t>
             </a:r>
@@ -3159,13 +3100,18 @@
             </a:avLst>
           </a:prstGeom>
           <a:solidFill>
-            <a:srgbClr val="13283F"/>
+            <a:srgbClr val="FFFFFF"/>
           </a:solidFill>
-          <a:ln/>
+          <a:ln w="12700">
+            <a:solidFill>
+              <a:srgbClr val="E3D9CC"/>
+            </a:solidFill>
+            <a:prstDash val="solid"/>
+          </a:ln>
           <a:effectLst>
-            <a:outerShdw sx="100000" sy="100000" kx="0" ky="0" algn="bl" rotWithShape="0" blurRad="127000" dist="38100" dir="5400000">
-              <a:srgbClr val="000000">
-                <a:alpha val="28000"/>
+            <a:outerShdw sx="100000" sy="100000" kx="0" ky="0" algn="bl" rotWithShape="0" blurRad="114300" dist="38100" dir="5400000">
+              <a:srgbClr val="7A6A55">
+                <a:alpha val="12000"/>
               </a:srgbClr>
             </a:outerShdw>
           </a:effectLst>
@@ -3186,9 +3132,14 @@
             <a:avLst/>
           </a:prstGeom>
           <a:solidFill>
-            <a:srgbClr val="16314F"/>
+            <a:srgbClr val="EADFD0"/>
           </a:solidFill>
-          <a:ln/>
+          <a:ln w="9525">
+            <a:solidFill>
+              <a:srgbClr val="E3D9CC"/>
+            </a:solidFill>
+            <a:prstDash val="solid"/>
+          </a:ln>
         </p:spPr>
       </p:sp>
       <p:pic>
@@ -3242,11 +3193,11 @@
             <a:r>
               <a:rPr lang="en-US" sz="1900" b="1" dirty="0">
                 <a:solidFill>
-                  <a:srgbClr val="C9A961"/>
-                </a:solidFill>
-                <a:latin typeface="Bookman Old Style" pitchFamily="34" charset="0"/>
-                <a:ea typeface="Bookman Old Style" pitchFamily="34" charset="-122"/>
-                <a:cs typeface="Bookman Old Style" pitchFamily="34" charset="-120"/>
+                  <a:srgbClr val="B1937E"/>
+                </a:solidFill>
+                <a:latin typeface="Georgia" pitchFamily="34" charset="0"/>
+                <a:ea typeface="Georgia" pitchFamily="34" charset="-122"/>
+                <a:cs typeface="Georgia" pitchFamily="34" charset="-120"/>
               </a:rPr>
               <a:t>Vende com antecedência</a:t>
             </a:r>
@@ -3281,7 +3232,7 @@
             <a:r>
               <a:rPr lang="en-US" sz="1400" dirty="0">
                 <a:solidFill>
-                  <a:srgbClr val="9FB2C9"/>
+                  <a:srgbClr val="8A7E72"/>
                 </a:solidFill>
                 <a:latin typeface="Calibri" pitchFamily="34" charset="0"/>
                 <a:ea typeface="Calibri" pitchFamily="34" charset="-122"/>
@@ -3310,13 +3261,18 @@
             </a:avLst>
           </a:prstGeom>
           <a:solidFill>
-            <a:srgbClr val="13283F"/>
+            <a:srgbClr val="FFFFFF"/>
           </a:solidFill>
-          <a:ln/>
+          <a:ln w="12700">
+            <a:solidFill>
+              <a:srgbClr val="E3D9CC"/>
+            </a:solidFill>
+            <a:prstDash val="solid"/>
+          </a:ln>
           <a:effectLst>
-            <a:outerShdw sx="100000" sy="100000" kx="0" ky="0" algn="bl" rotWithShape="0" blurRad="127000" dist="38100" dir="5400000">
-              <a:srgbClr val="000000">
-                <a:alpha val="28000"/>
+            <a:outerShdw sx="100000" sy="100000" kx="0" ky="0" algn="bl" rotWithShape="0" blurRad="114300" dist="38100" dir="5400000">
+              <a:srgbClr val="7A6A55">
+                <a:alpha val="12000"/>
               </a:srgbClr>
             </a:outerShdw>
           </a:effectLst>
@@ -3337,9 +3293,14 @@
             <a:avLst/>
           </a:prstGeom>
           <a:solidFill>
-            <a:srgbClr val="16314F"/>
+            <a:srgbClr val="EADFD0"/>
           </a:solidFill>
-          <a:ln/>
+          <a:ln w="9525">
+            <a:solidFill>
+              <a:srgbClr val="E3D9CC"/>
+            </a:solidFill>
+            <a:prstDash val="solid"/>
+          </a:ln>
         </p:spPr>
       </p:sp>
       <p:pic>
@@ -3393,11 +3354,11 @@
             <a:r>
               <a:rPr lang="en-US" sz="1900" b="1" dirty="0">
                 <a:solidFill>
-                  <a:srgbClr val="C9A961"/>
-                </a:solidFill>
-                <a:latin typeface="Bookman Old Style" pitchFamily="34" charset="0"/>
-                <a:ea typeface="Bookman Old Style" pitchFamily="34" charset="-122"/>
-                <a:cs typeface="Bookman Old Style" pitchFamily="34" charset="-120"/>
+                  <a:srgbClr val="B1937E"/>
+                </a:solidFill>
+                <a:latin typeface="Georgia" pitchFamily="34" charset="0"/>
+                <a:ea typeface="Georgia" pitchFamily="34" charset="-122"/>
+                <a:cs typeface="Georgia" pitchFamily="34" charset="-120"/>
               </a:rPr>
               <a:t>A prova de que funciona</a:t>
             </a:r>
@@ -3432,7 +3393,7 @@
             <a:r>
               <a:rPr lang="en-US" sz="1400" dirty="0">
                 <a:solidFill>
-                  <a:srgbClr val="9FB2C9"/>
+                  <a:srgbClr val="8A7E72"/>
                 </a:solidFill>
                 <a:latin typeface="Calibri" pitchFamily="34" charset="0"/>
                 <a:ea typeface="Calibri" pitchFamily="34" charset="-122"/>
@@ -3461,13 +3422,18 @@
             </a:avLst>
           </a:prstGeom>
           <a:solidFill>
-            <a:srgbClr val="13283F"/>
+            <a:srgbClr val="FFFFFF"/>
           </a:solidFill>
-          <a:ln/>
+          <a:ln w="12700">
+            <a:solidFill>
+              <a:srgbClr val="E3D9CC"/>
+            </a:solidFill>
+            <a:prstDash val="solid"/>
+          </a:ln>
           <a:effectLst>
-            <a:outerShdw sx="100000" sy="100000" kx="0" ky="0" algn="bl" rotWithShape="0" blurRad="127000" dist="38100" dir="5400000">
-              <a:srgbClr val="000000">
-                <a:alpha val="28000"/>
+            <a:outerShdw sx="100000" sy="100000" kx="0" ky="0" algn="bl" rotWithShape="0" blurRad="114300" dist="38100" dir="5400000">
+              <a:srgbClr val="7A6A55">
+                <a:alpha val="12000"/>
               </a:srgbClr>
             </a:outerShdw>
           </a:effectLst>
@@ -3488,9 +3454,14 @@
             <a:avLst/>
           </a:prstGeom>
           <a:solidFill>
-            <a:srgbClr val="16314F"/>
+            <a:srgbClr val="EADFD0"/>
           </a:solidFill>
-          <a:ln/>
+          <a:ln w="9525">
+            <a:solidFill>
+              <a:srgbClr val="E3D9CC"/>
+            </a:solidFill>
+            <a:prstDash val="solid"/>
+          </a:ln>
         </p:spPr>
       </p:sp>
       <p:pic>
@@ -3544,11 +3515,11 @@
             <a:r>
               <a:rPr lang="en-US" sz="1900" b="1" dirty="0">
                 <a:solidFill>
-                  <a:srgbClr val="C9A961"/>
-                </a:solidFill>
-                <a:latin typeface="Bookman Old Style" pitchFamily="34" charset="0"/>
-                <a:ea typeface="Bookman Old Style" pitchFamily="34" charset="-122"/>
-                <a:cs typeface="Bookman Old Style" pitchFamily="34" charset="-120"/>
+                  <a:srgbClr val="B1937E"/>
+                </a:solidFill>
+                <a:latin typeface="Georgia" pitchFamily="34" charset="0"/>
+                <a:ea typeface="Georgia" pitchFamily="34" charset="-122"/>
+                <a:cs typeface="Georgia" pitchFamily="34" charset="-120"/>
               </a:rPr>
               <a:t>Poder de pricing</a:t>
             </a:r>
@@ -3583,7 +3554,7 @@
             <a:r>
               <a:rPr lang="en-US" sz="1400" dirty="0">
                 <a:solidFill>
-                  <a:srgbClr val="9FB2C9"/>
+                  <a:srgbClr val="8A7E72"/>
                 </a:solidFill>
                 <a:latin typeface="Calibri" pitchFamily="34" charset="0"/>
                 <a:ea typeface="Calibri" pitchFamily="34" charset="-122"/>
@@ -3612,7 +3583,7 @@
           <a:noFill/>
           <a:ln w="9525">
             <a:solidFill>
-              <a:srgbClr val="5C708A">
+              <a:srgbClr val="A89A86">
                 <a:alpha val="60000"/>
               </a:srgbClr>
             </a:solidFill>
@@ -3647,7 +3618,7 @@
             <a:r>
               <a:rPr lang="en-US" sz="900" dirty="0">
                 <a:solidFill>
-                  <a:srgbClr val="5C708A"/>
+                  <a:srgbClr val="A89A86"/>
                 </a:solidFill>
                 <a:latin typeface="Calibri" pitchFamily="34" charset="0"/>
                 <a:ea typeface="Calibri" pitchFamily="34" charset="-122"/>
@@ -3686,7 +3657,7 @@
             <a:r>
               <a:rPr lang="en-US" sz="900" dirty="0">
                 <a:solidFill>
-                  <a:srgbClr val="5C708A"/>
+                  <a:srgbClr val="A89A86"/>
                 </a:solidFill>
                 <a:latin typeface="Calibri" pitchFamily="34" charset="0"/>
                 <a:ea typeface="Calibri" pitchFamily="34" charset="-122"/>
@@ -3712,7 +3683,7 @@
     <p:bg>
       <p:bgPr>
         <a:solidFill>
-          <a:srgbClr val="0B1D33"/>
+          <a:srgbClr val="F8F6F3"/>
         </a:solidFill>
       </p:bgPr>
     </p:bg>
@@ -3732,51 +3703,7 @@
       </p:grpSpPr>
       <p:sp>
         <p:nvSpPr>
-          <p:cNvPr id="2" name="Shape 0"/>
-          <p:cNvSpPr/>
-          <p:nvPr/>
-        </p:nvSpPr>
-        <p:spPr>
-          <a:xfrm>
-            <a:off x="8229600" y="-1463040"/>
-            <a:ext cx="5486400" cy="5486400"/>
-          </a:xfrm>
-          <a:prstGeom prst="ellipse">
-            <a:avLst/>
-          </a:prstGeom>
-          <a:solidFill>
-            <a:srgbClr val="4A9EFF">
-              <a:alpha val="10000"/>
-            </a:srgbClr>
-          </a:solidFill>
-          <a:ln/>
-        </p:spPr>
-      </p:sp>
-      <p:sp>
-        <p:nvSpPr>
-          <p:cNvPr id="3" name="Shape 1"/>
-          <p:cNvSpPr/>
-          <p:nvPr/>
-        </p:nvSpPr>
-        <p:spPr>
-          <a:xfrm>
-            <a:off x="-1463040" y="4206240"/>
-            <a:ext cx="4572000" cy="4572000"/>
-          </a:xfrm>
-          <a:prstGeom prst="ellipse">
-            <a:avLst/>
-          </a:prstGeom>
-          <a:solidFill>
-            <a:srgbClr val="C9A961">
-              <a:alpha val="8000"/>
-            </a:srgbClr>
-          </a:solidFill>
-          <a:ln/>
-        </p:spPr>
-      </p:sp>
-      <p:sp>
-        <p:nvSpPr>
-          <p:cNvPr id="4" name="Text 2"/>
+          <p:cNvPr id="2" name="Text 0"/>
           <p:cNvSpPr/>
           <p:nvPr/>
         </p:nvSpPr>
@@ -3801,7 +3728,7 @@
             <a:r>
               <a:rPr lang="en-US" sz="1200" b="1" spc="300" kern="0" dirty="0">
                 <a:solidFill>
-                  <a:srgbClr val="4A9EFF"/>
+                  <a:srgbClr val="9A7B66"/>
                 </a:solidFill>
                 <a:latin typeface="Calibri" pitchFamily="34" charset="0"/>
                 <a:ea typeface="Calibri" pitchFamily="34" charset="-122"/>
@@ -3815,7 +3742,7 @@
       </p:sp>
       <p:sp>
         <p:nvSpPr>
-          <p:cNvPr id="5" name="Shape 3"/>
+          <p:cNvPr id="3" name="Shape 1"/>
           <p:cNvSpPr/>
           <p:nvPr/>
         </p:nvSpPr>
@@ -3828,14 +3755,19 @@
             <a:avLst/>
           </a:prstGeom>
           <a:solidFill>
-            <a:srgbClr val="16314F"/>
+            <a:srgbClr val="EADFD0"/>
           </a:solidFill>
-          <a:ln/>
+          <a:ln w="9525">
+            <a:solidFill>
+              <a:srgbClr val="E3D9CC"/>
+            </a:solidFill>
+            <a:prstDash val="solid"/>
+          </a:ln>
         </p:spPr>
       </p:sp>
       <p:pic>
         <p:nvPicPr>
-          <p:cNvPr id="6" name="Image 0" descr="preencoded.png">    </p:cNvPr>
+          <p:cNvPr id="4" name="Image 0" descr="preencoded.png">    </p:cNvPr>
           <p:cNvPicPr>
             <a:picLocks noChangeAspect="1"/>
           </p:cNvPicPr>
@@ -3859,7 +3791,7 @@
       </p:pic>
       <p:sp>
         <p:nvSpPr>
-          <p:cNvPr id="7" name="Text 4"/>
+          <p:cNvPr id="5" name="Text 2"/>
           <p:cNvSpPr/>
           <p:nvPr/>
         </p:nvSpPr>
@@ -3887,11 +3819,11 @@
             <a:r>
               <a:rPr lang="en-US" sz="2800" b="1" i="1" dirty="0">
                 <a:solidFill>
-                  <a:srgbClr val="EAF1FA"/>
-                </a:solidFill>
-                <a:latin typeface="Bookman Old Style" pitchFamily="34" charset="0"/>
-                <a:ea typeface="Bookman Old Style" pitchFamily="34" charset="-122"/>
-                <a:cs typeface="Bookman Old Style" pitchFamily="34" charset="-120"/>
+                  <a:srgbClr val="33302B"/>
+                </a:solidFill>
+                <a:latin typeface="Georgia" pitchFamily="34" charset="0"/>
+                <a:ea typeface="Georgia" pitchFamily="34" charset="-122"/>
+                <a:cs typeface="Georgia" pitchFamily="34" charset="-120"/>
               </a:rPr>
               <a:t>Quando a procura existe, o preço deixa de ser uma desculpa para ser uma decisão.</a:t>
             </a:r>
@@ -3901,7 +3833,7 @@
       </p:sp>
       <p:sp>
         <p:nvSpPr>
-          <p:cNvPr id="8" name="Text 5"/>
+          <p:cNvPr id="6" name="Text 3"/>
           <p:cNvSpPr/>
           <p:nvPr/>
         </p:nvSpPr>
@@ -3926,7 +3858,7 @@
             <a:r>
               <a:rPr lang="en-US" sz="1600" dirty="0">
                 <a:solidFill>
-                  <a:srgbClr val="9FB2C9"/>
+                  <a:srgbClr val="8A7E72"/>
                 </a:solidFill>
                 <a:latin typeface="Calibri" pitchFamily="34" charset="0"/>
                 <a:ea typeface="Calibri" pitchFamily="34" charset="-122"/>
@@ -3940,7 +3872,7 @@
       </p:sp>
       <p:sp>
         <p:nvSpPr>
-          <p:cNvPr id="9" name="Shape 6"/>
+          <p:cNvPr id="7" name="Shape 4"/>
           <p:cNvSpPr/>
           <p:nvPr/>
         </p:nvSpPr>
@@ -3955,7 +3887,7 @@
           <a:noFill/>
           <a:ln w="9525">
             <a:solidFill>
-              <a:srgbClr val="5C708A">
+              <a:srgbClr val="A89A86">
                 <a:alpha val="60000"/>
               </a:srgbClr>
             </a:solidFill>
@@ -3965,7 +3897,7 @@
       </p:sp>
       <p:sp>
         <p:nvSpPr>
-          <p:cNvPr id="10" name="Text 7"/>
+          <p:cNvPr id="8" name="Text 5"/>
           <p:cNvSpPr/>
           <p:nvPr/>
         </p:nvSpPr>
@@ -3990,7 +3922,7 @@
             <a:r>
               <a:rPr lang="en-US" sz="900" dirty="0">
                 <a:solidFill>
-                  <a:srgbClr val="5C708A"/>
+                  <a:srgbClr val="A89A86"/>
                 </a:solidFill>
                 <a:latin typeface="Calibri" pitchFamily="34" charset="0"/>
                 <a:ea typeface="Calibri" pitchFamily="34" charset="-122"/>
@@ -4004,7 +3936,7 @@
       </p:sp>
       <p:sp>
         <p:nvSpPr>
-          <p:cNvPr id="11" name="Text 8"/>
+          <p:cNvPr id="9" name="Text 6"/>
           <p:cNvSpPr/>
           <p:nvPr/>
         </p:nvSpPr>
@@ -4029,7 +3961,7 @@
             <a:r>
               <a:rPr lang="en-US" sz="900" dirty="0">
                 <a:solidFill>
-                  <a:srgbClr val="5C708A"/>
+                  <a:srgbClr val="A89A86"/>
                 </a:solidFill>
                 <a:latin typeface="Calibri" pitchFamily="34" charset="0"/>
                 <a:ea typeface="Calibri" pitchFamily="34" charset="-122"/>
@@ -4055,7 +3987,7 @@
     <p:bg>
       <p:bgPr>
         <a:solidFill>
-          <a:srgbClr val="0B1D33"/>
+          <a:srgbClr val="F8F6F3"/>
         </a:solidFill>
       </p:bgPr>
     </p:bg>
@@ -4075,51 +4007,7 @@
       </p:grpSpPr>
       <p:sp>
         <p:nvSpPr>
-          <p:cNvPr id="2" name="Shape 0"/>
-          <p:cNvSpPr/>
-          <p:nvPr/>
-        </p:nvSpPr>
-        <p:spPr>
-          <a:xfrm>
-            <a:off x="7772400" y="-1371600"/>
-            <a:ext cx="5486400" cy="5486400"/>
-          </a:xfrm>
-          <a:prstGeom prst="ellipse">
-            <a:avLst/>
-          </a:prstGeom>
-          <a:solidFill>
-            <a:srgbClr val="4A9EFF">
-              <a:alpha val="10000"/>
-            </a:srgbClr>
-          </a:solidFill>
-          <a:ln/>
-        </p:spPr>
-      </p:sp>
-      <p:sp>
-        <p:nvSpPr>
-          <p:cNvPr id="3" name="Shape 1"/>
-          <p:cNvSpPr/>
-          <p:nvPr/>
-        </p:nvSpPr>
-        <p:spPr>
-          <a:xfrm>
-            <a:off x="-1371600" y="4114800"/>
-            <a:ext cx="4572000" cy="4572000"/>
-          </a:xfrm>
-          <a:prstGeom prst="ellipse">
-            <a:avLst/>
-          </a:prstGeom>
-          <a:solidFill>
-            <a:srgbClr val="C9A961">
-              <a:alpha val="8000"/>
-            </a:srgbClr>
-          </a:solidFill>
-          <a:ln/>
-        </p:spPr>
-      </p:sp>
-      <p:sp>
-        <p:nvSpPr>
-          <p:cNvPr id="4" name="Text 2"/>
+          <p:cNvPr id="2" name="Text 0"/>
           <p:cNvSpPr/>
           <p:nvPr/>
         </p:nvSpPr>
@@ -4144,11 +4032,11 @@
             <a:r>
               <a:rPr lang="en-US" sz="15000" b="1" dirty="0">
                 <a:solidFill>
-                  <a:srgbClr val="16314F"/>
-                </a:solidFill>
-                <a:latin typeface="Bookman Old Style" pitchFamily="34" charset="0"/>
-                <a:ea typeface="Bookman Old Style" pitchFamily="34" charset="-122"/>
-                <a:cs typeface="Bookman Old Style" pitchFamily="34" charset="-120"/>
+                  <a:srgbClr val="EADFD0"/>
+                </a:solidFill>
+                <a:latin typeface="Georgia" pitchFamily="34" charset="0"/>
+                <a:ea typeface="Georgia" pitchFamily="34" charset="-122"/>
+                <a:cs typeface="Georgia" pitchFamily="34" charset="-120"/>
               </a:rPr>
               <a:t>C</a:t>
             </a:r>
@@ -4158,7 +4046,7 @@
       </p:sp>
       <p:sp>
         <p:nvSpPr>
-          <p:cNvPr id="5" name="Text 3"/>
+          <p:cNvPr id="3" name="Text 1"/>
           <p:cNvSpPr/>
           <p:nvPr/>
         </p:nvSpPr>
@@ -4183,7 +4071,7 @@
             <a:r>
               <a:rPr lang="en-US" sz="1300" b="1" spc="400" kern="0" dirty="0">
                 <a:solidFill>
-                  <a:srgbClr val="C9A961"/>
+                  <a:srgbClr val="B1937E"/>
                 </a:solidFill>
                 <a:latin typeface="Calibri" pitchFamily="34" charset="0"/>
                 <a:ea typeface="Calibri" pitchFamily="34" charset="-122"/>
@@ -4197,7 +4085,7 @@
       </p:sp>
       <p:sp>
         <p:nvSpPr>
-          <p:cNvPr id="6" name="Text 4"/>
+          <p:cNvPr id="4" name="Text 2"/>
           <p:cNvSpPr/>
           <p:nvPr/>
         </p:nvSpPr>
@@ -4223,23 +4111,23 @@
               <a:buNone/>
             </a:pPr>
             <a:r>
-              <a:rPr lang="en-US" sz="4400" b="1" dirty="0">
-                <a:solidFill>
-                  <a:srgbClr val="EAF1FA"/>
-                </a:solidFill>
-                <a:latin typeface="Bookman Old Style" pitchFamily="34" charset="0"/>
-                <a:ea typeface="Bookman Old Style" pitchFamily="34" charset="-122"/>
-                <a:cs typeface="Bookman Old Style" pitchFamily="34" charset="-120"/>
+              <a:rPr lang="en-US" sz="4000" b="1" dirty="0">
+                <a:solidFill>
+                  <a:srgbClr val="33302B"/>
+                </a:solidFill>
+                <a:latin typeface="Georgia" pitchFamily="34" charset="0"/>
+                <a:ea typeface="Georgia" pitchFamily="34" charset="-122"/>
+                <a:cs typeface="Georgia" pitchFamily="34" charset="-120"/>
               </a:rPr>
               <a:t>Os Sistemas dos 100K</a:t>
             </a:r>
-            <a:endParaRPr lang="en-US" sz="4400" dirty="0"/>
-          </a:p>
-        </p:txBody>
-      </p:sp>
-      <p:sp>
-        <p:nvSpPr>
-          <p:cNvPr id="7" name="Text 5"/>
+            <a:endParaRPr lang="en-US" sz="4000" dirty="0"/>
+          </a:p>
+        </p:txBody>
+      </p:sp>
+      <p:sp>
+        <p:nvSpPr>
+          <p:cNvPr id="5" name="Text 3"/>
           <p:cNvSpPr/>
           <p:nvPr/>
         </p:nvSpPr>
@@ -4264,7 +4152,7 @@
             <a:r>
               <a:rPr lang="en-US" sz="1600" dirty="0">
                 <a:solidFill>
-                  <a:srgbClr val="9FB2C9"/>
+                  <a:srgbClr val="8A7E72"/>
                 </a:solidFill>
                 <a:latin typeface="Calibri" pitchFamily="34" charset="0"/>
                 <a:ea typeface="Calibri" pitchFamily="34" charset="-122"/>
@@ -4278,7 +4166,7 @@
       </p:sp>
       <p:sp>
         <p:nvSpPr>
-          <p:cNvPr id="8" name="Shape 6"/>
+          <p:cNvPr id="6" name="Shape 4"/>
           <p:cNvSpPr/>
           <p:nvPr/>
         </p:nvSpPr>
@@ -4293,7 +4181,7 @@
           <a:noFill/>
           <a:ln w="9525">
             <a:solidFill>
-              <a:srgbClr val="5C708A">
+              <a:srgbClr val="A89A86">
                 <a:alpha val="60000"/>
               </a:srgbClr>
             </a:solidFill>
@@ -4303,7 +4191,7 @@
       </p:sp>
       <p:sp>
         <p:nvSpPr>
-          <p:cNvPr id="9" name="Text 7"/>
+          <p:cNvPr id="7" name="Text 5"/>
           <p:cNvSpPr/>
           <p:nvPr/>
         </p:nvSpPr>
@@ -4328,7 +4216,7 @@
             <a:r>
               <a:rPr lang="en-US" sz="900" dirty="0">
                 <a:solidFill>
-                  <a:srgbClr val="5C708A"/>
+                  <a:srgbClr val="A89A86"/>
                 </a:solidFill>
                 <a:latin typeface="Calibri" pitchFamily="34" charset="0"/>
                 <a:ea typeface="Calibri" pitchFamily="34" charset="-122"/>
@@ -4342,7 +4230,7 @@
       </p:sp>
       <p:sp>
         <p:nvSpPr>
-          <p:cNvPr id="10" name="Text 8"/>
+          <p:cNvPr id="8" name="Text 6"/>
           <p:cNvSpPr/>
           <p:nvPr/>
         </p:nvSpPr>
@@ -4367,7 +4255,7 @@
             <a:r>
               <a:rPr lang="en-US" sz="900" dirty="0">
                 <a:solidFill>
-                  <a:srgbClr val="5C708A"/>
+                  <a:srgbClr val="A89A86"/>
                 </a:solidFill>
                 <a:latin typeface="Calibri" pitchFamily="34" charset="0"/>
                 <a:ea typeface="Calibri" pitchFamily="34" charset="-122"/>
@@ -4393,7 +4281,7 @@
     <p:bg>
       <p:bgPr>
         <a:solidFill>
-          <a:srgbClr val="0B1D33"/>
+          <a:srgbClr val="F8F6F3"/>
         </a:solidFill>
       </p:bgPr>
     </p:bg>
@@ -4413,51 +4301,7 @@
       </p:grpSpPr>
       <p:sp>
         <p:nvSpPr>
-          <p:cNvPr id="2" name="Shape 0"/>
-          <p:cNvSpPr/>
-          <p:nvPr/>
-        </p:nvSpPr>
-        <p:spPr>
-          <a:xfrm>
-            <a:off x="8229600" y="-1463040"/>
-            <a:ext cx="5486400" cy="5486400"/>
-          </a:xfrm>
-          <a:prstGeom prst="ellipse">
-            <a:avLst/>
-          </a:prstGeom>
-          <a:solidFill>
-            <a:srgbClr val="4A9EFF">
-              <a:alpha val="10000"/>
-            </a:srgbClr>
-          </a:solidFill>
-          <a:ln/>
-        </p:spPr>
-      </p:sp>
-      <p:sp>
-        <p:nvSpPr>
-          <p:cNvPr id="3" name="Shape 1"/>
-          <p:cNvSpPr/>
-          <p:nvPr/>
-        </p:nvSpPr>
-        <p:spPr>
-          <a:xfrm>
-            <a:off x="-1463040" y="4206240"/>
-            <a:ext cx="4572000" cy="4572000"/>
-          </a:xfrm>
-          <a:prstGeom prst="ellipse">
-            <a:avLst/>
-          </a:prstGeom>
-          <a:solidFill>
-            <a:srgbClr val="C9A961">
-              <a:alpha val="8000"/>
-            </a:srgbClr>
-          </a:solidFill>
-          <a:ln/>
-        </p:spPr>
-      </p:sp>
-      <p:sp>
-        <p:nvSpPr>
-          <p:cNvPr id="4" name="Text 2"/>
+          <p:cNvPr id="2" name="Text 0"/>
           <p:cNvSpPr/>
           <p:nvPr/>
         </p:nvSpPr>
@@ -4482,7 +4326,7 @@
             <a:r>
               <a:rPr lang="en-US" sz="1200" b="1" spc="300" kern="0" dirty="0">
                 <a:solidFill>
-                  <a:srgbClr val="4A9EFF"/>
+                  <a:srgbClr val="9A7B66"/>
                 </a:solidFill>
                 <a:latin typeface="Calibri" pitchFamily="34" charset="0"/>
                 <a:ea typeface="Calibri" pitchFamily="34" charset="-122"/>
@@ -4496,7 +4340,7 @@
       </p:sp>
       <p:sp>
         <p:nvSpPr>
-          <p:cNvPr id="5" name="Shape 3"/>
+          <p:cNvPr id="3" name="Shape 1"/>
           <p:cNvSpPr/>
           <p:nvPr/>
         </p:nvSpPr>
@@ -4509,14 +4353,19 @@
             <a:avLst/>
           </a:prstGeom>
           <a:solidFill>
-            <a:srgbClr val="16314F"/>
+            <a:srgbClr val="EADFD0"/>
           </a:solidFill>
-          <a:ln/>
+          <a:ln w="9525">
+            <a:solidFill>
+              <a:srgbClr val="E3D9CC"/>
+            </a:solidFill>
+            <a:prstDash val="solid"/>
+          </a:ln>
         </p:spPr>
       </p:sp>
       <p:pic>
         <p:nvPicPr>
-          <p:cNvPr id="6" name="Image 0" descr="preencoded.png">    </p:cNvPr>
+          <p:cNvPr id="4" name="Image 0" descr="preencoded.png">    </p:cNvPr>
           <p:cNvPicPr>
             <a:picLocks noChangeAspect="1"/>
           </p:cNvPicPr>
@@ -4540,7 +4389,7 @@
       </p:pic>
       <p:sp>
         <p:nvSpPr>
-          <p:cNvPr id="7" name="Text 4"/>
+          <p:cNvPr id="5" name="Text 2"/>
           <p:cNvSpPr/>
           <p:nvPr/>
         </p:nvSpPr>
@@ -4568,11 +4417,11 @@
             <a:r>
               <a:rPr lang="en-US" sz="3000" b="1" i="1" dirty="0">
                 <a:solidFill>
-                  <a:srgbClr val="EAF1FA"/>
-                </a:solidFill>
-                <a:latin typeface="Bookman Old Style" pitchFamily="34" charset="0"/>
-                <a:ea typeface="Bookman Old Style" pitchFamily="34" charset="-122"/>
-                <a:cs typeface="Bookman Old Style" pitchFamily="34" charset="-120"/>
+                  <a:srgbClr val="33302B"/>
+                </a:solidFill>
+                <a:latin typeface="Georgia" pitchFamily="34" charset="0"/>
+                <a:ea typeface="Georgia" pitchFamily="34" charset="-122"/>
+                <a:cs typeface="Georgia" pitchFamily="34" charset="-120"/>
               </a:rPr>
               <a:t>O que não se mede, não se melhora.</a:t>
             </a:r>
@@ -4582,7 +4431,7 @@
       </p:sp>
       <p:sp>
         <p:nvSpPr>
-          <p:cNvPr id="8" name="Text 5"/>
+          <p:cNvPr id="6" name="Text 3"/>
           <p:cNvSpPr/>
           <p:nvPr/>
         </p:nvSpPr>
@@ -4607,7 +4456,7 @@
             <a:r>
               <a:rPr lang="en-US" sz="1600" dirty="0">
                 <a:solidFill>
-                  <a:srgbClr val="9FB2C9"/>
+                  <a:srgbClr val="8A7E72"/>
                 </a:solidFill>
                 <a:latin typeface="Calibri" pitchFamily="34" charset="0"/>
                 <a:ea typeface="Calibri" pitchFamily="34" charset="-122"/>
@@ -4621,7 +4470,7 @@
       </p:sp>
       <p:sp>
         <p:nvSpPr>
-          <p:cNvPr id="9" name="Shape 6"/>
+          <p:cNvPr id="7" name="Shape 4"/>
           <p:cNvSpPr/>
           <p:nvPr/>
         </p:nvSpPr>
@@ -4636,7 +4485,7 @@
           <a:noFill/>
           <a:ln w="9525">
             <a:solidFill>
-              <a:srgbClr val="5C708A">
+              <a:srgbClr val="A89A86">
                 <a:alpha val="60000"/>
               </a:srgbClr>
             </a:solidFill>
@@ -4646,7 +4495,7 @@
       </p:sp>
       <p:sp>
         <p:nvSpPr>
-          <p:cNvPr id="10" name="Text 7"/>
+          <p:cNvPr id="8" name="Text 5"/>
           <p:cNvSpPr/>
           <p:nvPr/>
         </p:nvSpPr>
@@ -4671,7 +4520,7 @@
             <a:r>
               <a:rPr lang="en-US" sz="900" dirty="0">
                 <a:solidFill>
-                  <a:srgbClr val="5C708A"/>
+                  <a:srgbClr val="A89A86"/>
                 </a:solidFill>
                 <a:latin typeface="Calibri" pitchFamily="34" charset="0"/>
                 <a:ea typeface="Calibri" pitchFamily="34" charset="-122"/>
@@ -4685,7 +4534,7 @@
       </p:sp>
       <p:sp>
         <p:nvSpPr>
-          <p:cNvPr id="11" name="Text 8"/>
+          <p:cNvPr id="9" name="Text 6"/>
           <p:cNvSpPr/>
           <p:nvPr/>
         </p:nvSpPr>
@@ -4710,7 +4559,7 @@
             <a:r>
               <a:rPr lang="en-US" sz="900" dirty="0">
                 <a:solidFill>
-                  <a:srgbClr val="5C708A"/>
+                  <a:srgbClr val="A89A86"/>
                 </a:solidFill>
                 <a:latin typeface="Calibri" pitchFamily="34" charset="0"/>
                 <a:ea typeface="Calibri" pitchFamily="34" charset="-122"/>
@@ -4736,7 +4585,7 @@
     <p:bg>
       <p:bgPr>
         <a:solidFill>
-          <a:srgbClr val="0B1D33"/>
+          <a:srgbClr val="F8F6F3"/>
         </a:solidFill>
       </p:bgPr>
     </p:bg>
@@ -4781,7 +4630,7 @@
             <a:r>
               <a:rPr lang="en-US" sz="1200" b="1" spc="300" kern="0" dirty="0">
                 <a:solidFill>
-                  <a:srgbClr val="4A9EFF"/>
+                  <a:srgbClr val="9A7B66"/>
                 </a:solidFill>
                 <a:latin typeface="Calibri" pitchFamily="34" charset="0"/>
                 <a:ea typeface="Calibri" pitchFamily="34" charset="-122"/>
@@ -4823,11 +4672,11 @@
             <a:r>
               <a:rPr lang="en-US" sz="3200" b="1" dirty="0">
                 <a:solidFill>
-                  <a:srgbClr val="EAF1FA"/>
-                </a:solidFill>
-                <a:latin typeface="Bookman Old Style" pitchFamily="34" charset="0"/>
-                <a:ea typeface="Bookman Old Style" pitchFamily="34" charset="-122"/>
-                <a:cs typeface="Bookman Old Style" pitchFamily="34" charset="-120"/>
+                  <a:srgbClr val="33302B"/>
+                </a:solidFill>
+                <a:latin typeface="Georgia" pitchFamily="34" charset="0"/>
+                <a:ea typeface="Georgia" pitchFamily="34" charset="-122"/>
+                <a:cs typeface="Georgia" pitchFamily="34" charset="-120"/>
               </a:rPr>
               <a:t>As 4 métricas-chave</a:t>
             </a:r>
@@ -4852,13 +4701,18 @@
             </a:avLst>
           </a:prstGeom>
           <a:solidFill>
-            <a:srgbClr val="13283F"/>
+            <a:srgbClr val="FFFFFF"/>
           </a:solidFill>
-          <a:ln/>
+          <a:ln w="12700">
+            <a:solidFill>
+              <a:srgbClr val="E3D9CC"/>
+            </a:solidFill>
+            <a:prstDash val="solid"/>
+          </a:ln>
           <a:effectLst>
-            <a:outerShdw sx="100000" sy="100000" kx="0" ky="0" algn="bl" rotWithShape="0" blurRad="127000" dist="38100" dir="5400000">
-              <a:srgbClr val="000000">
-                <a:alpha val="28000"/>
+            <a:outerShdw sx="100000" sy="100000" kx="0" ky="0" algn="bl" rotWithShape="0" blurRad="114300" dist="38100" dir="5400000">
+              <a:srgbClr val="7A6A55">
+                <a:alpha val="12000"/>
               </a:srgbClr>
             </a:outerShdw>
           </a:effectLst>
@@ -4879,9 +4733,14 @@
             <a:avLst/>
           </a:prstGeom>
           <a:solidFill>
-            <a:srgbClr val="16314F"/>
+            <a:srgbClr val="EADFD0"/>
           </a:solidFill>
-          <a:ln/>
+          <a:ln w="9525">
+            <a:solidFill>
+              <a:srgbClr val="E3D9CC"/>
+            </a:solidFill>
+            <a:prstDash val="solid"/>
+          </a:ln>
         </p:spPr>
       </p:sp>
       <p:pic>
@@ -4935,11 +4794,11 @@
             <a:r>
               <a:rPr lang="en-US" sz="1800" b="1" dirty="0">
                 <a:solidFill>
-                  <a:srgbClr val="C9A961"/>
-                </a:solidFill>
-                <a:latin typeface="Bookman Old Style" pitchFamily="34" charset="0"/>
-                <a:ea typeface="Bookman Old Style" pitchFamily="34" charset="-122"/>
-                <a:cs typeface="Bookman Old Style" pitchFamily="34" charset="-120"/>
+                  <a:srgbClr val="B1937E"/>
+                </a:solidFill>
+                <a:latin typeface="Georgia" pitchFamily="34" charset="0"/>
+                <a:ea typeface="Georgia" pitchFamily="34" charset="-122"/>
+                <a:cs typeface="Georgia" pitchFamily="34" charset="-120"/>
               </a:rPr>
               <a:t>Leads</a:t>
             </a:r>
@@ -4974,7 +4833,7 @@
             <a:r>
               <a:rPr lang="en-US" sz="1350" dirty="0">
                 <a:solidFill>
-                  <a:srgbClr val="9FB2C9"/>
+                  <a:srgbClr val="8A7E72"/>
                 </a:solidFill>
                 <a:latin typeface="Calibri" pitchFamily="34" charset="0"/>
                 <a:ea typeface="Calibri" pitchFamily="34" charset="-122"/>
@@ -5003,13 +4862,18 @@
             </a:avLst>
           </a:prstGeom>
           <a:solidFill>
-            <a:srgbClr val="13283F"/>
+            <a:srgbClr val="FFFFFF"/>
           </a:solidFill>
-          <a:ln/>
+          <a:ln w="12700">
+            <a:solidFill>
+              <a:srgbClr val="E3D9CC"/>
+            </a:solidFill>
+            <a:prstDash val="solid"/>
+          </a:ln>
           <a:effectLst>
-            <a:outerShdw sx="100000" sy="100000" kx="0" ky="0" algn="bl" rotWithShape="0" blurRad="127000" dist="38100" dir="5400000">
-              <a:srgbClr val="000000">
-                <a:alpha val="28000"/>
+            <a:outerShdw sx="100000" sy="100000" kx="0" ky="0" algn="bl" rotWithShape="0" blurRad="114300" dist="38100" dir="5400000">
+              <a:srgbClr val="7A6A55">
+                <a:alpha val="12000"/>
               </a:srgbClr>
             </a:outerShdw>
           </a:effectLst>
@@ -5030,9 +4894,14 @@
             <a:avLst/>
           </a:prstGeom>
           <a:solidFill>
-            <a:srgbClr val="16314F"/>
+            <a:srgbClr val="EADFD0"/>
           </a:solidFill>
-          <a:ln/>
+          <a:ln w="9525">
+            <a:solidFill>
+              <a:srgbClr val="E3D9CC"/>
+            </a:solidFill>
+            <a:prstDash val="solid"/>
+          </a:ln>
         </p:spPr>
       </p:sp>
       <p:pic>
@@ -5086,11 +4955,11 @@
             <a:r>
               <a:rPr lang="en-US" sz="1800" b="1" dirty="0">
                 <a:solidFill>
-                  <a:srgbClr val="C9A961"/>
-                </a:solidFill>
-                <a:latin typeface="Bookman Old Style" pitchFamily="34" charset="0"/>
-                <a:ea typeface="Bookman Old Style" pitchFamily="34" charset="-122"/>
-                <a:cs typeface="Bookman Old Style" pitchFamily="34" charset="-120"/>
+                  <a:srgbClr val="B1937E"/>
+                </a:solidFill>
+                <a:latin typeface="Georgia" pitchFamily="34" charset="0"/>
+                <a:ea typeface="Georgia" pitchFamily="34" charset="-122"/>
+                <a:cs typeface="Georgia" pitchFamily="34" charset="-120"/>
               </a:rPr>
               <a:t>Taxa de fecho</a:t>
             </a:r>
@@ -5125,7 +4994,7 @@
             <a:r>
               <a:rPr lang="en-US" sz="1350" dirty="0">
                 <a:solidFill>
-                  <a:srgbClr val="9FB2C9"/>
+                  <a:srgbClr val="8A7E72"/>
                 </a:solidFill>
                 <a:latin typeface="Calibri" pitchFamily="34" charset="0"/>
                 <a:ea typeface="Calibri" pitchFamily="34" charset="-122"/>
@@ -5154,13 +5023,18 @@
             </a:avLst>
           </a:prstGeom>
           <a:solidFill>
-            <a:srgbClr val="13283F"/>
+            <a:srgbClr val="FFFFFF"/>
           </a:solidFill>
-          <a:ln/>
+          <a:ln w="12700">
+            <a:solidFill>
+              <a:srgbClr val="E3D9CC"/>
+            </a:solidFill>
+            <a:prstDash val="solid"/>
+          </a:ln>
           <a:effectLst>
-            <a:outerShdw sx="100000" sy="100000" kx="0" ky="0" algn="bl" rotWithShape="0" blurRad="127000" dist="38100" dir="5400000">
-              <a:srgbClr val="000000">
-                <a:alpha val="28000"/>
+            <a:outerShdw sx="100000" sy="100000" kx="0" ky="0" algn="bl" rotWithShape="0" blurRad="114300" dist="38100" dir="5400000">
+              <a:srgbClr val="7A6A55">
+                <a:alpha val="12000"/>
               </a:srgbClr>
             </a:outerShdw>
           </a:effectLst>
@@ -5181,9 +5055,14 @@
             <a:avLst/>
           </a:prstGeom>
           <a:solidFill>
-            <a:srgbClr val="16314F"/>
+            <a:srgbClr val="EADFD0"/>
           </a:solidFill>
-          <a:ln/>
+          <a:ln w="9525">
+            <a:solidFill>
+              <a:srgbClr val="E3D9CC"/>
+            </a:solidFill>
+            <a:prstDash val="solid"/>
+          </a:ln>
         </p:spPr>
       </p:sp>
       <p:pic>
@@ -5237,11 +5116,11 @@
             <a:r>
               <a:rPr lang="en-US" sz="1800" b="1" dirty="0">
                 <a:solidFill>
-                  <a:srgbClr val="C9A961"/>
-                </a:solidFill>
-                <a:latin typeface="Bookman Old Style" pitchFamily="34" charset="0"/>
-                <a:ea typeface="Bookman Old Style" pitchFamily="34" charset="-122"/>
-                <a:cs typeface="Bookman Old Style" pitchFamily="34" charset="-120"/>
+                  <a:srgbClr val="B1937E"/>
+                </a:solidFill>
+                <a:latin typeface="Georgia" pitchFamily="34" charset="0"/>
+                <a:ea typeface="Georgia" pitchFamily="34" charset="-122"/>
+                <a:cs typeface="Georgia" pitchFamily="34" charset="-120"/>
               </a:rPr>
               <a:t>Ticket médio</a:t>
             </a:r>
@@ -5276,7 +5155,7 @@
             <a:r>
               <a:rPr lang="en-US" sz="1350" dirty="0">
                 <a:solidFill>
-                  <a:srgbClr val="9FB2C9"/>
+                  <a:srgbClr val="8A7E72"/>
                 </a:solidFill>
                 <a:latin typeface="Calibri" pitchFamily="34" charset="0"/>
                 <a:ea typeface="Calibri" pitchFamily="34" charset="-122"/>
@@ -5305,13 +5184,18 @@
             </a:avLst>
           </a:prstGeom>
           <a:solidFill>
-            <a:srgbClr val="13283F"/>
+            <a:srgbClr val="FFFFFF"/>
           </a:solidFill>
-          <a:ln/>
+          <a:ln w="12700">
+            <a:solidFill>
+              <a:srgbClr val="E3D9CC"/>
+            </a:solidFill>
+            <a:prstDash val="solid"/>
+          </a:ln>
           <a:effectLst>
-            <a:outerShdw sx="100000" sy="100000" kx="0" ky="0" algn="bl" rotWithShape="0" blurRad="127000" dist="38100" dir="5400000">
-              <a:srgbClr val="000000">
-                <a:alpha val="28000"/>
+            <a:outerShdw sx="100000" sy="100000" kx="0" ky="0" algn="bl" rotWithShape="0" blurRad="114300" dist="38100" dir="5400000">
+              <a:srgbClr val="7A6A55">
+                <a:alpha val="12000"/>
               </a:srgbClr>
             </a:outerShdw>
           </a:effectLst>
@@ -5332,9 +5216,14 @@
             <a:avLst/>
           </a:prstGeom>
           <a:solidFill>
-            <a:srgbClr val="16314F"/>
+            <a:srgbClr val="EADFD0"/>
           </a:solidFill>
-          <a:ln/>
+          <a:ln w="9525">
+            <a:solidFill>
+              <a:srgbClr val="E3D9CC"/>
+            </a:solidFill>
+            <a:prstDash val="solid"/>
+          </a:ln>
         </p:spPr>
       </p:sp>
       <p:pic>
@@ -5388,11 +5277,11 @@
             <a:r>
               <a:rPr lang="en-US" sz="1800" b="1" dirty="0">
                 <a:solidFill>
-                  <a:srgbClr val="C9A961"/>
-                </a:solidFill>
-                <a:latin typeface="Bookman Old Style" pitchFamily="34" charset="0"/>
-                <a:ea typeface="Bookman Old Style" pitchFamily="34" charset="-122"/>
-                <a:cs typeface="Bookman Old Style" pitchFamily="34" charset="-120"/>
+                  <a:srgbClr val="B1937E"/>
+                </a:solidFill>
+                <a:latin typeface="Georgia" pitchFamily="34" charset="0"/>
+                <a:ea typeface="Georgia" pitchFamily="34" charset="-122"/>
+                <a:cs typeface="Georgia" pitchFamily="34" charset="-120"/>
               </a:rPr>
               <a:t>Origem dos clientes</a:t>
             </a:r>
@@ -5427,7 +5316,7 @@
             <a:r>
               <a:rPr lang="en-US" sz="1350" dirty="0">
                 <a:solidFill>
-                  <a:srgbClr val="9FB2C9"/>
+                  <a:srgbClr val="8A7E72"/>
                 </a:solidFill>
                 <a:latin typeface="Calibri" pitchFamily="34" charset="0"/>
                 <a:ea typeface="Calibri" pitchFamily="34" charset="-122"/>
@@ -5456,7 +5345,7 @@
           <a:noFill/>
           <a:ln w="9525">
             <a:solidFill>
-              <a:srgbClr val="5C708A">
+              <a:srgbClr val="A89A86">
                 <a:alpha val="60000"/>
               </a:srgbClr>
             </a:solidFill>
@@ -5491,7 +5380,7 @@
             <a:r>
               <a:rPr lang="en-US" sz="900" dirty="0">
                 <a:solidFill>
-                  <a:srgbClr val="5C708A"/>
+                  <a:srgbClr val="A89A86"/>
                 </a:solidFill>
                 <a:latin typeface="Calibri" pitchFamily="34" charset="0"/>
                 <a:ea typeface="Calibri" pitchFamily="34" charset="-122"/>
@@ -5530,7 +5419,7 @@
             <a:r>
               <a:rPr lang="en-US" sz="900" dirty="0">
                 <a:solidFill>
-                  <a:srgbClr val="5C708A"/>
+                  <a:srgbClr val="A89A86"/>
                 </a:solidFill>
                 <a:latin typeface="Calibri" pitchFamily="34" charset="0"/>
                 <a:ea typeface="Calibri" pitchFamily="34" charset="-122"/>
@@ -5556,7 +5445,7 @@
     <p:bg>
       <p:bgPr>
         <a:solidFill>
-          <a:srgbClr val="0B1D33"/>
+          <a:srgbClr val="F8F6F3"/>
         </a:solidFill>
       </p:bgPr>
     </p:bg>
@@ -5601,7 +5490,7 @@
             <a:r>
               <a:rPr lang="en-US" sz="1200" b="1" spc="300" kern="0" dirty="0">
                 <a:solidFill>
-                  <a:srgbClr val="4A9EFF"/>
+                  <a:srgbClr val="9A7B66"/>
                 </a:solidFill>
                 <a:latin typeface="Calibri" pitchFamily="34" charset="0"/>
                 <a:ea typeface="Calibri" pitchFamily="34" charset="-122"/>
@@ -5643,11 +5532,11 @@
             <a:r>
               <a:rPr lang="en-US" sz="3200" b="1" dirty="0">
                 <a:solidFill>
-                  <a:srgbClr val="EAF1FA"/>
-                </a:solidFill>
-                <a:latin typeface="Bookman Old Style" pitchFamily="34" charset="0"/>
-                <a:ea typeface="Bookman Old Style" pitchFamily="34" charset="-122"/>
-                <a:cs typeface="Bookman Old Style" pitchFamily="34" charset="-120"/>
+                  <a:srgbClr val="33302B"/>
+                </a:solidFill>
+                <a:latin typeface="Georgia" pitchFamily="34" charset="0"/>
+                <a:ea typeface="Georgia" pitchFamily="34" charset="-122"/>
+                <a:cs typeface="Georgia" pitchFamily="34" charset="-120"/>
               </a:rPr>
               <a:t>Automatizar o repetível</a:t>
             </a:r>
@@ -5672,13 +5561,18 @@
             </a:avLst>
           </a:prstGeom>
           <a:solidFill>
-            <a:srgbClr val="13283F"/>
+            <a:srgbClr val="FFFFFF"/>
           </a:solidFill>
-          <a:ln/>
+          <a:ln w="12700">
+            <a:solidFill>
+              <a:srgbClr val="E3D9CC"/>
+            </a:solidFill>
+            <a:prstDash val="solid"/>
+          </a:ln>
           <a:effectLst>
-            <a:outerShdw sx="100000" sy="100000" kx="0" ky="0" algn="bl" rotWithShape="0" blurRad="127000" dist="38100" dir="5400000">
-              <a:srgbClr val="000000">
-                <a:alpha val="28000"/>
+            <a:outerShdw sx="100000" sy="100000" kx="0" ky="0" algn="bl" rotWithShape="0" blurRad="114300" dist="38100" dir="5400000">
+              <a:srgbClr val="7A6A55">
+                <a:alpha val="12000"/>
               </a:srgbClr>
             </a:outerShdw>
           </a:effectLst>
@@ -5699,9 +5593,14 @@
             <a:avLst/>
           </a:prstGeom>
           <a:solidFill>
-            <a:srgbClr val="16314F"/>
+            <a:srgbClr val="EADFD0"/>
           </a:solidFill>
-          <a:ln/>
+          <a:ln w="9525">
+            <a:solidFill>
+              <a:srgbClr val="E3D9CC"/>
+            </a:solidFill>
+            <a:prstDash val="solid"/>
+          </a:ln>
         </p:spPr>
       </p:sp>
       <p:pic>
@@ -5755,11 +5654,11 @@
             <a:r>
               <a:rPr lang="en-US" sz="1900" b="1" dirty="0">
                 <a:solidFill>
-                  <a:srgbClr val="C9A961"/>
-                </a:solidFill>
-                <a:latin typeface="Bookman Old Style" pitchFamily="34" charset="0"/>
-                <a:ea typeface="Bookman Old Style" pitchFamily="34" charset="-122"/>
-                <a:cs typeface="Bookman Old Style" pitchFamily="34" charset="-120"/>
+                  <a:srgbClr val="B1937E"/>
+                </a:solidFill>
+                <a:latin typeface="Georgia" pitchFamily="34" charset="0"/>
+                <a:ea typeface="Georgia" pitchFamily="34" charset="-122"/>
+                <a:cs typeface="Georgia" pitchFamily="34" charset="-120"/>
               </a:rPr>
               <a:t>Respostas e templates</a:t>
             </a:r>
@@ -5794,7 +5693,7 @@
             <a:r>
               <a:rPr lang="en-US" sz="1400" dirty="0">
                 <a:solidFill>
-                  <a:srgbClr val="9FB2C9"/>
+                  <a:srgbClr val="8A7E72"/>
                 </a:solidFill>
                 <a:latin typeface="Calibri" pitchFamily="34" charset="0"/>
                 <a:ea typeface="Calibri" pitchFamily="34" charset="-122"/>
@@ -5823,13 +5722,18 @@
             </a:avLst>
           </a:prstGeom>
           <a:solidFill>
-            <a:srgbClr val="13283F"/>
+            <a:srgbClr val="FFFFFF"/>
           </a:solidFill>
-          <a:ln/>
+          <a:ln w="12700">
+            <a:solidFill>
+              <a:srgbClr val="E3D9CC"/>
+            </a:solidFill>
+            <a:prstDash val="solid"/>
+          </a:ln>
           <a:effectLst>
-            <a:outerShdw sx="100000" sy="100000" kx="0" ky="0" algn="bl" rotWithShape="0" blurRad="127000" dist="38100" dir="5400000">
-              <a:srgbClr val="000000">
-                <a:alpha val="28000"/>
+            <a:outerShdw sx="100000" sy="100000" kx="0" ky="0" algn="bl" rotWithShape="0" blurRad="114300" dist="38100" dir="5400000">
+              <a:srgbClr val="7A6A55">
+                <a:alpha val="12000"/>
               </a:srgbClr>
             </a:outerShdw>
           </a:effectLst>
@@ -5850,9 +5754,14 @@
             <a:avLst/>
           </a:prstGeom>
           <a:solidFill>
-            <a:srgbClr val="16314F"/>
+            <a:srgbClr val="EADFD0"/>
           </a:solidFill>
-          <a:ln/>
+          <a:ln w="9525">
+            <a:solidFill>
+              <a:srgbClr val="E3D9CC"/>
+            </a:solidFill>
+            <a:prstDash val="solid"/>
+          </a:ln>
         </p:spPr>
       </p:sp>
       <p:pic>
@@ -5906,11 +5815,11 @@
             <a:r>
               <a:rPr lang="en-US" sz="1900" b="1" dirty="0">
                 <a:solidFill>
-                  <a:srgbClr val="C9A961"/>
-                </a:solidFill>
-                <a:latin typeface="Bookman Old Style" pitchFamily="34" charset="0"/>
-                <a:ea typeface="Bookman Old Style" pitchFamily="34" charset="-122"/>
-                <a:cs typeface="Bookman Old Style" pitchFamily="34" charset="-120"/>
+                  <a:srgbClr val="B1937E"/>
+                </a:solidFill>
+                <a:latin typeface="Georgia" pitchFamily="34" charset="0"/>
+                <a:ea typeface="Georgia" pitchFamily="34" charset="-122"/>
+                <a:cs typeface="Georgia" pitchFamily="34" charset="-120"/>
               </a:rPr>
               <a:t>Lembretes e cronogramas</a:t>
             </a:r>
@@ -5945,7 +5854,7 @@
             <a:r>
               <a:rPr lang="en-US" sz="1400" dirty="0">
                 <a:solidFill>
-                  <a:srgbClr val="9FB2C9"/>
+                  <a:srgbClr val="8A7E72"/>
                 </a:solidFill>
                 <a:latin typeface="Calibri" pitchFamily="34" charset="0"/>
                 <a:ea typeface="Calibri" pitchFamily="34" charset="-122"/>
@@ -5974,13 +5883,18 @@
             </a:avLst>
           </a:prstGeom>
           <a:solidFill>
-            <a:srgbClr val="13283F"/>
+            <a:srgbClr val="FFFFFF"/>
           </a:solidFill>
-          <a:ln/>
+          <a:ln w="12700">
+            <a:solidFill>
+              <a:srgbClr val="E3D9CC"/>
+            </a:solidFill>
+            <a:prstDash val="solid"/>
+          </a:ln>
           <a:effectLst>
-            <a:outerShdw sx="100000" sy="100000" kx="0" ky="0" algn="bl" rotWithShape="0" blurRad="127000" dist="38100" dir="5400000">
-              <a:srgbClr val="000000">
-                <a:alpha val="28000"/>
+            <a:outerShdw sx="100000" sy="100000" kx="0" ky="0" algn="bl" rotWithShape="0" blurRad="114300" dist="38100" dir="5400000">
+              <a:srgbClr val="7A6A55">
+                <a:alpha val="12000"/>
               </a:srgbClr>
             </a:outerShdw>
           </a:effectLst>
@@ -6001,9 +5915,14 @@
             <a:avLst/>
           </a:prstGeom>
           <a:solidFill>
-            <a:srgbClr val="16314F"/>
+            <a:srgbClr val="EADFD0"/>
           </a:solidFill>
-          <a:ln/>
+          <a:ln w="9525">
+            <a:solidFill>
+              <a:srgbClr val="E3D9CC"/>
+            </a:solidFill>
+            <a:prstDash val="solid"/>
+          </a:ln>
         </p:spPr>
       </p:sp>
       <p:pic>
@@ -6057,11 +5976,11 @@
             <a:r>
               <a:rPr lang="en-US" sz="1900" b="1" dirty="0">
                 <a:solidFill>
-                  <a:srgbClr val="C9A961"/>
-                </a:solidFill>
-                <a:latin typeface="Bookman Old Style" pitchFamily="34" charset="0"/>
-                <a:ea typeface="Bookman Old Style" pitchFamily="34" charset="-122"/>
-                <a:cs typeface="Bookman Old Style" pitchFamily="34" charset="-120"/>
+                  <a:srgbClr val="B1937E"/>
+                </a:solidFill>
+                <a:latin typeface="Georgia" pitchFamily="34" charset="0"/>
+                <a:ea typeface="Georgia" pitchFamily="34" charset="-122"/>
+                <a:cs typeface="Georgia" pitchFamily="34" charset="-120"/>
               </a:rPr>
               <a:t>Contratos e portal</a:t>
             </a:r>
@@ -6096,7 +6015,7 @@
             <a:r>
               <a:rPr lang="en-US" sz="1400" dirty="0">
                 <a:solidFill>
-                  <a:srgbClr val="9FB2C9"/>
+                  <a:srgbClr val="8A7E72"/>
                 </a:solidFill>
                 <a:latin typeface="Calibri" pitchFamily="34" charset="0"/>
                 <a:ea typeface="Calibri" pitchFamily="34" charset="-122"/>
@@ -6125,7 +6044,7 @@
           <a:noFill/>
           <a:ln w="9525">
             <a:solidFill>
-              <a:srgbClr val="5C708A">
+              <a:srgbClr val="A89A86">
                 <a:alpha val="60000"/>
               </a:srgbClr>
             </a:solidFill>
@@ -6160,7 +6079,7 @@
             <a:r>
               <a:rPr lang="en-US" sz="900" dirty="0">
                 <a:solidFill>
-                  <a:srgbClr val="5C708A"/>
+                  <a:srgbClr val="A89A86"/>
                 </a:solidFill>
                 <a:latin typeface="Calibri" pitchFamily="34" charset="0"/>
                 <a:ea typeface="Calibri" pitchFamily="34" charset="-122"/>
@@ -6199,7 +6118,7 @@
             <a:r>
               <a:rPr lang="en-US" sz="900" dirty="0">
                 <a:solidFill>
-                  <a:srgbClr val="5C708A"/>
+                  <a:srgbClr val="A89A86"/>
                 </a:solidFill>
                 <a:latin typeface="Calibri" pitchFamily="34" charset="0"/>
                 <a:ea typeface="Calibri" pitchFamily="34" charset="-122"/>
@@ -6225,7 +6144,7 @@
     <p:bg>
       <p:bgPr>
         <a:solidFill>
-          <a:srgbClr val="0B1D33"/>
+          <a:srgbClr val="F8F6F3"/>
         </a:solidFill>
       </p:bgPr>
     </p:bg>
@@ -6270,7 +6189,7 @@
             <a:r>
               <a:rPr lang="en-US" sz="1200" b="1" spc="300" kern="0" dirty="0">
                 <a:solidFill>
-                  <a:srgbClr val="4A9EFF"/>
+                  <a:srgbClr val="9A7B66"/>
                 </a:solidFill>
                 <a:latin typeface="Calibri" pitchFamily="34" charset="0"/>
                 <a:ea typeface="Calibri" pitchFamily="34" charset="-122"/>
@@ -6312,11 +6231,11 @@
             <a:r>
               <a:rPr lang="en-US" sz="3200" b="1" dirty="0">
                 <a:solidFill>
-                  <a:srgbClr val="EAF1FA"/>
-                </a:solidFill>
-                <a:latin typeface="Bookman Old Style" pitchFamily="34" charset="0"/>
-                <a:ea typeface="Bookman Old Style" pitchFamily="34" charset="-122"/>
-                <a:cs typeface="Bookman Old Style" pitchFamily="34" charset="-120"/>
+                  <a:srgbClr val="33302B"/>
+                </a:solidFill>
+                <a:latin typeface="Georgia" pitchFamily="34" charset="0"/>
+                <a:ea typeface="Georgia" pitchFamily="34" charset="-122"/>
+                <a:cs typeface="Georgia" pitchFamily="34" charset="-120"/>
               </a:rPr>
               <a:t>Os 100k como patamar, não pico</a:t>
             </a:r>
@@ -6341,13 +6260,18 @@
             </a:avLst>
           </a:prstGeom>
           <a:solidFill>
-            <a:srgbClr val="13283F"/>
+            <a:srgbClr val="FFFFFF"/>
           </a:solidFill>
-          <a:ln/>
+          <a:ln w="12700">
+            <a:solidFill>
+              <a:srgbClr val="E3D9CC"/>
+            </a:solidFill>
+            <a:prstDash val="solid"/>
+          </a:ln>
           <a:effectLst>
-            <a:outerShdw sx="100000" sy="100000" kx="0" ky="0" algn="bl" rotWithShape="0" blurRad="127000" dist="38100" dir="5400000">
-              <a:srgbClr val="000000">
-                <a:alpha val="28000"/>
+            <a:outerShdw sx="100000" sy="100000" kx="0" ky="0" algn="bl" rotWithShape="0" blurRad="114300" dist="38100" dir="5400000">
+              <a:srgbClr val="7A6A55">
+                <a:alpha val="12000"/>
               </a:srgbClr>
             </a:outerShdw>
           </a:effectLst>
@@ -6380,11 +6304,11 @@
             <a:r>
               <a:rPr lang="en-US" sz="4600" b="1" dirty="0">
                 <a:solidFill>
-                  <a:srgbClr val="C9A961"/>
-                </a:solidFill>
-                <a:latin typeface="Bookman Old Style" pitchFamily="34" charset="0"/>
-                <a:ea typeface="Bookman Old Style" pitchFamily="34" charset="-122"/>
-                <a:cs typeface="Bookman Old Style" pitchFamily="34" charset="-120"/>
+                  <a:srgbClr val="B1937E"/>
+                </a:solidFill>
+                <a:latin typeface="Georgia" pitchFamily="34" charset="0"/>
+                <a:ea typeface="Georgia" pitchFamily="34" charset="-122"/>
+                <a:cs typeface="Georgia" pitchFamily="34" charset="-120"/>
               </a:rPr>
               <a:t>sistema</a:t>
             </a:r>
@@ -6419,7 +6343,7 @@
             <a:r>
               <a:rPr lang="en-US" sz="1500" b="1" dirty="0">
                 <a:solidFill>
-                  <a:srgbClr val="EAF1FA"/>
+                  <a:srgbClr val="33302B"/>
                 </a:solidFill>
                 <a:latin typeface="Calibri" pitchFamily="34" charset="0"/>
                 <a:ea typeface="Calibri" pitchFamily="34" charset="-122"/>
@@ -6448,7 +6372,7 @@
           <a:noFill/>
           <a:ln w="9525">
             <a:solidFill>
-              <a:srgbClr val="5C708A">
+              <a:srgbClr val="A89A86">
                 <a:alpha val="60000"/>
               </a:srgbClr>
             </a:solidFill>
@@ -6483,7 +6407,7 @@
             <a:r>
               <a:rPr lang="en-US" sz="1300" dirty="0">
                 <a:solidFill>
-                  <a:srgbClr val="9FB2C9"/>
+                  <a:srgbClr val="8A7E72"/>
                 </a:solidFill>
                 <a:latin typeface="Calibri" pitchFamily="34" charset="0"/>
                 <a:ea typeface="Calibri" pitchFamily="34" charset="-122"/>
@@ -6512,13 +6436,18 @@
             </a:avLst>
           </a:prstGeom>
           <a:solidFill>
-            <a:srgbClr val="13283F"/>
+            <a:srgbClr val="FFFFFF"/>
           </a:solidFill>
-          <a:ln/>
+          <a:ln w="12700">
+            <a:solidFill>
+              <a:srgbClr val="E3D9CC"/>
+            </a:solidFill>
+            <a:prstDash val="solid"/>
+          </a:ln>
           <a:effectLst>
-            <a:outerShdw sx="100000" sy="100000" kx="0" ky="0" algn="bl" rotWithShape="0" blurRad="127000" dist="38100" dir="5400000">
-              <a:srgbClr val="000000">
-                <a:alpha val="28000"/>
+            <a:outerShdw sx="100000" sy="100000" kx="0" ky="0" algn="bl" rotWithShape="0" blurRad="114300" dist="38100" dir="5400000">
+              <a:srgbClr val="7A6A55">
+                <a:alpha val="12000"/>
               </a:srgbClr>
             </a:outerShdw>
           </a:effectLst>
@@ -6551,11 +6480,11 @@
             <a:r>
               <a:rPr lang="en-US" sz="3400" b="1" dirty="0">
                 <a:solidFill>
-                  <a:srgbClr val="4A9EFF"/>
-                </a:solidFill>
-                <a:latin typeface="Bookman Old Style" pitchFamily="34" charset="0"/>
-                <a:ea typeface="Bookman Old Style" pitchFamily="34" charset="-122"/>
-                <a:cs typeface="Bookman Old Style" pitchFamily="34" charset="-120"/>
+                  <a:srgbClr val="9A7B66"/>
+                </a:solidFill>
+                <a:latin typeface="Georgia" pitchFamily="34" charset="0"/>
+                <a:ea typeface="Georgia" pitchFamily="34" charset="-122"/>
+                <a:cs typeface="Georgia" pitchFamily="34" charset="-120"/>
               </a:rPr>
               <a:t>repetível</a:t>
             </a:r>
@@ -6590,7 +6519,7 @@
             <a:r>
               <a:rPr lang="en-US" sz="1500" b="1" dirty="0">
                 <a:solidFill>
-                  <a:srgbClr val="EAF1FA"/>
+                  <a:srgbClr val="33302B"/>
                 </a:solidFill>
                 <a:latin typeface="Calibri" pitchFamily="34" charset="0"/>
                 <a:ea typeface="Calibri" pitchFamily="34" charset="-122"/>
@@ -6619,7 +6548,7 @@
           <a:noFill/>
           <a:ln w="9525">
             <a:solidFill>
-              <a:srgbClr val="5C708A">
+              <a:srgbClr val="A89A86">
                 <a:alpha val="60000"/>
               </a:srgbClr>
             </a:solidFill>
@@ -6654,7 +6583,7 @@
             <a:r>
               <a:rPr lang="en-US" sz="1300" dirty="0">
                 <a:solidFill>
-                  <a:srgbClr val="9FB2C9"/>
+                  <a:srgbClr val="8A7E72"/>
                 </a:solidFill>
                 <a:latin typeface="Calibri" pitchFamily="34" charset="0"/>
                 <a:ea typeface="Calibri" pitchFamily="34" charset="-122"/>
@@ -6683,13 +6612,18 @@
             </a:avLst>
           </a:prstGeom>
           <a:solidFill>
-            <a:srgbClr val="13283F"/>
+            <a:srgbClr val="FFFFFF"/>
           </a:solidFill>
-          <a:ln/>
+          <a:ln w="12700">
+            <a:solidFill>
+              <a:srgbClr val="E3D9CC"/>
+            </a:solidFill>
+            <a:prstDash val="solid"/>
+          </a:ln>
           <a:effectLst>
-            <a:outerShdw sx="100000" sy="100000" kx="0" ky="0" algn="bl" rotWithShape="0" blurRad="127000" dist="38100" dir="5400000">
-              <a:srgbClr val="000000">
-                <a:alpha val="28000"/>
+            <a:outerShdw sx="100000" sy="100000" kx="0" ky="0" algn="bl" rotWithShape="0" blurRad="114300" dist="38100" dir="5400000">
+              <a:srgbClr val="7A6A55">
+                <a:alpha val="12000"/>
               </a:srgbClr>
             </a:outerShdw>
           </a:effectLst>
@@ -6722,11 +6656,11 @@
             <a:r>
               <a:rPr lang="en-US" sz="3400" b="1" dirty="0">
                 <a:solidFill>
-                  <a:srgbClr val="4A9EFF"/>
-                </a:solidFill>
-                <a:latin typeface="Bookman Old Style" pitchFamily="34" charset="0"/>
-                <a:ea typeface="Bookman Old Style" pitchFamily="34" charset="-122"/>
-                <a:cs typeface="Bookman Old Style" pitchFamily="34" charset="-120"/>
+                  <a:srgbClr val="9A7B66"/>
+                </a:solidFill>
+                <a:latin typeface="Georgia" pitchFamily="34" charset="0"/>
+                <a:ea typeface="Georgia" pitchFamily="34" charset="-122"/>
+                <a:cs typeface="Georgia" pitchFamily="34" charset="-120"/>
               </a:rPr>
               <a:t>liberdade</a:t>
             </a:r>
@@ -6761,7 +6695,7 @@
             <a:r>
               <a:rPr lang="en-US" sz="1500" b="1" dirty="0">
                 <a:solidFill>
-                  <a:srgbClr val="EAF1FA"/>
+                  <a:srgbClr val="33302B"/>
                 </a:solidFill>
                 <a:latin typeface="Calibri" pitchFamily="34" charset="0"/>
                 <a:ea typeface="Calibri" pitchFamily="34" charset="-122"/>
@@ -6790,7 +6724,7 @@
           <a:noFill/>
           <a:ln w="9525">
             <a:solidFill>
-              <a:srgbClr val="5C708A">
+              <a:srgbClr val="A89A86">
                 <a:alpha val="60000"/>
               </a:srgbClr>
             </a:solidFill>
@@ -6825,7 +6759,7 @@
             <a:r>
               <a:rPr lang="en-US" sz="1300" dirty="0">
                 <a:solidFill>
-                  <a:srgbClr val="9FB2C9"/>
+                  <a:srgbClr val="8A7E72"/>
                 </a:solidFill>
                 <a:latin typeface="Calibri" pitchFamily="34" charset="0"/>
                 <a:ea typeface="Calibri" pitchFamily="34" charset="-122"/>
@@ -6854,7 +6788,7 @@
           <a:noFill/>
           <a:ln w="9525">
             <a:solidFill>
-              <a:srgbClr val="5C708A">
+              <a:srgbClr val="A89A86">
                 <a:alpha val="60000"/>
               </a:srgbClr>
             </a:solidFill>
@@ -6889,7 +6823,7 @@
             <a:r>
               <a:rPr lang="en-US" sz="900" dirty="0">
                 <a:solidFill>
-                  <a:srgbClr val="5C708A"/>
+                  <a:srgbClr val="A89A86"/>
                 </a:solidFill>
                 <a:latin typeface="Calibri" pitchFamily="34" charset="0"/>
                 <a:ea typeface="Calibri" pitchFamily="34" charset="-122"/>
@@ -6928,7 +6862,7 @@
             <a:r>
               <a:rPr lang="en-US" sz="900" dirty="0">
                 <a:solidFill>
-                  <a:srgbClr val="5C708A"/>
+                  <a:srgbClr val="A89A86"/>
                 </a:solidFill>
                 <a:latin typeface="Calibri" pitchFamily="34" charset="0"/>
                 <a:ea typeface="Calibri" pitchFamily="34" charset="-122"/>
@@ -6954,7 +6888,7 @@
     <p:bg>
       <p:bgPr>
         <a:solidFill>
-          <a:srgbClr val="0B1D33"/>
+          <a:srgbClr val="F8F6F3"/>
         </a:solidFill>
       </p:bgPr>
     </p:bg>
@@ -6999,7 +6933,7 @@
             <a:r>
               <a:rPr lang="en-US" sz="1200" b="1" spc="300" kern="0" dirty="0">
                 <a:solidFill>
-                  <a:srgbClr val="4A9EFF"/>
+                  <a:srgbClr val="9A7B66"/>
                 </a:solidFill>
                 <a:latin typeface="Calibri" pitchFamily="34" charset="0"/>
                 <a:ea typeface="Calibri" pitchFamily="34" charset="-122"/>
@@ -7041,11 +6975,11 @@
             <a:r>
               <a:rPr lang="en-US" sz="3000" b="1" dirty="0">
                 <a:solidFill>
-                  <a:srgbClr val="EAF1FA"/>
-                </a:solidFill>
-                <a:latin typeface="Bookman Old Style" pitchFamily="34" charset="0"/>
-                <a:ea typeface="Bookman Old Style" pitchFamily="34" charset="-122"/>
-                <a:cs typeface="Bookman Old Style" pitchFamily="34" charset="-120"/>
+                  <a:srgbClr val="33302B"/>
+                </a:solidFill>
+                <a:latin typeface="Georgia" pitchFamily="34" charset="0"/>
+                <a:ea typeface="Georgia" pitchFamily="34" charset="-122"/>
+                <a:cs typeface="Georgia" pitchFamily="34" charset="-120"/>
               </a:rPr>
               <a:t>A jornada completa</a:t>
             </a:r>
@@ -7070,13 +7004,18 @@
             </a:avLst>
           </a:prstGeom>
           <a:solidFill>
-            <a:srgbClr val="13283F"/>
+            <a:srgbClr val="FFFFFF"/>
           </a:solidFill>
-          <a:ln/>
+          <a:ln w="12700">
+            <a:solidFill>
+              <a:srgbClr val="E3D9CC"/>
+            </a:solidFill>
+            <a:prstDash val="solid"/>
+          </a:ln>
           <a:effectLst>
-            <a:outerShdw sx="100000" sy="100000" kx="0" ky="0" algn="bl" rotWithShape="0" blurRad="127000" dist="38100" dir="5400000">
-              <a:srgbClr val="000000">
-                <a:alpha val="28000"/>
+            <a:outerShdw sx="100000" sy="100000" kx="0" ky="0" algn="bl" rotWithShape="0" blurRad="114300" dist="38100" dir="5400000">
+              <a:srgbClr val="7A6A55">
+                <a:alpha val="12000"/>
               </a:srgbClr>
             </a:outerShdw>
           </a:effectLst>
@@ -7097,9 +7036,14 @@
             <a:avLst/>
           </a:prstGeom>
           <a:solidFill>
-            <a:srgbClr val="16314F"/>
+            <a:srgbClr val="EADFD0"/>
           </a:solidFill>
-          <a:ln/>
+          <a:ln w="9525">
+            <a:solidFill>
+              <a:srgbClr val="E3D9CC"/>
+            </a:solidFill>
+            <a:prstDash val="solid"/>
+          </a:ln>
         </p:spPr>
       </p:sp>
       <p:pic>
@@ -7153,11 +7097,11 @@
             <a:r>
               <a:rPr lang="en-US" sz="1700" b="1" dirty="0">
                 <a:solidFill>
-                  <a:srgbClr val="EAF1FA"/>
-                </a:solidFill>
-                <a:latin typeface="Bookman Old Style" pitchFamily="34" charset="0"/>
-                <a:ea typeface="Bookman Old Style" pitchFamily="34" charset="-122"/>
-                <a:cs typeface="Bookman Old Style" pitchFamily="34" charset="-120"/>
+                  <a:srgbClr val="33302B"/>
+                </a:solidFill>
+                <a:latin typeface="Georgia" pitchFamily="34" charset="0"/>
+                <a:ea typeface="Georgia" pitchFamily="34" charset="-122"/>
+                <a:cs typeface="Georgia" pitchFamily="34" charset="-120"/>
               </a:rPr>
               <a:t>Posiciona &amp; atrai</a:t>
             </a:r>
@@ -7192,7 +7136,7 @@
             <a:r>
               <a:rPr lang="en-US" sz="1250" dirty="0">
                 <a:solidFill>
-                  <a:srgbClr val="9FB2C9"/>
+                  <a:srgbClr val="8A7E72"/>
                 </a:solidFill>
                 <a:latin typeface="Calibri" pitchFamily="34" charset="0"/>
                 <a:ea typeface="Calibri" pitchFamily="34" charset="-122"/>
@@ -7245,13 +7189,18 @@
             </a:avLst>
           </a:prstGeom>
           <a:solidFill>
-            <a:srgbClr val="13283F"/>
+            <a:srgbClr val="FFFFFF"/>
           </a:solidFill>
-          <a:ln/>
+          <a:ln w="12700">
+            <a:solidFill>
+              <a:srgbClr val="E3D9CC"/>
+            </a:solidFill>
+            <a:prstDash val="solid"/>
+          </a:ln>
           <a:effectLst>
-            <a:outerShdw sx="100000" sy="100000" kx="0" ky="0" algn="bl" rotWithShape="0" blurRad="127000" dist="38100" dir="5400000">
-              <a:srgbClr val="000000">
-                <a:alpha val="28000"/>
+            <a:outerShdw sx="100000" sy="100000" kx="0" ky="0" algn="bl" rotWithShape="0" blurRad="114300" dist="38100" dir="5400000">
+              <a:srgbClr val="7A6A55">
+                <a:alpha val="12000"/>
               </a:srgbClr>
             </a:outerShdw>
           </a:effectLst>
@@ -7272,9 +7221,14 @@
             <a:avLst/>
           </a:prstGeom>
           <a:solidFill>
-            <a:srgbClr val="16314F"/>
+            <a:srgbClr val="EADFD0"/>
           </a:solidFill>
-          <a:ln/>
+          <a:ln w="9525">
+            <a:solidFill>
+              <a:srgbClr val="E3D9CC"/>
+            </a:solidFill>
+            <a:prstDash val="solid"/>
+          </a:ln>
         </p:spPr>
       </p:sp>
       <p:pic>
@@ -7328,11 +7282,11 @@
             <a:r>
               <a:rPr lang="en-US" sz="1700" b="1" dirty="0">
                 <a:solidFill>
-                  <a:srgbClr val="EAF1FA"/>
-                </a:solidFill>
-                <a:latin typeface="Bookman Old Style" pitchFamily="34" charset="0"/>
-                <a:ea typeface="Bookman Old Style" pitchFamily="34" charset="-122"/>
-                <a:cs typeface="Bookman Old Style" pitchFamily="34" charset="-120"/>
+                  <a:srgbClr val="33302B"/>
+                </a:solidFill>
+                <a:latin typeface="Georgia" pitchFamily="34" charset="0"/>
+                <a:ea typeface="Georgia" pitchFamily="34" charset="-122"/>
+                <a:cs typeface="Georgia" pitchFamily="34" charset="-120"/>
               </a:rPr>
               <a:t>Capta &amp; fecha</a:t>
             </a:r>
@@ -7367,7 +7321,7 @@
             <a:r>
               <a:rPr lang="en-US" sz="1250" dirty="0">
                 <a:solidFill>
-                  <a:srgbClr val="9FB2C9"/>
+                  <a:srgbClr val="8A7E72"/>
                 </a:solidFill>
                 <a:latin typeface="Calibri" pitchFamily="34" charset="0"/>
                 <a:ea typeface="Calibri" pitchFamily="34" charset="-122"/>
@@ -7420,13 +7374,18 @@
             </a:avLst>
           </a:prstGeom>
           <a:solidFill>
-            <a:srgbClr val="13283F"/>
+            <a:srgbClr val="FFFFFF"/>
           </a:solidFill>
-          <a:ln/>
+          <a:ln w="12700">
+            <a:solidFill>
+              <a:srgbClr val="E3D9CC"/>
+            </a:solidFill>
+            <a:prstDash val="solid"/>
+          </a:ln>
           <a:effectLst>
-            <a:outerShdw sx="100000" sy="100000" kx="0" ky="0" algn="bl" rotWithShape="0" blurRad="127000" dist="38100" dir="5400000">
-              <a:srgbClr val="000000">
-                <a:alpha val="28000"/>
+            <a:outerShdw sx="100000" sy="100000" kx="0" ky="0" algn="bl" rotWithShape="0" blurRad="114300" dist="38100" dir="5400000">
+              <a:srgbClr val="7A6A55">
+                <a:alpha val="12000"/>
               </a:srgbClr>
             </a:outerShdw>
           </a:effectLst>
@@ -7447,9 +7406,14 @@
             <a:avLst/>
           </a:prstGeom>
           <a:solidFill>
-            <a:srgbClr val="16314F"/>
+            <a:srgbClr val="EADFD0"/>
           </a:solidFill>
-          <a:ln/>
+          <a:ln w="9525">
+            <a:solidFill>
+              <a:srgbClr val="E3D9CC"/>
+            </a:solidFill>
+            <a:prstDash val="solid"/>
+          </a:ln>
         </p:spPr>
       </p:sp>
       <p:pic>
@@ -7503,11 +7467,11 @@
             <a:r>
               <a:rPr lang="en-US" sz="1700" b="1" dirty="0">
                 <a:solidFill>
-                  <a:srgbClr val="EAF1FA"/>
-                </a:solidFill>
-                <a:latin typeface="Bookman Old Style" pitchFamily="34" charset="0"/>
-                <a:ea typeface="Bookman Old Style" pitchFamily="34" charset="-122"/>
-                <a:cs typeface="Bookman Old Style" pitchFamily="34" charset="-120"/>
+                  <a:srgbClr val="33302B"/>
+                </a:solidFill>
+                <a:latin typeface="Georgia" pitchFamily="34" charset="0"/>
+                <a:ea typeface="Georgia" pitchFamily="34" charset="-122"/>
+                <a:cs typeface="Georgia" pitchFamily="34" charset="-120"/>
               </a:rPr>
               <a:t>Encanta &amp; entrega</a:t>
             </a:r>
@@ -7542,7 +7506,7 @@
             <a:r>
               <a:rPr lang="en-US" sz="1250" dirty="0">
                 <a:solidFill>
-                  <a:srgbClr val="9FB2C9"/>
+                  <a:srgbClr val="8A7E72"/>
                 </a:solidFill>
                 <a:latin typeface="Calibri" pitchFamily="34" charset="0"/>
                 <a:ea typeface="Calibri" pitchFamily="34" charset="-122"/>
@@ -7595,13 +7559,18 @@
             </a:avLst>
           </a:prstGeom>
           <a:solidFill>
-            <a:srgbClr val="13283F"/>
+            <a:srgbClr val="FFFFFF"/>
           </a:solidFill>
-          <a:ln/>
+          <a:ln w="12700">
+            <a:solidFill>
+              <a:srgbClr val="E3D9CC"/>
+            </a:solidFill>
+            <a:prstDash val="solid"/>
+          </a:ln>
           <a:effectLst>
-            <a:outerShdw sx="100000" sy="100000" kx="0" ky="0" algn="bl" rotWithShape="0" blurRad="127000" dist="38100" dir="5400000">
-              <a:srgbClr val="000000">
-                <a:alpha val="28000"/>
+            <a:outerShdw sx="100000" sy="100000" kx="0" ky="0" algn="bl" rotWithShape="0" blurRad="114300" dist="38100" dir="5400000">
+              <a:srgbClr val="7A6A55">
+                <a:alpha val="12000"/>
               </a:srgbClr>
             </a:outerShdw>
           </a:effectLst>
@@ -7622,9 +7591,14 @@
             <a:avLst/>
           </a:prstGeom>
           <a:solidFill>
-            <a:srgbClr val="16314F"/>
+            <a:srgbClr val="EADFD0"/>
           </a:solidFill>
-          <a:ln/>
+          <a:ln w="9525">
+            <a:solidFill>
+              <a:srgbClr val="E3D9CC"/>
+            </a:solidFill>
+            <a:prstDash val="solid"/>
+          </a:ln>
         </p:spPr>
       </p:sp>
       <p:pic>
@@ -7678,11 +7652,11 @@
             <a:r>
               <a:rPr lang="en-US" sz="1700" b="1" dirty="0">
                 <a:solidFill>
-                  <a:srgbClr val="EAF1FA"/>
-                </a:solidFill>
-                <a:latin typeface="Bookman Old Style" pitchFamily="34" charset="0"/>
-                <a:ea typeface="Bookman Old Style" pitchFamily="34" charset="-122"/>
-                <a:cs typeface="Bookman Old Style" pitchFamily="34" charset="-120"/>
+                  <a:srgbClr val="33302B"/>
+                </a:solidFill>
+                <a:latin typeface="Georgia" pitchFamily="34" charset="0"/>
+                <a:ea typeface="Georgia" pitchFamily="34" charset="-122"/>
+                <a:cs typeface="Georgia" pitchFamily="34" charset="-120"/>
               </a:rPr>
               <a:t>Escala &amp; repete</a:t>
             </a:r>
@@ -7717,7 +7691,7 @@
             <a:r>
               <a:rPr lang="en-US" sz="1250" dirty="0">
                 <a:solidFill>
-                  <a:srgbClr val="9FB2C9"/>
+                  <a:srgbClr val="8A7E72"/>
                 </a:solidFill>
                 <a:latin typeface="Calibri" pitchFamily="34" charset="0"/>
                 <a:ea typeface="Calibri" pitchFamily="34" charset="-122"/>
@@ -7756,7 +7730,7 @@
             <a:r>
               <a:rPr lang="en-US" sz="1500" i="1" dirty="0">
                 <a:solidFill>
-                  <a:srgbClr val="C9A961"/>
+                  <a:srgbClr val="B1937E"/>
                 </a:solidFill>
                 <a:latin typeface="Calibri" pitchFamily="34" charset="0"/>
                 <a:ea typeface="Calibri" pitchFamily="34" charset="-122"/>
@@ -7785,7 +7759,7 @@
           <a:noFill/>
           <a:ln w="9525">
             <a:solidFill>
-              <a:srgbClr val="5C708A">
+              <a:srgbClr val="A89A86">
                 <a:alpha val="60000"/>
               </a:srgbClr>
             </a:solidFill>
@@ -7820,7 +7794,7 @@
             <a:r>
               <a:rPr lang="en-US" sz="900" dirty="0">
                 <a:solidFill>
-                  <a:srgbClr val="5C708A"/>
+                  <a:srgbClr val="A89A86"/>
                 </a:solidFill>
                 <a:latin typeface="Calibri" pitchFamily="34" charset="0"/>
                 <a:ea typeface="Calibri" pitchFamily="34" charset="-122"/>
@@ -7859,7 +7833,7 @@
             <a:r>
               <a:rPr lang="en-US" sz="900" dirty="0">
                 <a:solidFill>
-                  <a:srgbClr val="5C708A"/>
+                  <a:srgbClr val="A89A86"/>
                 </a:solidFill>
                 <a:latin typeface="Calibri" pitchFamily="34" charset="0"/>
                 <a:ea typeface="Calibri" pitchFamily="34" charset="-122"/>
@@ -7885,7 +7859,7 @@
     <p:bg>
       <p:bgPr>
         <a:solidFill>
-          <a:srgbClr val="0B1D33"/>
+          <a:srgbClr val="F8F6F3"/>
         </a:solidFill>
       </p:bgPr>
     </p:bg>
@@ -7930,7 +7904,7 @@
             <a:r>
               <a:rPr lang="en-US" sz="1200" b="1" spc="300" kern="0" dirty="0">
                 <a:solidFill>
-                  <a:srgbClr val="4A9EFF"/>
+                  <a:srgbClr val="9A7B66"/>
                 </a:solidFill>
                 <a:latin typeface="Calibri" pitchFamily="34" charset="0"/>
                 <a:ea typeface="Calibri" pitchFamily="34" charset="-122"/>
@@ -7972,11 +7946,11 @@
             <a:r>
               <a:rPr lang="en-US" sz="3200" b="1" dirty="0">
                 <a:solidFill>
-                  <a:srgbClr val="EAF1FA"/>
-                </a:solidFill>
-                <a:latin typeface="Bookman Old Style" pitchFamily="34" charset="0"/>
-                <a:ea typeface="Bookman Old Style" pitchFamily="34" charset="-122"/>
-                <a:cs typeface="Bookman Old Style" pitchFamily="34" charset="-120"/>
+                  <a:srgbClr val="33302B"/>
+                </a:solidFill>
+                <a:latin typeface="Georgia" pitchFamily="34" charset="0"/>
+                <a:ea typeface="Georgia" pitchFamily="34" charset="-122"/>
+                <a:cs typeface="Georgia" pitchFamily="34" charset="-120"/>
               </a:rPr>
               <a:t>Erros que travam a escala</a:t>
             </a:r>
@@ -8001,13 +7975,18 @@
             </a:avLst>
           </a:prstGeom>
           <a:solidFill>
-            <a:srgbClr val="13283F"/>
+            <a:srgbClr val="FFFFFF"/>
           </a:solidFill>
-          <a:ln/>
+          <a:ln w="12700">
+            <a:solidFill>
+              <a:srgbClr val="E3D9CC"/>
+            </a:solidFill>
+            <a:prstDash val="solid"/>
+          </a:ln>
           <a:effectLst>
-            <a:outerShdw sx="100000" sy="100000" kx="0" ky="0" algn="bl" rotWithShape="0" blurRad="127000" dist="38100" dir="5400000">
-              <a:srgbClr val="000000">
-                <a:alpha val="28000"/>
+            <a:outerShdw sx="100000" sy="100000" kx="0" ky="0" algn="bl" rotWithShape="0" blurRad="114300" dist="38100" dir="5400000">
+              <a:srgbClr val="7A6A55">
+                <a:alpha val="12000"/>
               </a:srgbClr>
             </a:outerShdw>
           </a:effectLst>
@@ -8028,9 +8007,14 @@
             <a:avLst/>
           </a:prstGeom>
           <a:solidFill>
-            <a:srgbClr val="16314F"/>
+            <a:srgbClr val="EADFD0"/>
           </a:solidFill>
-          <a:ln/>
+          <a:ln w="9525">
+            <a:solidFill>
+              <a:srgbClr val="E3D9CC"/>
+            </a:solidFill>
+            <a:prstDash val="solid"/>
+          </a:ln>
         </p:spPr>
       </p:sp>
       <p:pic>
@@ -8084,11 +8068,11 @@
             <a:r>
               <a:rPr lang="en-US" sz="1800" b="1" dirty="0">
                 <a:solidFill>
-                  <a:srgbClr val="C9A961"/>
-                </a:solidFill>
-                <a:latin typeface="Bookman Old Style" pitchFamily="34" charset="0"/>
-                <a:ea typeface="Bookman Old Style" pitchFamily="34" charset="-122"/>
-                <a:cs typeface="Bookman Old Style" pitchFamily="34" charset="-120"/>
+                  <a:srgbClr val="B1937E"/>
+                </a:solidFill>
+                <a:latin typeface="Georgia" pitchFamily="34" charset="0"/>
+                <a:ea typeface="Georgia" pitchFamily="34" charset="-122"/>
+                <a:cs typeface="Georgia" pitchFamily="34" charset="-120"/>
               </a:rPr>
               <a:t>Não pedir testemunhos</a:t>
             </a:r>
@@ -8123,7 +8107,7 @@
             <a:r>
               <a:rPr lang="en-US" sz="1350" dirty="0">
                 <a:solidFill>
-                  <a:srgbClr val="9FB2C9"/>
+                  <a:srgbClr val="8A7E72"/>
                 </a:solidFill>
                 <a:latin typeface="Calibri" pitchFamily="34" charset="0"/>
                 <a:ea typeface="Calibri" pitchFamily="34" charset="-122"/>
@@ -8152,13 +8136,18 @@
             </a:avLst>
           </a:prstGeom>
           <a:solidFill>
-            <a:srgbClr val="13283F"/>
+            <a:srgbClr val="FFFFFF"/>
           </a:solidFill>
-          <a:ln/>
+          <a:ln w="12700">
+            <a:solidFill>
+              <a:srgbClr val="E3D9CC"/>
+            </a:solidFill>
+            <a:prstDash val="solid"/>
+          </a:ln>
           <a:effectLst>
-            <a:outerShdw sx="100000" sy="100000" kx="0" ky="0" algn="bl" rotWithShape="0" blurRad="127000" dist="38100" dir="5400000">
-              <a:srgbClr val="000000">
-                <a:alpha val="28000"/>
+            <a:outerShdw sx="100000" sy="100000" kx="0" ky="0" algn="bl" rotWithShape="0" blurRad="114300" dist="38100" dir="5400000">
+              <a:srgbClr val="7A6A55">
+                <a:alpha val="12000"/>
               </a:srgbClr>
             </a:outerShdw>
           </a:effectLst>
@@ -8179,9 +8168,14 @@
             <a:avLst/>
           </a:prstGeom>
           <a:solidFill>
-            <a:srgbClr val="16314F"/>
+            <a:srgbClr val="EADFD0"/>
           </a:solidFill>
-          <a:ln/>
+          <a:ln w="9525">
+            <a:solidFill>
+              <a:srgbClr val="E3D9CC"/>
+            </a:solidFill>
+            <a:prstDash val="solid"/>
+          </a:ln>
         </p:spPr>
       </p:sp>
       <p:pic>
@@ -8235,11 +8229,11 @@
             <a:r>
               <a:rPr lang="en-US" sz="1800" b="1" dirty="0">
                 <a:solidFill>
-                  <a:srgbClr val="C9A961"/>
-                </a:solidFill>
-                <a:latin typeface="Bookman Old Style" pitchFamily="34" charset="0"/>
-                <a:ea typeface="Bookman Old Style" pitchFamily="34" charset="-122"/>
-                <a:cs typeface="Bookman Old Style" pitchFamily="34" charset="-120"/>
+                  <a:srgbClr val="B1937E"/>
+                </a:solidFill>
+                <a:latin typeface="Georgia" pitchFamily="34" charset="0"/>
+                <a:ea typeface="Georgia" pitchFamily="34" charset="-122"/>
+                <a:cs typeface="Georgia" pitchFamily="34" charset="-120"/>
               </a:rPr>
               <a:t>Esquecer os upsells</a:t>
             </a:r>
@@ -8274,7 +8268,7 @@
             <a:r>
               <a:rPr lang="en-US" sz="1350" dirty="0">
                 <a:solidFill>
-                  <a:srgbClr val="9FB2C9"/>
+                  <a:srgbClr val="8A7E72"/>
                 </a:solidFill>
                 <a:latin typeface="Calibri" pitchFamily="34" charset="0"/>
                 <a:ea typeface="Calibri" pitchFamily="34" charset="-122"/>
@@ -8303,13 +8297,18 @@
             </a:avLst>
           </a:prstGeom>
           <a:solidFill>
-            <a:srgbClr val="13283F"/>
+            <a:srgbClr val="FFFFFF"/>
           </a:solidFill>
-          <a:ln/>
+          <a:ln w="12700">
+            <a:solidFill>
+              <a:srgbClr val="E3D9CC"/>
+            </a:solidFill>
+            <a:prstDash val="solid"/>
+          </a:ln>
           <a:effectLst>
-            <a:outerShdw sx="100000" sy="100000" kx="0" ky="0" algn="bl" rotWithShape="0" blurRad="127000" dist="38100" dir="5400000">
-              <a:srgbClr val="000000">
-                <a:alpha val="28000"/>
+            <a:outerShdw sx="100000" sy="100000" kx="0" ky="0" algn="bl" rotWithShape="0" blurRad="114300" dist="38100" dir="5400000">
+              <a:srgbClr val="7A6A55">
+                <a:alpha val="12000"/>
               </a:srgbClr>
             </a:outerShdw>
           </a:effectLst>
@@ -8330,9 +8329,14 @@
             <a:avLst/>
           </a:prstGeom>
           <a:solidFill>
-            <a:srgbClr val="16314F"/>
+            <a:srgbClr val="EADFD0"/>
           </a:solidFill>
-          <a:ln/>
+          <a:ln w="9525">
+            <a:solidFill>
+              <a:srgbClr val="E3D9CC"/>
+            </a:solidFill>
+            <a:prstDash val="solid"/>
+          </a:ln>
         </p:spPr>
       </p:sp>
       <p:pic>
@@ -8386,11 +8390,11 @@
             <a:r>
               <a:rPr lang="en-US" sz="1800" b="1" dirty="0">
                 <a:solidFill>
-                  <a:srgbClr val="C9A961"/>
-                </a:solidFill>
-                <a:latin typeface="Bookman Old Style" pitchFamily="34" charset="0"/>
-                <a:ea typeface="Bookman Old Style" pitchFamily="34" charset="-122"/>
-                <a:cs typeface="Bookman Old Style" pitchFamily="34" charset="-120"/>
+                  <a:srgbClr val="B1937E"/>
+                </a:solidFill>
+                <a:latin typeface="Georgia" pitchFamily="34" charset="0"/>
+                <a:ea typeface="Georgia" pitchFamily="34" charset="-122"/>
+                <a:cs typeface="Georgia" pitchFamily="34" charset="-120"/>
               </a:rPr>
               <a:t>Não medir nada</a:t>
             </a:r>
@@ -8425,7 +8429,7 @@
             <a:r>
               <a:rPr lang="en-US" sz="1350" dirty="0">
                 <a:solidFill>
-                  <a:srgbClr val="9FB2C9"/>
+                  <a:srgbClr val="8A7E72"/>
                 </a:solidFill>
                 <a:latin typeface="Calibri" pitchFamily="34" charset="0"/>
                 <a:ea typeface="Calibri" pitchFamily="34" charset="-122"/>
@@ -8454,13 +8458,18 @@
             </a:avLst>
           </a:prstGeom>
           <a:solidFill>
-            <a:srgbClr val="13283F"/>
+            <a:srgbClr val="FFFFFF"/>
           </a:solidFill>
-          <a:ln/>
+          <a:ln w="12700">
+            <a:solidFill>
+              <a:srgbClr val="E3D9CC"/>
+            </a:solidFill>
+            <a:prstDash val="solid"/>
+          </a:ln>
           <a:effectLst>
-            <a:outerShdw sx="100000" sy="100000" kx="0" ky="0" algn="bl" rotWithShape="0" blurRad="127000" dist="38100" dir="5400000">
-              <a:srgbClr val="000000">
-                <a:alpha val="28000"/>
+            <a:outerShdw sx="100000" sy="100000" kx="0" ky="0" algn="bl" rotWithShape="0" blurRad="114300" dist="38100" dir="5400000">
+              <a:srgbClr val="7A6A55">
+                <a:alpha val="12000"/>
               </a:srgbClr>
             </a:outerShdw>
           </a:effectLst>
@@ -8481,9 +8490,14 @@
             <a:avLst/>
           </a:prstGeom>
           <a:solidFill>
-            <a:srgbClr val="16314F"/>
+            <a:srgbClr val="EADFD0"/>
           </a:solidFill>
-          <a:ln/>
+          <a:ln w="9525">
+            <a:solidFill>
+              <a:srgbClr val="E3D9CC"/>
+            </a:solidFill>
+            <a:prstDash val="solid"/>
+          </a:ln>
         </p:spPr>
       </p:sp>
       <p:pic>
@@ -8537,11 +8551,11 @@
             <a:r>
               <a:rPr lang="en-US" sz="1800" b="1" dirty="0">
                 <a:solidFill>
-                  <a:srgbClr val="C9A961"/>
-                </a:solidFill>
-                <a:latin typeface="Bookman Old Style" pitchFamily="34" charset="0"/>
-                <a:ea typeface="Bookman Old Style" pitchFamily="34" charset="-122"/>
-                <a:cs typeface="Bookman Old Style" pitchFamily="34" charset="-120"/>
+                  <a:srgbClr val="B1937E"/>
+                </a:solidFill>
+                <a:latin typeface="Georgia" pitchFamily="34" charset="0"/>
+                <a:ea typeface="Georgia" pitchFamily="34" charset="-122"/>
+                <a:cs typeface="Georgia" pitchFamily="34" charset="-120"/>
               </a:rPr>
               <a:t>Não automatizar</a:t>
             </a:r>
@@ -8576,7 +8590,7 @@
             <a:r>
               <a:rPr lang="en-US" sz="1350" dirty="0">
                 <a:solidFill>
-                  <a:srgbClr val="9FB2C9"/>
+                  <a:srgbClr val="8A7E72"/>
                 </a:solidFill>
                 <a:latin typeface="Calibri" pitchFamily="34" charset="0"/>
                 <a:ea typeface="Calibri" pitchFamily="34" charset="-122"/>
@@ -8605,7 +8619,7 @@
           <a:noFill/>
           <a:ln w="9525">
             <a:solidFill>
-              <a:srgbClr val="5C708A">
+              <a:srgbClr val="A89A86">
                 <a:alpha val="60000"/>
               </a:srgbClr>
             </a:solidFill>
@@ -8640,7 +8654,7 @@
             <a:r>
               <a:rPr lang="en-US" sz="900" dirty="0">
                 <a:solidFill>
-                  <a:srgbClr val="5C708A"/>
+                  <a:srgbClr val="A89A86"/>
                 </a:solidFill>
                 <a:latin typeface="Calibri" pitchFamily="34" charset="0"/>
                 <a:ea typeface="Calibri" pitchFamily="34" charset="-122"/>
@@ -8679,7 +8693,7 @@
             <a:r>
               <a:rPr lang="en-US" sz="900" dirty="0">
                 <a:solidFill>
-                  <a:srgbClr val="5C708A"/>
+                  <a:srgbClr val="A89A86"/>
                 </a:solidFill>
                 <a:latin typeface="Calibri" pitchFamily="34" charset="0"/>
                 <a:ea typeface="Calibri" pitchFamily="34" charset="-122"/>
@@ -8705,7 +8719,7 @@
     <p:bg>
       <p:bgPr>
         <a:solidFill>
-          <a:srgbClr val="0B1D33"/>
+          <a:srgbClr val="F8F6F3"/>
         </a:solidFill>
       </p:bgPr>
     </p:bg>
@@ -8725,51 +8739,7 @@
       </p:grpSpPr>
       <p:sp>
         <p:nvSpPr>
-          <p:cNvPr id="2" name="Shape 0"/>
-          <p:cNvSpPr/>
-          <p:nvPr/>
-        </p:nvSpPr>
-        <p:spPr>
-          <a:xfrm>
-            <a:off x="7772400" y="-1371600"/>
-            <a:ext cx="5486400" cy="5486400"/>
-          </a:xfrm>
-          <a:prstGeom prst="ellipse">
-            <a:avLst/>
-          </a:prstGeom>
-          <a:solidFill>
-            <a:srgbClr val="4A9EFF">
-              <a:alpha val="10000"/>
-            </a:srgbClr>
-          </a:solidFill>
-          <a:ln/>
-        </p:spPr>
-      </p:sp>
-      <p:sp>
-        <p:nvSpPr>
-          <p:cNvPr id="3" name="Shape 1"/>
-          <p:cNvSpPr/>
-          <p:nvPr/>
-        </p:nvSpPr>
-        <p:spPr>
-          <a:xfrm>
-            <a:off x="-1371600" y="4114800"/>
-            <a:ext cx="4572000" cy="4572000"/>
-          </a:xfrm>
-          <a:prstGeom prst="ellipse">
-            <a:avLst/>
-          </a:prstGeom>
-          <a:solidFill>
-            <a:srgbClr val="C9A961">
-              <a:alpha val="8000"/>
-            </a:srgbClr>
-          </a:solidFill>
-          <a:ln/>
-        </p:spPr>
-      </p:sp>
-      <p:sp>
-        <p:nvSpPr>
-          <p:cNvPr id="4" name="Text 2"/>
+          <p:cNvPr id="2" name="Text 0"/>
           <p:cNvSpPr/>
           <p:nvPr/>
         </p:nvSpPr>
@@ -8794,11 +8764,11 @@
             <a:r>
               <a:rPr lang="en-US" sz="15000" b="1" dirty="0">
                 <a:solidFill>
-                  <a:srgbClr val="16314F"/>
-                </a:solidFill>
-                <a:latin typeface="Bookman Old Style" pitchFamily="34" charset="0"/>
-                <a:ea typeface="Bookman Old Style" pitchFamily="34" charset="-122"/>
-                <a:cs typeface="Bookman Old Style" pitchFamily="34" charset="-120"/>
+                  <a:srgbClr val="EADFD0"/>
+                </a:solidFill>
+                <a:latin typeface="Georgia" pitchFamily="34" charset="0"/>
+                <a:ea typeface="Georgia" pitchFamily="34" charset="-122"/>
+                <a:cs typeface="Georgia" pitchFamily="34" charset="-120"/>
               </a:rPr>
               <a:t>D</a:t>
             </a:r>
@@ -8808,7 +8778,7 @@
       </p:sp>
       <p:sp>
         <p:nvSpPr>
-          <p:cNvPr id="5" name="Text 3"/>
+          <p:cNvPr id="3" name="Text 1"/>
           <p:cNvSpPr/>
           <p:nvPr/>
         </p:nvSpPr>
@@ -8833,7 +8803,7 @@
             <a:r>
               <a:rPr lang="en-US" sz="1300" b="1" spc="400" kern="0" dirty="0">
                 <a:solidFill>
-                  <a:srgbClr val="C9A961"/>
+                  <a:srgbClr val="B1937E"/>
                 </a:solidFill>
                 <a:latin typeface="Calibri" pitchFamily="34" charset="0"/>
                 <a:ea typeface="Calibri" pitchFamily="34" charset="-122"/>
@@ -8847,7 +8817,7 @@
       </p:sp>
       <p:sp>
         <p:nvSpPr>
-          <p:cNvPr id="6" name="Text 4"/>
+          <p:cNvPr id="4" name="Text 2"/>
           <p:cNvSpPr/>
           <p:nvPr/>
         </p:nvSpPr>
@@ -8873,23 +8843,23 @@
               <a:buNone/>
             </a:pPr>
             <a:r>
-              <a:rPr lang="en-US" sz="4400" b="1" dirty="0">
-                <a:solidFill>
-                  <a:srgbClr val="EAF1FA"/>
-                </a:solidFill>
-                <a:latin typeface="Bookman Old Style" pitchFamily="34" charset="0"/>
-                <a:ea typeface="Bookman Old Style" pitchFamily="34" charset="-122"/>
-                <a:cs typeface="Bookman Old Style" pitchFamily="34" charset="-120"/>
+              <a:rPr lang="en-US" sz="4000" b="1" dirty="0">
+                <a:solidFill>
+                  <a:srgbClr val="33302B"/>
+                </a:solidFill>
+                <a:latin typeface="Georgia" pitchFamily="34" charset="0"/>
+                <a:ea typeface="Georgia" pitchFamily="34" charset="-122"/>
+                <a:cs typeface="Georgia" pitchFamily="34" charset="-120"/>
               </a:rPr>
               <a:t>O Trabalho desta Semana</a:t>
             </a:r>
-            <a:endParaRPr lang="en-US" sz="4400" dirty="0"/>
-          </a:p>
-        </p:txBody>
-      </p:sp>
-      <p:sp>
-        <p:nvSpPr>
-          <p:cNvPr id="7" name="Text 5"/>
+            <a:endParaRPr lang="en-US" sz="4000" dirty="0"/>
+          </a:p>
+        </p:txBody>
+      </p:sp>
+      <p:sp>
+        <p:nvSpPr>
+          <p:cNvPr id="5" name="Text 3"/>
           <p:cNvSpPr/>
           <p:nvPr/>
         </p:nvSpPr>
@@ -8914,7 +8884,7 @@
             <a:r>
               <a:rPr lang="en-US" sz="1600" dirty="0">
                 <a:solidFill>
-                  <a:srgbClr val="9FB2C9"/>
+                  <a:srgbClr val="8A7E72"/>
                 </a:solidFill>
                 <a:latin typeface="Calibri" pitchFamily="34" charset="0"/>
                 <a:ea typeface="Calibri" pitchFamily="34" charset="-122"/>
@@ -8928,7 +8898,7 @@
       </p:sp>
       <p:sp>
         <p:nvSpPr>
-          <p:cNvPr id="8" name="Shape 6"/>
+          <p:cNvPr id="6" name="Shape 4"/>
           <p:cNvSpPr/>
           <p:nvPr/>
         </p:nvSpPr>
@@ -8943,7 +8913,7 @@
           <a:noFill/>
           <a:ln w="9525">
             <a:solidFill>
-              <a:srgbClr val="5C708A">
+              <a:srgbClr val="A89A86">
                 <a:alpha val="60000"/>
               </a:srgbClr>
             </a:solidFill>
@@ -8953,7 +8923,7 @@
       </p:sp>
       <p:sp>
         <p:nvSpPr>
-          <p:cNvPr id="9" name="Text 7"/>
+          <p:cNvPr id="7" name="Text 5"/>
           <p:cNvSpPr/>
           <p:nvPr/>
         </p:nvSpPr>
@@ -8978,7 +8948,7 @@
             <a:r>
               <a:rPr lang="en-US" sz="900" dirty="0">
                 <a:solidFill>
-                  <a:srgbClr val="5C708A"/>
+                  <a:srgbClr val="A89A86"/>
                 </a:solidFill>
                 <a:latin typeface="Calibri" pitchFamily="34" charset="0"/>
                 <a:ea typeface="Calibri" pitchFamily="34" charset="-122"/>
@@ -8992,7 +8962,7 @@
       </p:sp>
       <p:sp>
         <p:nvSpPr>
-          <p:cNvPr id="10" name="Text 8"/>
+          <p:cNvPr id="8" name="Text 6"/>
           <p:cNvSpPr/>
           <p:nvPr/>
         </p:nvSpPr>
@@ -9017,7 +8987,7 @@
             <a:r>
               <a:rPr lang="en-US" sz="900" dirty="0">
                 <a:solidFill>
-                  <a:srgbClr val="5C708A"/>
+                  <a:srgbClr val="A89A86"/>
                 </a:solidFill>
                 <a:latin typeface="Calibri" pitchFamily="34" charset="0"/>
                 <a:ea typeface="Calibri" pitchFamily="34" charset="-122"/>
@@ -9043,7 +9013,7 @@
     <p:bg>
       <p:bgPr>
         <a:solidFill>
-          <a:srgbClr val="0B1D33"/>
+          <a:srgbClr val="F8F6F3"/>
         </a:solidFill>
       </p:bgPr>
     </p:bg>
@@ -9088,7 +9058,7 @@
             <a:r>
               <a:rPr lang="en-US" sz="1200" b="1" spc="300" kern="0" dirty="0">
                 <a:solidFill>
-                  <a:srgbClr val="4A9EFF"/>
+                  <a:srgbClr val="9A7B66"/>
                 </a:solidFill>
                 <a:latin typeface="Calibri" pitchFamily="34" charset="0"/>
                 <a:ea typeface="Calibri" pitchFamily="34" charset="-122"/>
@@ -9130,11 +9100,11 @@
             <a:r>
               <a:rPr lang="en-US" sz="3600" b="1" dirty="0">
                 <a:solidFill>
-                  <a:srgbClr val="EAF1FA"/>
-                </a:solidFill>
-                <a:latin typeface="Bookman Old Style" pitchFamily="34" charset="0"/>
-                <a:ea typeface="Bookman Old Style" pitchFamily="34" charset="-122"/>
-                <a:cs typeface="Bookman Old Style" pitchFamily="34" charset="-120"/>
+                  <a:srgbClr val="33302B"/>
+                </a:solidFill>
+                <a:latin typeface="Georgia" pitchFamily="34" charset="0"/>
+                <a:ea typeface="Georgia" pitchFamily="34" charset="-122"/>
+                <a:cs typeface="Georgia" pitchFamily="34" charset="-120"/>
               </a:rPr>
               <a:t>De um casamento a um negócio</a:t>
             </a:r>
@@ -9159,13 +9129,18 @@
             </a:avLst>
           </a:prstGeom>
           <a:solidFill>
-            <a:srgbClr val="13283F"/>
+            <a:srgbClr val="FFFFFF"/>
           </a:solidFill>
-          <a:ln/>
+          <a:ln w="12700">
+            <a:solidFill>
+              <a:srgbClr val="E3D9CC"/>
+            </a:solidFill>
+            <a:prstDash val="solid"/>
+          </a:ln>
           <a:effectLst>
-            <a:outerShdw sx="100000" sy="100000" kx="0" ky="0" algn="bl" rotWithShape="0" blurRad="127000" dist="38100" dir="5400000">
-              <a:srgbClr val="000000">
-                <a:alpha val="28000"/>
+            <a:outerShdw sx="100000" sy="100000" kx="0" ky="0" algn="bl" rotWithShape="0" blurRad="114300" dist="38100" dir="5400000">
+              <a:srgbClr val="7A6A55">
+                <a:alpha val="12000"/>
               </a:srgbClr>
             </a:outerShdw>
           </a:effectLst>
@@ -9186,9 +9161,14 @@
             <a:avLst/>
           </a:prstGeom>
           <a:solidFill>
-            <a:srgbClr val="16314F"/>
+            <a:srgbClr val="EADFD0"/>
           </a:solidFill>
-          <a:ln/>
+          <a:ln w="9525">
+            <a:solidFill>
+              <a:srgbClr val="E3D9CC"/>
+            </a:solidFill>
+            <a:prstDash val="solid"/>
+          </a:ln>
         </p:spPr>
       </p:sp>
       <p:pic>
@@ -9242,11 +9222,11 @@
             <a:r>
               <a:rPr lang="en-US" sz="2800" b="1" dirty="0">
                 <a:solidFill>
-                  <a:srgbClr val="C9A961"/>
-                </a:solidFill>
-                <a:latin typeface="Bookman Old Style" pitchFamily="34" charset="0"/>
-                <a:ea typeface="Bookman Old Style" pitchFamily="34" charset="-122"/>
-                <a:cs typeface="Bookman Old Style" pitchFamily="34" charset="-120"/>
+                  <a:srgbClr val="B1937E"/>
+                </a:solidFill>
+                <a:latin typeface="Georgia" pitchFamily="34" charset="0"/>
+                <a:ea typeface="Georgia" pitchFamily="34" charset="-122"/>
+                <a:cs typeface="Georgia" pitchFamily="34" charset="-120"/>
               </a:rPr>
               <a:t>01</a:t>
             </a:r>
@@ -9281,7 +9261,7 @@
             <a:r>
               <a:rPr lang="en-US" sz="1800" b="1" dirty="0">
                 <a:solidFill>
-                  <a:srgbClr val="EAF1FA"/>
+                  <a:srgbClr val="33302B"/>
                 </a:solidFill>
                 <a:latin typeface="Calibri" pitchFamily="34" charset="0"/>
                 <a:ea typeface="Calibri" pitchFamily="34" charset="-122"/>
@@ -9320,7 +9300,7 @@
             <a:r>
               <a:rPr lang="en-US" sz="1300" dirty="0">
                 <a:solidFill>
-                  <a:srgbClr val="9FB2C9"/>
+                  <a:srgbClr val="8A7E72"/>
                 </a:solidFill>
                 <a:latin typeface="Calibri" pitchFamily="34" charset="0"/>
                 <a:ea typeface="Calibri" pitchFamily="34" charset="-122"/>
@@ -9349,13 +9329,18 @@
             </a:avLst>
           </a:prstGeom>
           <a:solidFill>
-            <a:srgbClr val="13283F"/>
+            <a:srgbClr val="FFFFFF"/>
           </a:solidFill>
-          <a:ln/>
+          <a:ln w="12700">
+            <a:solidFill>
+              <a:srgbClr val="E3D9CC"/>
+            </a:solidFill>
+            <a:prstDash val="solid"/>
+          </a:ln>
           <a:effectLst>
-            <a:outerShdw sx="100000" sy="100000" kx="0" ky="0" algn="bl" rotWithShape="0" blurRad="127000" dist="38100" dir="5400000">
-              <a:srgbClr val="000000">
-                <a:alpha val="28000"/>
+            <a:outerShdw sx="100000" sy="100000" kx="0" ky="0" algn="bl" rotWithShape="0" blurRad="114300" dist="38100" dir="5400000">
+              <a:srgbClr val="7A6A55">
+                <a:alpha val="12000"/>
               </a:srgbClr>
             </a:outerShdw>
           </a:effectLst>
@@ -9376,9 +9361,14 @@
             <a:avLst/>
           </a:prstGeom>
           <a:solidFill>
-            <a:srgbClr val="16314F"/>
+            <a:srgbClr val="EADFD0"/>
           </a:solidFill>
-          <a:ln/>
+          <a:ln w="9525">
+            <a:solidFill>
+              <a:srgbClr val="E3D9CC"/>
+            </a:solidFill>
+            <a:prstDash val="solid"/>
+          </a:ln>
         </p:spPr>
       </p:sp>
       <p:pic>
@@ -9432,11 +9422,11 @@
             <a:r>
               <a:rPr lang="en-US" sz="2800" b="1" dirty="0">
                 <a:solidFill>
-                  <a:srgbClr val="C9A961"/>
-                </a:solidFill>
-                <a:latin typeface="Bookman Old Style" pitchFamily="34" charset="0"/>
-                <a:ea typeface="Bookman Old Style" pitchFamily="34" charset="-122"/>
-                <a:cs typeface="Bookman Old Style" pitchFamily="34" charset="-120"/>
+                  <a:srgbClr val="B1937E"/>
+                </a:solidFill>
+                <a:latin typeface="Georgia" pitchFamily="34" charset="0"/>
+                <a:ea typeface="Georgia" pitchFamily="34" charset="-122"/>
+                <a:cs typeface="Georgia" pitchFamily="34" charset="-120"/>
               </a:rPr>
               <a:t>02</a:t>
             </a:r>
@@ -9471,7 +9461,7 @@
             <a:r>
               <a:rPr lang="en-US" sz="1800" b="1" dirty="0">
                 <a:solidFill>
-                  <a:srgbClr val="EAF1FA"/>
+                  <a:srgbClr val="33302B"/>
                 </a:solidFill>
                 <a:latin typeface="Calibri" pitchFamily="34" charset="0"/>
                 <a:ea typeface="Calibri" pitchFamily="34" charset="-122"/>
@@ -9510,7 +9500,7 @@
             <a:r>
               <a:rPr lang="en-US" sz="1300" dirty="0">
                 <a:solidFill>
-                  <a:srgbClr val="9FB2C9"/>
+                  <a:srgbClr val="8A7E72"/>
                 </a:solidFill>
                 <a:latin typeface="Calibri" pitchFamily="34" charset="0"/>
                 <a:ea typeface="Calibri" pitchFamily="34" charset="-122"/>
@@ -9539,13 +9529,18 @@
             </a:avLst>
           </a:prstGeom>
           <a:solidFill>
-            <a:srgbClr val="13283F"/>
+            <a:srgbClr val="FFFFFF"/>
           </a:solidFill>
-          <a:ln/>
+          <a:ln w="12700">
+            <a:solidFill>
+              <a:srgbClr val="E3D9CC"/>
+            </a:solidFill>
+            <a:prstDash val="solid"/>
+          </a:ln>
           <a:effectLst>
-            <a:outerShdw sx="100000" sy="100000" kx="0" ky="0" algn="bl" rotWithShape="0" blurRad="127000" dist="38100" dir="5400000">
-              <a:srgbClr val="000000">
-                <a:alpha val="28000"/>
+            <a:outerShdw sx="100000" sy="100000" kx="0" ky="0" algn="bl" rotWithShape="0" blurRad="114300" dist="38100" dir="5400000">
+              <a:srgbClr val="7A6A55">
+                <a:alpha val="12000"/>
               </a:srgbClr>
             </a:outerShdw>
           </a:effectLst>
@@ -9566,9 +9561,14 @@
             <a:avLst/>
           </a:prstGeom>
           <a:solidFill>
-            <a:srgbClr val="16314F"/>
+            <a:srgbClr val="EADFD0"/>
           </a:solidFill>
-          <a:ln/>
+          <a:ln w="9525">
+            <a:solidFill>
+              <a:srgbClr val="E3D9CC"/>
+            </a:solidFill>
+            <a:prstDash val="solid"/>
+          </a:ln>
         </p:spPr>
       </p:sp>
       <p:pic>
@@ -9622,11 +9622,11 @@
             <a:r>
               <a:rPr lang="en-US" sz="2800" b="1" dirty="0">
                 <a:solidFill>
-                  <a:srgbClr val="C9A961"/>
-                </a:solidFill>
-                <a:latin typeface="Bookman Old Style" pitchFamily="34" charset="0"/>
-                <a:ea typeface="Bookman Old Style" pitchFamily="34" charset="-122"/>
-                <a:cs typeface="Bookman Old Style" pitchFamily="34" charset="-120"/>
+                  <a:srgbClr val="B1937E"/>
+                </a:solidFill>
+                <a:latin typeface="Georgia" pitchFamily="34" charset="0"/>
+                <a:ea typeface="Georgia" pitchFamily="34" charset="-122"/>
+                <a:cs typeface="Georgia" pitchFamily="34" charset="-120"/>
               </a:rPr>
               <a:t>03</a:t>
             </a:r>
@@ -9661,7 +9661,7 @@
             <a:r>
               <a:rPr lang="en-US" sz="1800" b="1" dirty="0">
                 <a:solidFill>
-                  <a:srgbClr val="EAF1FA"/>
+                  <a:srgbClr val="33302B"/>
                 </a:solidFill>
                 <a:latin typeface="Calibri" pitchFamily="34" charset="0"/>
                 <a:ea typeface="Calibri" pitchFamily="34" charset="-122"/>
@@ -9700,7 +9700,7 @@
             <a:r>
               <a:rPr lang="en-US" sz="1300" dirty="0">
                 <a:solidFill>
-                  <a:srgbClr val="9FB2C9"/>
+                  <a:srgbClr val="8A7E72"/>
                 </a:solidFill>
                 <a:latin typeface="Calibri" pitchFamily="34" charset="0"/>
                 <a:ea typeface="Calibri" pitchFamily="34" charset="-122"/>
@@ -9729,13 +9729,18 @@
             </a:avLst>
           </a:prstGeom>
           <a:solidFill>
-            <a:srgbClr val="13283F"/>
+            <a:srgbClr val="FFFFFF"/>
           </a:solidFill>
-          <a:ln/>
+          <a:ln w="12700">
+            <a:solidFill>
+              <a:srgbClr val="E3D9CC"/>
+            </a:solidFill>
+            <a:prstDash val="solid"/>
+          </a:ln>
           <a:effectLst>
-            <a:outerShdw sx="100000" sy="100000" kx="0" ky="0" algn="bl" rotWithShape="0" blurRad="127000" dist="38100" dir="5400000">
-              <a:srgbClr val="000000">
-                <a:alpha val="28000"/>
+            <a:outerShdw sx="100000" sy="100000" kx="0" ky="0" algn="bl" rotWithShape="0" blurRad="114300" dist="38100" dir="5400000">
+              <a:srgbClr val="7A6A55">
+                <a:alpha val="12000"/>
               </a:srgbClr>
             </a:outerShdw>
           </a:effectLst>
@@ -9756,9 +9761,14 @@
             <a:avLst/>
           </a:prstGeom>
           <a:solidFill>
-            <a:srgbClr val="16314F"/>
+            <a:srgbClr val="EADFD0"/>
           </a:solidFill>
-          <a:ln/>
+          <a:ln w="9525">
+            <a:solidFill>
+              <a:srgbClr val="E3D9CC"/>
+            </a:solidFill>
+            <a:prstDash val="solid"/>
+          </a:ln>
         </p:spPr>
       </p:sp>
       <p:pic>
@@ -9812,11 +9822,11 @@
             <a:r>
               <a:rPr lang="en-US" sz="2800" b="1" dirty="0">
                 <a:solidFill>
-                  <a:srgbClr val="C9A961"/>
-                </a:solidFill>
-                <a:latin typeface="Bookman Old Style" pitchFamily="34" charset="0"/>
-                <a:ea typeface="Bookman Old Style" pitchFamily="34" charset="-122"/>
-                <a:cs typeface="Bookman Old Style" pitchFamily="34" charset="-120"/>
+                  <a:srgbClr val="B1937E"/>
+                </a:solidFill>
+                <a:latin typeface="Georgia" pitchFamily="34" charset="0"/>
+                <a:ea typeface="Georgia" pitchFamily="34" charset="-122"/>
+                <a:cs typeface="Georgia" pitchFamily="34" charset="-120"/>
               </a:rPr>
               <a:t>04</a:t>
             </a:r>
@@ -9851,7 +9861,7 @@
             <a:r>
               <a:rPr lang="en-US" sz="1800" b="1" dirty="0">
                 <a:solidFill>
-                  <a:srgbClr val="EAF1FA"/>
+                  <a:srgbClr val="33302B"/>
                 </a:solidFill>
                 <a:latin typeface="Calibri" pitchFamily="34" charset="0"/>
                 <a:ea typeface="Calibri" pitchFamily="34" charset="-122"/>
@@ -9890,7 +9900,7 @@
             <a:r>
               <a:rPr lang="en-US" sz="1300" dirty="0">
                 <a:solidFill>
-                  <a:srgbClr val="9FB2C9"/>
+                  <a:srgbClr val="8A7E72"/>
                 </a:solidFill>
                 <a:latin typeface="Calibri" pitchFamily="34" charset="0"/>
                 <a:ea typeface="Calibri" pitchFamily="34" charset="-122"/>
@@ -9919,7 +9929,7 @@
           <a:noFill/>
           <a:ln w="9525">
             <a:solidFill>
-              <a:srgbClr val="5C708A">
+              <a:srgbClr val="A89A86">
                 <a:alpha val="60000"/>
               </a:srgbClr>
             </a:solidFill>
@@ -9954,7 +9964,7 @@
             <a:r>
               <a:rPr lang="en-US" sz="900" dirty="0">
                 <a:solidFill>
-                  <a:srgbClr val="5C708A"/>
+                  <a:srgbClr val="A89A86"/>
                 </a:solidFill>
                 <a:latin typeface="Calibri" pitchFamily="34" charset="0"/>
                 <a:ea typeface="Calibri" pitchFamily="34" charset="-122"/>
@@ -9993,7 +10003,7 @@
             <a:r>
               <a:rPr lang="en-US" sz="900" dirty="0">
                 <a:solidFill>
-                  <a:srgbClr val="5C708A"/>
+                  <a:srgbClr val="A89A86"/>
                 </a:solidFill>
                 <a:latin typeface="Calibri" pitchFamily="34" charset="0"/>
                 <a:ea typeface="Calibri" pitchFamily="34" charset="-122"/>
@@ -10019,7 +10029,7 @@
     <p:bg>
       <p:bgPr>
         <a:solidFill>
-          <a:srgbClr val="0B1D33"/>
+          <a:srgbClr val="F8F6F3"/>
         </a:solidFill>
       </p:bgPr>
     </p:bg>
@@ -10064,7 +10074,7 @@
             <a:r>
               <a:rPr lang="en-US" sz="1200" b="1" spc="300" kern="0" dirty="0">
                 <a:solidFill>
-                  <a:srgbClr val="4A9EFF"/>
+                  <a:srgbClr val="9A7B66"/>
                 </a:solidFill>
                 <a:latin typeface="Calibri" pitchFamily="34" charset="0"/>
                 <a:ea typeface="Calibri" pitchFamily="34" charset="-122"/>
@@ -10106,11 +10116,11 @@
             <a:r>
               <a:rPr lang="en-US" sz="3400" b="1" dirty="0">
                 <a:solidFill>
-                  <a:srgbClr val="EAF1FA"/>
-                </a:solidFill>
-                <a:latin typeface="Bookman Old Style" pitchFamily="34" charset="0"/>
-                <a:ea typeface="Bookman Old Style" pitchFamily="34" charset="-122"/>
-                <a:cs typeface="Bookman Old Style" pitchFamily="34" charset="-120"/>
+                  <a:srgbClr val="33302B"/>
+                </a:solidFill>
+                <a:latin typeface="Georgia" pitchFamily="34" charset="0"/>
+                <a:ea typeface="Georgia" pitchFamily="34" charset="-122"/>
+                <a:cs typeface="Georgia" pitchFamily="34" charset="-120"/>
               </a:rPr>
               <a:t>Três peças, 100k repetíveis</a:t>
             </a:r>
@@ -10135,13 +10145,18 @@
             </a:avLst>
           </a:prstGeom>
           <a:solidFill>
-            <a:srgbClr val="13283F"/>
+            <a:srgbClr val="FFFFFF"/>
           </a:solidFill>
-          <a:ln/>
+          <a:ln w="12700">
+            <a:solidFill>
+              <a:srgbClr val="E3D9CC"/>
+            </a:solidFill>
+            <a:prstDash val="solid"/>
+          </a:ln>
           <a:effectLst>
-            <a:outerShdw sx="100000" sy="100000" kx="0" ky="0" algn="bl" rotWithShape="0" blurRad="127000" dist="38100" dir="5400000">
-              <a:srgbClr val="000000">
-                <a:alpha val="28000"/>
+            <a:outerShdw sx="100000" sy="100000" kx="0" ky="0" algn="bl" rotWithShape="0" blurRad="114300" dist="38100" dir="5400000">
+              <a:srgbClr val="7A6A55">
+                <a:alpha val="12000"/>
               </a:srgbClr>
             </a:outerShdw>
           </a:effectLst>
@@ -10174,11 +10189,11 @@
             <a:r>
               <a:rPr lang="en-US" sz="3600" b="1" dirty="0">
                 <a:solidFill>
-                  <a:srgbClr val="C9A961"/>
-                </a:solidFill>
-                <a:latin typeface="Bookman Old Style" pitchFamily="34" charset="0"/>
-                <a:ea typeface="Bookman Old Style" pitchFamily="34" charset="-122"/>
-                <a:cs typeface="Bookman Old Style" pitchFamily="34" charset="-120"/>
+                  <a:srgbClr val="B1937E"/>
+                </a:solidFill>
+                <a:latin typeface="Georgia" pitchFamily="34" charset="0"/>
+                <a:ea typeface="Georgia" pitchFamily="34" charset="-122"/>
+                <a:cs typeface="Georgia" pitchFamily="34" charset="-120"/>
               </a:rPr>
               <a:t>01</a:t>
             </a:r>
@@ -10201,9 +10216,14 @@
             <a:avLst/>
           </a:prstGeom>
           <a:solidFill>
-            <a:srgbClr val="16314F"/>
+            <a:srgbClr val="EADFD0"/>
           </a:solidFill>
-          <a:ln/>
+          <a:ln w="9525">
+            <a:solidFill>
+              <a:srgbClr val="E3D9CC"/>
+            </a:solidFill>
+            <a:prstDash val="solid"/>
+          </a:ln>
         </p:spPr>
       </p:sp>
       <p:pic>
@@ -10257,11 +10277,11 @@
             <a:r>
               <a:rPr lang="en-US" sz="1900" b="1" dirty="0">
                 <a:solidFill>
-                  <a:srgbClr val="EAF1FA"/>
-                </a:solidFill>
-                <a:latin typeface="Bookman Old Style" pitchFamily="34" charset="0"/>
-                <a:ea typeface="Bookman Old Style" pitchFamily="34" charset="-122"/>
-                <a:cs typeface="Bookman Old Style" pitchFamily="34" charset="-120"/>
+                  <a:srgbClr val="33302B"/>
+                </a:solidFill>
+                <a:latin typeface="Georgia" pitchFamily="34" charset="0"/>
+                <a:ea typeface="Georgia" pitchFamily="34" charset="-122"/>
+                <a:cs typeface="Georgia" pitchFamily="34" charset="-120"/>
               </a:rPr>
               <a:t>Processo de pós-venda</a:t>
             </a:r>
@@ -10296,7 +10316,7 @@
             <a:r>
               <a:rPr lang="en-US" sz="1300" dirty="0">
                 <a:solidFill>
-                  <a:srgbClr val="9FB2C9"/>
+                  <a:srgbClr val="8A7E72"/>
                 </a:solidFill>
                 <a:latin typeface="Calibri" pitchFamily="34" charset="0"/>
                 <a:ea typeface="Calibri" pitchFamily="34" charset="-122"/>
@@ -10325,13 +10345,18 @@
             </a:avLst>
           </a:prstGeom>
           <a:solidFill>
-            <a:srgbClr val="13283F"/>
+            <a:srgbClr val="FFFFFF"/>
           </a:solidFill>
-          <a:ln/>
+          <a:ln w="12700">
+            <a:solidFill>
+              <a:srgbClr val="E3D9CC"/>
+            </a:solidFill>
+            <a:prstDash val="solid"/>
+          </a:ln>
           <a:effectLst>
-            <a:outerShdw sx="100000" sy="100000" kx="0" ky="0" algn="bl" rotWithShape="0" blurRad="127000" dist="38100" dir="5400000">
-              <a:srgbClr val="000000">
-                <a:alpha val="28000"/>
+            <a:outerShdw sx="100000" sy="100000" kx="0" ky="0" algn="bl" rotWithShape="0" blurRad="114300" dist="38100" dir="5400000">
+              <a:srgbClr val="7A6A55">
+                <a:alpha val="12000"/>
               </a:srgbClr>
             </a:outerShdw>
           </a:effectLst>
@@ -10364,11 +10389,11 @@
             <a:r>
               <a:rPr lang="en-US" sz="3600" b="1" dirty="0">
                 <a:solidFill>
-                  <a:srgbClr val="C9A961"/>
-                </a:solidFill>
-                <a:latin typeface="Bookman Old Style" pitchFamily="34" charset="0"/>
-                <a:ea typeface="Bookman Old Style" pitchFamily="34" charset="-122"/>
-                <a:cs typeface="Bookman Old Style" pitchFamily="34" charset="-120"/>
+                  <a:srgbClr val="B1937E"/>
+                </a:solidFill>
+                <a:latin typeface="Georgia" pitchFamily="34" charset="0"/>
+                <a:ea typeface="Georgia" pitchFamily="34" charset="-122"/>
+                <a:cs typeface="Georgia" pitchFamily="34" charset="-120"/>
               </a:rPr>
               <a:t>02</a:t>
             </a:r>
@@ -10391,9 +10416,14 @@
             <a:avLst/>
           </a:prstGeom>
           <a:solidFill>
-            <a:srgbClr val="16314F"/>
+            <a:srgbClr val="EADFD0"/>
           </a:solidFill>
-          <a:ln/>
+          <a:ln w="9525">
+            <a:solidFill>
+              <a:srgbClr val="E3D9CC"/>
+            </a:solidFill>
+            <a:prstDash val="solid"/>
+          </a:ln>
         </p:spPr>
       </p:sp>
       <p:pic>
@@ -10447,11 +10477,11 @@
             <a:r>
               <a:rPr lang="en-US" sz="1900" b="1" dirty="0">
                 <a:solidFill>
-                  <a:srgbClr val="EAF1FA"/>
-                </a:solidFill>
-                <a:latin typeface="Bookman Old Style" pitchFamily="34" charset="0"/>
-                <a:ea typeface="Bookman Old Style" pitchFamily="34" charset="-122"/>
-                <a:cs typeface="Bookman Old Style" pitchFamily="34" charset="-120"/>
+                  <a:srgbClr val="33302B"/>
+                </a:solidFill>
+                <a:latin typeface="Georgia" pitchFamily="34" charset="0"/>
+                <a:ea typeface="Georgia" pitchFamily="34" charset="-122"/>
+                <a:cs typeface="Georgia" pitchFamily="34" charset="-120"/>
               </a:rPr>
               <a:t>Desenha 2 upsells</a:t>
             </a:r>
@@ -10486,7 +10516,7 @@
             <a:r>
               <a:rPr lang="en-US" sz="1300" dirty="0">
                 <a:solidFill>
-                  <a:srgbClr val="9FB2C9"/>
+                  <a:srgbClr val="8A7E72"/>
                 </a:solidFill>
                 <a:latin typeface="Calibri" pitchFamily="34" charset="0"/>
                 <a:ea typeface="Calibri" pitchFamily="34" charset="-122"/>
@@ -10515,13 +10545,18 @@
             </a:avLst>
           </a:prstGeom>
           <a:solidFill>
-            <a:srgbClr val="13283F"/>
+            <a:srgbClr val="FFFFFF"/>
           </a:solidFill>
-          <a:ln/>
+          <a:ln w="12700">
+            <a:solidFill>
+              <a:srgbClr val="E3D9CC"/>
+            </a:solidFill>
+            <a:prstDash val="solid"/>
+          </a:ln>
           <a:effectLst>
-            <a:outerShdw sx="100000" sy="100000" kx="0" ky="0" algn="bl" rotWithShape="0" blurRad="127000" dist="38100" dir="5400000">
-              <a:srgbClr val="000000">
-                <a:alpha val="28000"/>
+            <a:outerShdw sx="100000" sy="100000" kx="0" ky="0" algn="bl" rotWithShape="0" blurRad="114300" dist="38100" dir="5400000">
+              <a:srgbClr val="7A6A55">
+                <a:alpha val="12000"/>
               </a:srgbClr>
             </a:outerShdw>
           </a:effectLst>
@@ -10554,11 +10589,11 @@
             <a:r>
               <a:rPr lang="en-US" sz="3600" b="1" dirty="0">
                 <a:solidFill>
-                  <a:srgbClr val="C9A961"/>
-                </a:solidFill>
-                <a:latin typeface="Bookman Old Style" pitchFamily="34" charset="0"/>
-                <a:ea typeface="Bookman Old Style" pitchFamily="34" charset="-122"/>
-                <a:cs typeface="Bookman Old Style" pitchFamily="34" charset="-120"/>
+                  <a:srgbClr val="B1937E"/>
+                </a:solidFill>
+                <a:latin typeface="Georgia" pitchFamily="34" charset="0"/>
+                <a:ea typeface="Georgia" pitchFamily="34" charset="-122"/>
+                <a:cs typeface="Georgia" pitchFamily="34" charset="-120"/>
               </a:rPr>
               <a:t>03</a:t>
             </a:r>
@@ -10581,9 +10616,14 @@
             <a:avLst/>
           </a:prstGeom>
           <a:solidFill>
-            <a:srgbClr val="16314F"/>
+            <a:srgbClr val="EADFD0"/>
           </a:solidFill>
-          <a:ln/>
+          <a:ln w="9525">
+            <a:solidFill>
+              <a:srgbClr val="E3D9CC"/>
+            </a:solidFill>
+            <a:prstDash val="solid"/>
+          </a:ln>
         </p:spPr>
       </p:sp>
       <p:pic>
@@ -10637,11 +10677,11 @@
             <a:r>
               <a:rPr lang="en-US" sz="1900" b="1" dirty="0">
                 <a:solidFill>
-                  <a:srgbClr val="EAF1FA"/>
-                </a:solidFill>
-                <a:latin typeface="Bookman Old Style" pitchFamily="34" charset="0"/>
-                <a:ea typeface="Bookman Old Style" pitchFamily="34" charset="-122"/>
-                <a:cs typeface="Bookman Old Style" pitchFamily="34" charset="-120"/>
+                  <a:srgbClr val="33302B"/>
+                </a:solidFill>
+                <a:latin typeface="Georgia" pitchFamily="34" charset="0"/>
+                <a:ea typeface="Georgia" pitchFamily="34" charset="-122"/>
+                <a:cs typeface="Georgia" pitchFamily="34" charset="-120"/>
               </a:rPr>
               <a:t>Monta o teu dashboard</a:t>
             </a:r>
@@ -10676,7 +10716,7 @@
             <a:r>
               <a:rPr lang="en-US" sz="1300" dirty="0">
                 <a:solidFill>
-                  <a:srgbClr val="9FB2C9"/>
+                  <a:srgbClr val="8A7E72"/>
                 </a:solidFill>
                 <a:latin typeface="Calibri" pitchFamily="34" charset="0"/>
                 <a:ea typeface="Calibri" pitchFamily="34" charset="-122"/>
@@ -10705,7 +10745,7 @@
           <a:noFill/>
           <a:ln w="9525">
             <a:solidFill>
-              <a:srgbClr val="5C708A">
+              <a:srgbClr val="A89A86">
                 <a:alpha val="60000"/>
               </a:srgbClr>
             </a:solidFill>
@@ -10740,7 +10780,7 @@
             <a:r>
               <a:rPr lang="en-US" sz="900" dirty="0">
                 <a:solidFill>
-                  <a:srgbClr val="5C708A"/>
+                  <a:srgbClr val="A89A86"/>
                 </a:solidFill>
                 <a:latin typeface="Calibri" pitchFamily="34" charset="0"/>
                 <a:ea typeface="Calibri" pitchFamily="34" charset="-122"/>
@@ -10779,7 +10819,7 @@
             <a:r>
               <a:rPr lang="en-US" sz="900" dirty="0">
                 <a:solidFill>
-                  <a:srgbClr val="5C708A"/>
+                  <a:srgbClr val="A89A86"/>
                 </a:solidFill>
                 <a:latin typeface="Calibri" pitchFamily="34" charset="0"/>
                 <a:ea typeface="Calibri" pitchFamily="34" charset="-122"/>
@@ -10805,7 +10845,7 @@
     <p:bg>
       <p:bgPr>
         <a:solidFill>
-          <a:srgbClr val="102844"/>
+          <a:srgbClr val="EFE7DE"/>
         </a:solidFill>
       </p:bgPr>
     </p:bg>
@@ -10850,7 +10890,7 @@
             <a:r>
               <a:rPr lang="en-US" sz="1200" b="1" spc="300" kern="0" dirty="0">
                 <a:solidFill>
-                  <a:srgbClr val="C9A961"/>
+                  <a:srgbClr val="B1937E"/>
                 </a:solidFill>
                 <a:latin typeface="Calibri" pitchFamily="34" charset="0"/>
                 <a:ea typeface="Calibri" pitchFamily="34" charset="-122"/>
@@ -10892,11 +10932,11 @@
             <a:r>
               <a:rPr lang="en-US" sz="3200" b="1" dirty="0">
                 <a:solidFill>
-                  <a:srgbClr val="EAF1FA"/>
-                </a:solidFill>
-                <a:latin typeface="Bookman Old Style" pitchFamily="34" charset="0"/>
-                <a:ea typeface="Bookman Old Style" pitchFamily="34" charset="-122"/>
-                <a:cs typeface="Bookman Old Style" pitchFamily="34" charset="-120"/>
+                  <a:srgbClr val="33302B"/>
+                </a:solidFill>
+                <a:latin typeface="Georgia" pitchFamily="34" charset="0"/>
+                <a:ea typeface="Georgia" pitchFamily="34" charset="-122"/>
+                <a:cs typeface="Georgia" pitchFamily="34" charset="-120"/>
               </a:rPr>
               <a:t>O entregável final</a:t>
             </a:r>
@@ -10921,18 +10961,18 @@
             </a:avLst>
           </a:prstGeom>
           <a:solidFill>
-            <a:srgbClr val="13283F"/>
+            <a:srgbClr val="FFFFFF"/>
           </a:solidFill>
           <a:ln w="19050">
             <a:solidFill>
-              <a:srgbClr val="C9A961"/>
+              <a:srgbClr val="B1937E"/>
             </a:solidFill>
             <a:prstDash val="solid"/>
           </a:ln>
           <a:effectLst>
-            <a:outerShdw sx="100000" sy="100000" kx="0" ky="0" algn="bl" rotWithShape="0" blurRad="127000" dist="38100" dir="5400000">
-              <a:srgbClr val="000000">
-                <a:alpha val="28000"/>
+            <a:outerShdw sx="100000" sy="100000" kx="0" ky="0" algn="bl" rotWithShape="0" blurRad="114300" dist="38100" dir="5400000">
+              <a:srgbClr val="7A6A55">
+                <a:alpha val="12000"/>
               </a:srgbClr>
             </a:outerShdw>
           </a:effectLst>
@@ -10965,11 +11005,11 @@
             <a:r>
               <a:rPr lang="en-US" sz="2300" b="1" dirty="0">
                 <a:solidFill>
-                  <a:srgbClr val="C9A961"/>
-                </a:solidFill>
-                <a:latin typeface="Bookman Old Style" pitchFamily="34" charset="0"/>
-                <a:ea typeface="Bookman Old Style" pitchFamily="34" charset="-122"/>
-                <a:cs typeface="Bookman Old Style" pitchFamily="34" charset="-120"/>
+                  <a:srgbClr val="B1937E"/>
+                </a:solidFill>
+                <a:latin typeface="Georgia" pitchFamily="34" charset="0"/>
+                <a:ea typeface="Georgia" pitchFamily="34" charset="-122"/>
+                <a:cs typeface="Georgia" pitchFamily="34" charset="-120"/>
               </a:rPr>
               <a:t>O Sistema dos 100K</a:t>
             </a:r>
@@ -11028,7 +11068,7 @@
             <a:r>
               <a:rPr lang="en-US" sz="1550" dirty="0">
                 <a:solidFill>
-                  <a:srgbClr val="EAF1FA"/>
+                  <a:srgbClr val="33302B"/>
                 </a:solidFill>
                 <a:latin typeface="Calibri" pitchFamily="34" charset="0"/>
                 <a:ea typeface="Calibri" pitchFamily="34" charset="-122"/>
@@ -11091,7 +11131,7 @@
             <a:r>
               <a:rPr lang="en-US" sz="1550" dirty="0">
                 <a:solidFill>
-                  <a:srgbClr val="EAF1FA"/>
+                  <a:srgbClr val="33302B"/>
                 </a:solidFill>
                 <a:latin typeface="Calibri" pitchFamily="34" charset="0"/>
                 <a:ea typeface="Calibri" pitchFamily="34" charset="-122"/>
@@ -11154,7 +11194,7 @@
             <a:r>
               <a:rPr lang="en-US" sz="1550" dirty="0">
                 <a:solidFill>
-                  <a:srgbClr val="EAF1FA"/>
+                  <a:srgbClr val="33302B"/>
                 </a:solidFill>
                 <a:latin typeface="Calibri" pitchFamily="34" charset="0"/>
                 <a:ea typeface="Calibri" pitchFamily="34" charset="-122"/>
@@ -11193,7 +11233,7 @@
             <a:r>
               <a:rPr lang="en-US" sz="1500" i="1" dirty="0">
                 <a:solidFill>
-                  <a:srgbClr val="9FB2C9"/>
+                  <a:srgbClr val="8A7E72"/>
                 </a:solidFill>
                 <a:latin typeface="Calibri" pitchFamily="34" charset="0"/>
                 <a:ea typeface="Calibri" pitchFamily="34" charset="-122"/>
@@ -11222,7 +11262,7 @@
           <a:noFill/>
           <a:ln w="9525">
             <a:solidFill>
-              <a:srgbClr val="5C708A">
+              <a:srgbClr val="A89A86">
                 <a:alpha val="60000"/>
               </a:srgbClr>
             </a:solidFill>
@@ -11257,7 +11297,7 @@
             <a:r>
               <a:rPr lang="en-US" sz="900" dirty="0">
                 <a:solidFill>
-                  <a:srgbClr val="5C708A"/>
+                  <a:srgbClr val="A89A86"/>
                 </a:solidFill>
                 <a:latin typeface="Calibri" pitchFamily="34" charset="0"/>
                 <a:ea typeface="Calibri" pitchFamily="34" charset="-122"/>
@@ -11296,7 +11336,7 @@
             <a:r>
               <a:rPr lang="en-US" sz="900" dirty="0">
                 <a:solidFill>
-                  <a:srgbClr val="5C708A"/>
+                  <a:srgbClr val="A89A86"/>
                 </a:solidFill>
                 <a:latin typeface="Calibri" pitchFamily="34" charset="0"/>
                 <a:ea typeface="Calibri" pitchFamily="34" charset="-122"/>
@@ -11322,7 +11362,7 @@
     <p:bg>
       <p:bgPr>
         <a:solidFill>
-          <a:srgbClr val="0B1D33"/>
+          <a:srgbClr val="F8F6F3"/>
         </a:solidFill>
       </p:bgPr>
     </p:bg>
@@ -11342,51 +11382,7 @@
       </p:grpSpPr>
       <p:sp>
         <p:nvSpPr>
-          <p:cNvPr id="2" name="Shape 0"/>
-          <p:cNvSpPr/>
-          <p:nvPr/>
-        </p:nvSpPr>
-        <p:spPr>
-          <a:xfrm>
-            <a:off x="8046720" y="-1645920"/>
-            <a:ext cx="5943600" cy="5943600"/>
-          </a:xfrm>
-          <a:prstGeom prst="ellipse">
-            <a:avLst/>
-          </a:prstGeom>
-          <a:solidFill>
-            <a:srgbClr val="4A9EFF">
-              <a:alpha val="14000"/>
-            </a:srgbClr>
-          </a:solidFill>
-          <a:ln/>
-        </p:spPr>
-      </p:sp>
-      <p:sp>
-        <p:nvSpPr>
-          <p:cNvPr id="3" name="Shape 1"/>
-          <p:cNvSpPr/>
-          <p:nvPr/>
-        </p:nvSpPr>
-        <p:spPr>
-          <a:xfrm>
-            <a:off x="-1828800" y="4389120"/>
-            <a:ext cx="5029200" cy="5029200"/>
-          </a:xfrm>
-          <a:prstGeom prst="ellipse">
-            <a:avLst/>
-          </a:prstGeom>
-          <a:solidFill>
-            <a:srgbClr val="C9A961">
-              <a:alpha val="10000"/>
-            </a:srgbClr>
-          </a:solidFill>
-          <a:ln/>
-        </p:spPr>
-      </p:sp>
-      <p:sp>
-        <p:nvSpPr>
-          <p:cNvPr id="4" name="Text 2"/>
+          <p:cNvPr id="2" name="Text 0"/>
           <p:cNvSpPr/>
           <p:nvPr/>
         </p:nvSpPr>
@@ -11411,7 +11407,7 @@
             <a:r>
               <a:rPr lang="en-US" sz="1400" b="1" spc="500" kern="0" dirty="0">
                 <a:solidFill>
-                  <a:srgbClr val="C9A961"/>
+                  <a:srgbClr val="B1937E"/>
                 </a:solidFill>
                 <a:latin typeface="Calibri" pitchFamily="34" charset="0"/>
                 <a:ea typeface="Calibri" pitchFamily="34" charset="-122"/>
@@ -11425,7 +11421,7 @@
       </p:sp>
       <p:sp>
         <p:nvSpPr>
-          <p:cNvPr id="5" name="Text 3"/>
+          <p:cNvPr id="3" name="Text 1"/>
           <p:cNvSpPr/>
           <p:nvPr/>
         </p:nvSpPr>
@@ -11451,17 +11447,17 @@
               <a:buNone/>
             </a:pPr>
             <a:r>
-              <a:rPr lang="en-US" sz="4200" b="1" dirty="0">
-                <a:solidFill>
-                  <a:srgbClr val="EAF1FA"/>
-                </a:solidFill>
-                <a:latin typeface="Bookman Old Style" pitchFamily="34" charset="0"/>
-                <a:ea typeface="Bookman Old Style" pitchFamily="34" charset="-122"/>
-                <a:cs typeface="Bookman Old Style" pitchFamily="34" charset="-120"/>
+              <a:rPr lang="en-US" sz="3800" b="1" dirty="0">
+                <a:solidFill>
+                  <a:srgbClr val="33302B"/>
+                </a:solidFill>
+                <a:latin typeface="Georgia" pitchFamily="34" charset="0"/>
+                <a:ea typeface="Georgia" pitchFamily="34" charset="-122"/>
+                <a:cs typeface="Georgia" pitchFamily="34" charset="-120"/>
               </a:rPr>
               <a:t>Já não tens apontamentos.</a:t>
             </a:r>
-            <a:endParaRPr lang="en-US" sz="4200" dirty="0"/>
+            <a:endParaRPr lang="en-US" sz="3800" dirty="0"/>
           </a:p>
           <a:p>
             <a:pPr indent="0" marL="0">
@@ -11471,23 +11467,23 @@
               <a:buNone/>
             </a:pPr>
             <a:r>
-              <a:rPr lang="en-US" sz="4200" b="1" dirty="0">
-                <a:solidFill>
-                  <a:srgbClr val="EAF1FA"/>
-                </a:solidFill>
-                <a:latin typeface="Bookman Old Style" pitchFamily="34" charset="0"/>
-                <a:ea typeface="Bookman Old Style" pitchFamily="34" charset="-122"/>
-                <a:cs typeface="Bookman Old Style" pitchFamily="34" charset="-120"/>
+              <a:rPr lang="en-US" sz="3800" b="1" dirty="0">
+                <a:solidFill>
+                  <a:srgbClr val="33302B"/>
+                </a:solidFill>
+                <a:latin typeface="Georgia" pitchFamily="34" charset="0"/>
+                <a:ea typeface="Georgia" pitchFamily="34" charset="-122"/>
+                <a:cs typeface="Georgia" pitchFamily="34" charset="-120"/>
               </a:rPr>
               <a:t>Tens um sistema a faturar.</a:t>
             </a:r>
-            <a:endParaRPr lang="en-US" sz="4200" dirty="0"/>
-          </a:p>
-        </p:txBody>
-      </p:sp>
-      <p:sp>
-        <p:nvSpPr>
-          <p:cNvPr id="6" name="Text 4"/>
+            <a:endParaRPr lang="en-US" sz="3800" dirty="0"/>
+          </a:p>
+        </p:txBody>
+      </p:sp>
+      <p:sp>
+        <p:nvSpPr>
+          <p:cNvPr id="4" name="Text 2"/>
           <p:cNvSpPr/>
           <p:nvPr/>
         </p:nvSpPr>
@@ -11512,7 +11508,7 @@
             <a:r>
               <a:rPr lang="en-US" sz="1700" dirty="0">
                 <a:solidFill>
-                  <a:srgbClr val="9FB2C9"/>
+                  <a:srgbClr val="8A7E72"/>
                 </a:solidFill>
                 <a:latin typeface="Calibri" pitchFamily="34" charset="0"/>
                 <a:ea typeface="Calibri" pitchFamily="34" charset="-122"/>
@@ -11526,7 +11522,7 @@
       </p:sp>
       <p:sp>
         <p:nvSpPr>
-          <p:cNvPr id="7" name="Shape 5"/>
+          <p:cNvPr id="5" name="Shape 3"/>
           <p:cNvSpPr/>
           <p:nvPr/>
         </p:nvSpPr>
@@ -11541,51 +11537,36 @@
           <a:noFill/>
           <a:ln w="31750">
             <a:solidFill>
-              <a:srgbClr val="C9A961"/>
+              <a:srgbClr val="B1937E"/>
             </a:solidFill>
             <a:prstDash val="solid"/>
           </a:ln>
         </p:spPr>
       </p:sp>
-      <p:sp>
-        <p:nvSpPr>
-          <p:cNvPr id="8" name="Text 6"/>
-          <p:cNvSpPr/>
-          <p:nvPr/>
-        </p:nvSpPr>
-        <p:spPr>
-          <a:xfrm>
-            <a:off x="640080" y="5943600"/>
-            <a:ext cx="7315200" cy="365760"/>
-          </a:xfrm>
-          <a:prstGeom prst="rect">
-            <a:avLst/>
-          </a:prstGeom>
-          <a:noFill/>
-          <a:ln/>
-        </p:spPr>
-        <p:txBody>
-          <a:bodyPr wrap="square" lIns="0" tIns="0" rIns="0" bIns="0" rtlCol="0" anchor="ctr"/>
-          <a:lstStyle/>
-          <a:p>
-            <a:pPr indent="0" marL="0">
-              <a:buNone/>
-            </a:pPr>
-            <a:r>
-              <a:rPr lang="en-US" sz="1200" spc="400" kern="0" dirty="0">
-                <a:solidFill>
-                  <a:srgbClr val="5C708A"/>
-                </a:solidFill>
-                <a:latin typeface="Calibri" pitchFamily="34" charset="0"/>
-                <a:ea typeface="Calibri" pitchFamily="34" charset="-122"/>
-                <a:cs typeface="Calibri" pitchFamily="34" charset="-120"/>
-              </a:rPr>
-              <a:t>MENTORIA · RL</a:t>
-            </a:r>
-            <a:endParaRPr lang="en-US" sz="1200" dirty="0"/>
-          </a:p>
-        </p:txBody>
-      </p:sp>
+      <p:pic>
+        <p:nvPicPr>
+          <p:cNvPr id="6" name="Image 0" descr="preencoded.png">    </p:cNvPr>
+          <p:cNvPicPr>
+            <a:picLocks noChangeAspect="1"/>
+          </p:cNvPicPr>
+          <p:nvPr/>
+        </p:nvPicPr>
+        <p:blipFill>
+          <a:blip r:embed="rId1"/>
+          <a:stretch>
+            <a:fillRect/>
+          </a:stretch>
+        </p:blipFill>
+        <p:spPr>
+          <a:xfrm>
+            <a:off x="640080" y="502920"/>
+            <a:ext cx="1280160" cy="1320800"/>
+          </a:xfrm>
+          <a:prstGeom prst="rect">
+            <a:avLst/>
+          </a:prstGeom>
+        </p:spPr>
+      </p:pic>
     </p:spTree>
   </p:cSld>
   <p:clrMapOvr>
@@ -11600,7 +11581,7 @@
     <p:bg>
       <p:bgPr>
         <a:solidFill>
-          <a:srgbClr val="0B1D33"/>
+          <a:srgbClr val="F8F6F3"/>
         </a:solidFill>
       </p:bgPr>
     </p:bg>
@@ -11620,51 +11601,7 @@
       </p:grpSpPr>
       <p:sp>
         <p:nvSpPr>
-          <p:cNvPr id="2" name="Shape 0"/>
-          <p:cNvSpPr/>
-          <p:nvPr/>
-        </p:nvSpPr>
-        <p:spPr>
-          <a:xfrm>
-            <a:off x="7772400" y="-1371600"/>
-            <a:ext cx="5486400" cy="5486400"/>
-          </a:xfrm>
-          <a:prstGeom prst="ellipse">
-            <a:avLst/>
-          </a:prstGeom>
-          <a:solidFill>
-            <a:srgbClr val="4A9EFF">
-              <a:alpha val="10000"/>
-            </a:srgbClr>
-          </a:solidFill>
-          <a:ln/>
-        </p:spPr>
-      </p:sp>
-      <p:sp>
-        <p:nvSpPr>
-          <p:cNvPr id="3" name="Shape 1"/>
-          <p:cNvSpPr/>
-          <p:nvPr/>
-        </p:nvSpPr>
-        <p:spPr>
-          <a:xfrm>
-            <a:off x="-1371600" y="4114800"/>
-            <a:ext cx="4572000" cy="4572000"/>
-          </a:xfrm>
-          <a:prstGeom prst="ellipse">
-            <a:avLst/>
-          </a:prstGeom>
-          <a:solidFill>
-            <a:srgbClr val="C9A961">
-              <a:alpha val="8000"/>
-            </a:srgbClr>
-          </a:solidFill>
-          <a:ln/>
-        </p:spPr>
-      </p:sp>
-      <p:sp>
-        <p:nvSpPr>
-          <p:cNvPr id="4" name="Text 2"/>
+          <p:cNvPr id="2" name="Text 0"/>
           <p:cNvSpPr/>
           <p:nvPr/>
         </p:nvSpPr>
@@ -11689,11 +11626,11 @@
             <a:r>
               <a:rPr lang="en-US" sz="15000" b="1" dirty="0">
                 <a:solidFill>
-                  <a:srgbClr val="16314F"/>
-                </a:solidFill>
-                <a:latin typeface="Bookman Old Style" pitchFamily="34" charset="0"/>
-                <a:ea typeface="Bookman Old Style" pitchFamily="34" charset="-122"/>
-                <a:cs typeface="Bookman Old Style" pitchFamily="34" charset="-120"/>
+                  <a:srgbClr val="EADFD0"/>
+                </a:solidFill>
+                <a:latin typeface="Georgia" pitchFamily="34" charset="0"/>
+                <a:ea typeface="Georgia" pitchFamily="34" charset="-122"/>
+                <a:cs typeface="Georgia" pitchFamily="34" charset="-120"/>
               </a:rPr>
               <a:t>A</a:t>
             </a:r>
@@ -11703,7 +11640,7 @@
       </p:sp>
       <p:sp>
         <p:nvSpPr>
-          <p:cNvPr id="5" name="Text 3"/>
+          <p:cNvPr id="3" name="Text 1"/>
           <p:cNvSpPr/>
           <p:nvPr/>
         </p:nvSpPr>
@@ -11728,7 +11665,7 @@
             <a:r>
               <a:rPr lang="en-US" sz="1300" b="1" spc="400" kern="0" dirty="0">
                 <a:solidFill>
-                  <a:srgbClr val="C9A961"/>
+                  <a:srgbClr val="B1937E"/>
                 </a:solidFill>
                 <a:latin typeface="Calibri" pitchFamily="34" charset="0"/>
                 <a:ea typeface="Calibri" pitchFamily="34" charset="-122"/>
@@ -11742,7 +11679,7 @@
       </p:sp>
       <p:sp>
         <p:nvSpPr>
-          <p:cNvPr id="6" name="Text 4"/>
+          <p:cNvPr id="4" name="Text 2"/>
           <p:cNvSpPr/>
           <p:nvPr/>
         </p:nvSpPr>
@@ -11768,23 +11705,23 @@
               <a:buNone/>
             </a:pPr>
             <a:r>
-              <a:rPr lang="en-US" sz="4400" b="1" dirty="0">
-                <a:solidFill>
-                  <a:srgbClr val="EAF1FA"/>
-                </a:solidFill>
-                <a:latin typeface="Bookman Old Style" pitchFamily="34" charset="0"/>
-                <a:ea typeface="Bookman Old Style" pitchFamily="34" charset="-122"/>
-                <a:cs typeface="Bookman Old Style" pitchFamily="34" charset="-120"/>
+              <a:rPr lang="en-US" sz="4000" b="1" dirty="0">
+                <a:solidFill>
+                  <a:srgbClr val="33302B"/>
+                </a:solidFill>
+                <a:latin typeface="Georgia" pitchFamily="34" charset="0"/>
+                <a:ea typeface="Georgia" pitchFamily="34" charset="-122"/>
+                <a:cs typeface="Georgia" pitchFamily="34" charset="-120"/>
               </a:rPr>
               <a:t>Colher no Pico da Emoção</a:t>
             </a:r>
-            <a:endParaRPr lang="en-US" sz="4400" dirty="0"/>
-          </a:p>
-        </p:txBody>
-      </p:sp>
-      <p:sp>
-        <p:nvSpPr>
-          <p:cNvPr id="7" name="Text 5"/>
+            <a:endParaRPr lang="en-US" sz="4000" dirty="0"/>
+          </a:p>
+        </p:txBody>
+      </p:sp>
+      <p:sp>
+        <p:nvSpPr>
+          <p:cNvPr id="5" name="Text 3"/>
           <p:cNvSpPr/>
           <p:nvPr/>
         </p:nvSpPr>
@@ -11809,7 +11746,7 @@
             <a:r>
               <a:rPr lang="en-US" sz="1600" dirty="0">
                 <a:solidFill>
-                  <a:srgbClr val="9FB2C9"/>
+                  <a:srgbClr val="8A7E72"/>
                 </a:solidFill>
                 <a:latin typeface="Calibri" pitchFamily="34" charset="0"/>
                 <a:ea typeface="Calibri" pitchFamily="34" charset="-122"/>
@@ -11823,7 +11760,7 @@
       </p:sp>
       <p:sp>
         <p:nvSpPr>
-          <p:cNvPr id="8" name="Shape 6"/>
+          <p:cNvPr id="6" name="Shape 4"/>
           <p:cNvSpPr/>
           <p:nvPr/>
         </p:nvSpPr>
@@ -11838,7 +11775,7 @@
           <a:noFill/>
           <a:ln w="9525">
             <a:solidFill>
-              <a:srgbClr val="5C708A">
+              <a:srgbClr val="A89A86">
                 <a:alpha val="60000"/>
               </a:srgbClr>
             </a:solidFill>
@@ -11848,7 +11785,7 @@
       </p:sp>
       <p:sp>
         <p:nvSpPr>
-          <p:cNvPr id="9" name="Text 7"/>
+          <p:cNvPr id="7" name="Text 5"/>
           <p:cNvSpPr/>
           <p:nvPr/>
         </p:nvSpPr>
@@ -11873,7 +11810,7 @@
             <a:r>
               <a:rPr lang="en-US" sz="900" dirty="0">
                 <a:solidFill>
-                  <a:srgbClr val="5C708A"/>
+                  <a:srgbClr val="A89A86"/>
                 </a:solidFill>
                 <a:latin typeface="Calibri" pitchFamily="34" charset="0"/>
                 <a:ea typeface="Calibri" pitchFamily="34" charset="-122"/>
@@ -11887,7 +11824,7 @@
       </p:sp>
       <p:sp>
         <p:nvSpPr>
-          <p:cNvPr id="10" name="Text 8"/>
+          <p:cNvPr id="8" name="Text 6"/>
           <p:cNvSpPr/>
           <p:nvPr/>
         </p:nvSpPr>
@@ -11912,7 +11849,7 @@
             <a:r>
               <a:rPr lang="en-US" sz="900" dirty="0">
                 <a:solidFill>
-                  <a:srgbClr val="5C708A"/>
+                  <a:srgbClr val="A89A86"/>
                 </a:solidFill>
                 <a:latin typeface="Calibri" pitchFamily="34" charset="0"/>
                 <a:ea typeface="Calibri" pitchFamily="34" charset="-122"/>
@@ -11938,7 +11875,7 @@
     <p:bg>
       <p:bgPr>
         <a:solidFill>
-          <a:srgbClr val="0B1D33"/>
+          <a:srgbClr val="F8F6F3"/>
         </a:solidFill>
       </p:bgPr>
     </p:bg>
@@ -11958,51 +11895,7 @@
       </p:grpSpPr>
       <p:sp>
         <p:nvSpPr>
-          <p:cNvPr id="2" name="Shape 0"/>
-          <p:cNvSpPr/>
-          <p:nvPr/>
-        </p:nvSpPr>
-        <p:spPr>
-          <a:xfrm>
-            <a:off x="8229600" y="-1463040"/>
-            <a:ext cx="5486400" cy="5486400"/>
-          </a:xfrm>
-          <a:prstGeom prst="ellipse">
-            <a:avLst/>
-          </a:prstGeom>
-          <a:solidFill>
-            <a:srgbClr val="4A9EFF">
-              <a:alpha val="10000"/>
-            </a:srgbClr>
-          </a:solidFill>
-          <a:ln/>
-        </p:spPr>
-      </p:sp>
-      <p:sp>
-        <p:nvSpPr>
-          <p:cNvPr id="3" name="Shape 1"/>
-          <p:cNvSpPr/>
-          <p:nvPr/>
-        </p:nvSpPr>
-        <p:spPr>
-          <a:xfrm>
-            <a:off x="-1463040" y="4206240"/>
-            <a:ext cx="4572000" cy="4572000"/>
-          </a:xfrm>
-          <a:prstGeom prst="ellipse">
-            <a:avLst/>
-          </a:prstGeom>
-          <a:solidFill>
-            <a:srgbClr val="C9A961">
-              <a:alpha val="8000"/>
-            </a:srgbClr>
-          </a:solidFill>
-          <a:ln/>
-        </p:spPr>
-      </p:sp>
-      <p:sp>
-        <p:nvSpPr>
-          <p:cNvPr id="4" name="Text 2"/>
+          <p:cNvPr id="2" name="Text 0"/>
           <p:cNvSpPr/>
           <p:nvPr/>
         </p:nvSpPr>
@@ -12027,7 +11920,7 @@
             <a:r>
               <a:rPr lang="en-US" sz="1200" b="1" spc="300" kern="0" dirty="0">
                 <a:solidFill>
-                  <a:srgbClr val="4A9EFF"/>
+                  <a:srgbClr val="9A7B66"/>
                 </a:solidFill>
                 <a:latin typeface="Calibri" pitchFamily="34" charset="0"/>
                 <a:ea typeface="Calibri" pitchFamily="34" charset="-122"/>
@@ -12041,7 +11934,7 @@
       </p:sp>
       <p:sp>
         <p:nvSpPr>
-          <p:cNvPr id="5" name="Shape 3"/>
+          <p:cNvPr id="3" name="Shape 1"/>
           <p:cNvSpPr/>
           <p:nvPr/>
         </p:nvSpPr>
@@ -12054,14 +11947,19 @@
             <a:avLst/>
           </a:prstGeom>
           <a:solidFill>
-            <a:srgbClr val="16314F"/>
+            <a:srgbClr val="EADFD0"/>
           </a:solidFill>
-          <a:ln/>
+          <a:ln w="9525">
+            <a:solidFill>
+              <a:srgbClr val="E3D9CC"/>
+            </a:solidFill>
+            <a:prstDash val="solid"/>
+          </a:ln>
         </p:spPr>
       </p:sp>
       <p:pic>
         <p:nvPicPr>
-          <p:cNvPr id="6" name="Image 0" descr="preencoded.png">    </p:cNvPr>
+          <p:cNvPr id="4" name="Image 0" descr="preencoded.png">    </p:cNvPr>
           <p:cNvPicPr>
             <a:picLocks noChangeAspect="1"/>
           </p:cNvPicPr>
@@ -12085,7 +11983,7 @@
       </p:pic>
       <p:sp>
         <p:nvSpPr>
-          <p:cNvPr id="7" name="Text 4"/>
+          <p:cNvPr id="5" name="Text 2"/>
           <p:cNvSpPr/>
           <p:nvPr/>
         </p:nvSpPr>
@@ -12113,11 +12011,11 @@
             <a:r>
               <a:rPr lang="en-US" sz="2800" b="1" i="1" dirty="0">
                 <a:solidFill>
-                  <a:srgbClr val="EAF1FA"/>
-                </a:solidFill>
-                <a:latin typeface="Bookman Old Style" pitchFamily="34" charset="0"/>
-                <a:ea typeface="Bookman Old Style" pitchFamily="34" charset="-122"/>
-                <a:cs typeface="Bookman Old Style" pitchFamily="34" charset="-120"/>
+                  <a:srgbClr val="33302B"/>
+                </a:solidFill>
+                <a:latin typeface="Georgia" pitchFamily="34" charset="0"/>
+                <a:ea typeface="Georgia" pitchFamily="34" charset="-122"/>
+                <a:cs typeface="Georgia" pitchFamily="34" charset="-120"/>
               </a:rPr>
               <a:t>Um pós-venda intencional transforma cada casamento em vários negócios futuros.</a:t>
             </a:r>
@@ -12127,7 +12025,7 @@
       </p:sp>
       <p:sp>
         <p:nvSpPr>
-          <p:cNvPr id="8" name="Text 5"/>
+          <p:cNvPr id="6" name="Text 3"/>
           <p:cNvSpPr/>
           <p:nvPr/>
         </p:nvSpPr>
@@ -12152,7 +12050,7 @@
             <a:r>
               <a:rPr lang="en-US" sz="1600" dirty="0">
                 <a:solidFill>
-                  <a:srgbClr val="9FB2C9"/>
+                  <a:srgbClr val="8A7E72"/>
                 </a:solidFill>
                 <a:latin typeface="Calibri" pitchFamily="34" charset="0"/>
                 <a:ea typeface="Calibri" pitchFamily="34" charset="-122"/>
@@ -12166,7 +12064,7 @@
       </p:sp>
       <p:sp>
         <p:nvSpPr>
-          <p:cNvPr id="9" name="Shape 6"/>
+          <p:cNvPr id="7" name="Shape 4"/>
           <p:cNvSpPr/>
           <p:nvPr/>
         </p:nvSpPr>
@@ -12181,7 +12079,7 @@
           <a:noFill/>
           <a:ln w="9525">
             <a:solidFill>
-              <a:srgbClr val="5C708A">
+              <a:srgbClr val="A89A86">
                 <a:alpha val="60000"/>
               </a:srgbClr>
             </a:solidFill>
@@ -12191,7 +12089,7 @@
       </p:sp>
       <p:sp>
         <p:nvSpPr>
-          <p:cNvPr id="10" name="Text 7"/>
+          <p:cNvPr id="8" name="Text 5"/>
           <p:cNvSpPr/>
           <p:nvPr/>
         </p:nvSpPr>
@@ -12216,7 +12114,7 @@
             <a:r>
               <a:rPr lang="en-US" sz="900" dirty="0">
                 <a:solidFill>
-                  <a:srgbClr val="5C708A"/>
+                  <a:srgbClr val="A89A86"/>
                 </a:solidFill>
                 <a:latin typeface="Calibri" pitchFamily="34" charset="0"/>
                 <a:ea typeface="Calibri" pitchFamily="34" charset="-122"/>
@@ -12230,7 +12128,7 @@
       </p:sp>
       <p:sp>
         <p:nvSpPr>
-          <p:cNvPr id="11" name="Text 8"/>
+          <p:cNvPr id="9" name="Text 6"/>
           <p:cNvSpPr/>
           <p:nvPr/>
         </p:nvSpPr>
@@ -12255,7 +12153,7 @@
             <a:r>
               <a:rPr lang="en-US" sz="900" dirty="0">
                 <a:solidFill>
-                  <a:srgbClr val="5C708A"/>
+                  <a:srgbClr val="A89A86"/>
                 </a:solidFill>
                 <a:latin typeface="Calibri" pitchFamily="34" charset="0"/>
                 <a:ea typeface="Calibri" pitchFamily="34" charset="-122"/>
@@ -12281,7 +12179,7 @@
     <p:bg>
       <p:bgPr>
         <a:solidFill>
-          <a:srgbClr val="0B1D33"/>
+          <a:srgbClr val="F8F6F3"/>
         </a:solidFill>
       </p:bgPr>
     </p:bg>
@@ -12326,7 +12224,7 @@
             <a:r>
               <a:rPr lang="en-US" sz="1200" b="1" spc="300" kern="0" dirty="0">
                 <a:solidFill>
-                  <a:srgbClr val="4A9EFF"/>
+                  <a:srgbClr val="9A7B66"/>
                 </a:solidFill>
                 <a:latin typeface="Calibri" pitchFamily="34" charset="0"/>
                 <a:ea typeface="Calibri" pitchFamily="34" charset="-122"/>
@@ -12368,11 +12266,11 @@
             <a:r>
               <a:rPr lang="en-US" sz="3200" b="1" dirty="0">
                 <a:solidFill>
-                  <a:srgbClr val="EAF1FA"/>
-                </a:solidFill>
-                <a:latin typeface="Bookman Old Style" pitchFamily="34" charset="0"/>
-                <a:ea typeface="Bookman Old Style" pitchFamily="34" charset="-122"/>
-                <a:cs typeface="Bookman Old Style" pitchFamily="34" charset="-120"/>
+                  <a:srgbClr val="33302B"/>
+                </a:solidFill>
+                <a:latin typeface="Georgia" pitchFamily="34" charset="0"/>
+                <a:ea typeface="Georgia" pitchFamily="34" charset="-122"/>
+                <a:cs typeface="Georgia" pitchFamily="34" charset="-120"/>
               </a:rPr>
               <a:t>Pedir testemunhos e referências</a:t>
             </a:r>
@@ -12397,13 +12295,18 @@
             </a:avLst>
           </a:prstGeom>
           <a:solidFill>
-            <a:srgbClr val="13283F"/>
+            <a:srgbClr val="FFFFFF"/>
           </a:solidFill>
-          <a:ln/>
+          <a:ln w="12700">
+            <a:solidFill>
+              <a:srgbClr val="E3D9CC"/>
+            </a:solidFill>
+            <a:prstDash val="solid"/>
+          </a:ln>
           <a:effectLst>
-            <a:outerShdw sx="100000" sy="100000" kx="0" ky="0" algn="bl" rotWithShape="0" blurRad="127000" dist="38100" dir="5400000">
-              <a:srgbClr val="000000">
-                <a:alpha val="28000"/>
+            <a:outerShdw sx="100000" sy="100000" kx="0" ky="0" algn="bl" rotWithShape="0" blurRad="114300" dist="38100" dir="5400000">
+              <a:srgbClr val="7A6A55">
+                <a:alpha val="12000"/>
               </a:srgbClr>
             </a:outerShdw>
           </a:effectLst>
@@ -12424,9 +12327,14 @@
             <a:avLst/>
           </a:prstGeom>
           <a:solidFill>
-            <a:srgbClr val="16314F"/>
+            <a:srgbClr val="EADFD0"/>
           </a:solidFill>
-          <a:ln/>
+          <a:ln w="9525">
+            <a:solidFill>
+              <a:srgbClr val="E3D9CC"/>
+            </a:solidFill>
+            <a:prstDash val="solid"/>
+          </a:ln>
         </p:spPr>
       </p:sp>
       <p:pic>
@@ -12480,11 +12388,11 @@
             <a:r>
               <a:rPr lang="en-US" sz="1900" b="1" dirty="0">
                 <a:solidFill>
-                  <a:srgbClr val="C9A961"/>
-                </a:solidFill>
-                <a:latin typeface="Bookman Old Style" pitchFamily="34" charset="0"/>
-                <a:ea typeface="Bookman Old Style" pitchFamily="34" charset="-122"/>
-                <a:cs typeface="Bookman Old Style" pitchFamily="34" charset="-120"/>
+                  <a:srgbClr val="B1937E"/>
+                </a:solidFill>
+                <a:latin typeface="Georgia" pitchFamily="34" charset="0"/>
+                <a:ea typeface="Georgia" pitchFamily="34" charset="-122"/>
+                <a:cs typeface="Georgia" pitchFamily="34" charset="-120"/>
               </a:rPr>
               <a:t>Pede o testemunho</a:t>
             </a:r>
@@ -12519,7 +12427,7 @@
             <a:r>
               <a:rPr lang="en-US" sz="1400" dirty="0">
                 <a:solidFill>
-                  <a:srgbClr val="9FB2C9"/>
+                  <a:srgbClr val="8A7E72"/>
                 </a:solidFill>
                 <a:latin typeface="Calibri" pitchFamily="34" charset="0"/>
                 <a:ea typeface="Calibri" pitchFamily="34" charset="-122"/>
@@ -12548,13 +12456,18 @@
             </a:avLst>
           </a:prstGeom>
           <a:solidFill>
-            <a:srgbClr val="13283F"/>
+            <a:srgbClr val="FFFFFF"/>
           </a:solidFill>
-          <a:ln/>
+          <a:ln w="12700">
+            <a:solidFill>
+              <a:srgbClr val="E3D9CC"/>
+            </a:solidFill>
+            <a:prstDash val="solid"/>
+          </a:ln>
           <a:effectLst>
-            <a:outerShdw sx="100000" sy="100000" kx="0" ky="0" algn="bl" rotWithShape="0" blurRad="127000" dist="38100" dir="5400000">
-              <a:srgbClr val="000000">
-                <a:alpha val="28000"/>
+            <a:outerShdw sx="100000" sy="100000" kx="0" ky="0" algn="bl" rotWithShape="0" blurRad="114300" dist="38100" dir="5400000">
+              <a:srgbClr val="7A6A55">
+                <a:alpha val="12000"/>
               </a:srgbClr>
             </a:outerShdw>
           </a:effectLst>
@@ -12575,9 +12488,14 @@
             <a:avLst/>
           </a:prstGeom>
           <a:solidFill>
-            <a:srgbClr val="16314F"/>
+            <a:srgbClr val="EADFD0"/>
           </a:solidFill>
-          <a:ln/>
+          <a:ln w="9525">
+            <a:solidFill>
+              <a:srgbClr val="E3D9CC"/>
+            </a:solidFill>
+            <a:prstDash val="solid"/>
+          </a:ln>
         </p:spPr>
       </p:sp>
       <p:pic>
@@ -12631,11 +12549,11 @@
             <a:r>
               <a:rPr lang="en-US" sz="1900" b="1" dirty="0">
                 <a:solidFill>
-                  <a:srgbClr val="C9A961"/>
-                </a:solidFill>
-                <a:latin typeface="Bookman Old Style" pitchFamily="34" charset="0"/>
-                <a:ea typeface="Bookman Old Style" pitchFamily="34" charset="-122"/>
-                <a:cs typeface="Bookman Old Style" pitchFamily="34" charset="-120"/>
+                  <a:srgbClr val="B1937E"/>
+                </a:solidFill>
+                <a:latin typeface="Georgia" pitchFamily="34" charset="0"/>
+                <a:ea typeface="Georgia" pitchFamily="34" charset="-122"/>
+                <a:cs typeface="Georgia" pitchFamily="34" charset="-120"/>
               </a:rPr>
               <a:t>Pede a referência</a:t>
             </a:r>
@@ -12670,7 +12588,7 @@
             <a:r>
               <a:rPr lang="en-US" sz="1400" dirty="0">
                 <a:solidFill>
-                  <a:srgbClr val="9FB2C9"/>
+                  <a:srgbClr val="8A7E72"/>
                 </a:solidFill>
                 <a:latin typeface="Calibri" pitchFamily="34" charset="0"/>
                 <a:ea typeface="Calibri" pitchFamily="34" charset="-122"/>
@@ -12699,13 +12617,18 @@
             </a:avLst>
           </a:prstGeom>
           <a:solidFill>
-            <a:srgbClr val="13283F"/>
+            <a:srgbClr val="FFFFFF"/>
           </a:solidFill>
-          <a:ln/>
+          <a:ln w="12700">
+            <a:solidFill>
+              <a:srgbClr val="E3D9CC"/>
+            </a:solidFill>
+            <a:prstDash val="solid"/>
+          </a:ln>
           <a:effectLst>
-            <a:outerShdw sx="100000" sy="100000" kx="0" ky="0" algn="bl" rotWithShape="0" blurRad="127000" dist="38100" dir="5400000">
-              <a:srgbClr val="000000">
-                <a:alpha val="28000"/>
+            <a:outerShdw sx="100000" sy="100000" kx="0" ky="0" algn="bl" rotWithShape="0" blurRad="114300" dist="38100" dir="5400000">
+              <a:srgbClr val="7A6A55">
+                <a:alpha val="12000"/>
               </a:srgbClr>
             </a:outerShdw>
           </a:effectLst>
@@ -12726,9 +12649,14 @@
             <a:avLst/>
           </a:prstGeom>
           <a:solidFill>
-            <a:srgbClr val="16314F"/>
+            <a:srgbClr val="EADFD0"/>
           </a:solidFill>
-          <a:ln/>
+          <a:ln w="9525">
+            <a:solidFill>
+              <a:srgbClr val="E3D9CC"/>
+            </a:solidFill>
+            <a:prstDash val="solid"/>
+          </a:ln>
         </p:spPr>
       </p:sp>
       <p:pic>
@@ -12782,11 +12710,11 @@
             <a:r>
               <a:rPr lang="en-US" sz="1900" b="1" dirty="0">
                 <a:solidFill>
-                  <a:srgbClr val="C9A961"/>
-                </a:solidFill>
-                <a:latin typeface="Bookman Old Style" pitchFamily="34" charset="0"/>
-                <a:ea typeface="Bookman Old Style" pitchFamily="34" charset="-122"/>
-                <a:cs typeface="Bookman Old Style" pitchFamily="34" charset="-120"/>
+                  <a:srgbClr val="B1937E"/>
+                </a:solidFill>
+                <a:latin typeface="Georgia" pitchFamily="34" charset="0"/>
+                <a:ea typeface="Georgia" pitchFamily="34" charset="-122"/>
+                <a:cs typeface="Georgia" pitchFamily="34" charset="-120"/>
               </a:rPr>
               <a:t>Planta o futuro</a:t>
             </a:r>
@@ -12821,7 +12749,7 @@
             <a:r>
               <a:rPr lang="en-US" sz="1400" dirty="0">
                 <a:solidFill>
-                  <a:srgbClr val="9FB2C9"/>
+                  <a:srgbClr val="8A7E72"/>
                 </a:solidFill>
                 <a:latin typeface="Calibri" pitchFamily="34" charset="0"/>
                 <a:ea typeface="Calibri" pitchFamily="34" charset="-122"/>
@@ -12850,7 +12778,7 @@
           <a:noFill/>
           <a:ln w="9525">
             <a:solidFill>
-              <a:srgbClr val="5C708A">
+              <a:srgbClr val="A89A86">
                 <a:alpha val="60000"/>
               </a:srgbClr>
             </a:solidFill>
@@ -12885,7 +12813,7 @@
             <a:r>
               <a:rPr lang="en-US" sz="900" dirty="0">
                 <a:solidFill>
-                  <a:srgbClr val="5C708A"/>
+                  <a:srgbClr val="A89A86"/>
                 </a:solidFill>
                 <a:latin typeface="Calibri" pitchFamily="34" charset="0"/>
                 <a:ea typeface="Calibri" pitchFamily="34" charset="-122"/>
@@ -12924,7 +12852,7 @@
             <a:r>
               <a:rPr lang="en-US" sz="900" dirty="0">
                 <a:solidFill>
-                  <a:srgbClr val="5C708A"/>
+                  <a:srgbClr val="A89A86"/>
                 </a:solidFill>
                 <a:latin typeface="Calibri" pitchFamily="34" charset="0"/>
                 <a:ea typeface="Calibri" pitchFamily="34" charset="-122"/>
@@ -12950,7 +12878,7 @@
     <p:bg>
       <p:bgPr>
         <a:solidFill>
-          <a:srgbClr val="0B1D33"/>
+          <a:srgbClr val="F8F6F3"/>
         </a:solidFill>
       </p:bgPr>
     </p:bg>
@@ -12995,7 +12923,7 @@
             <a:r>
               <a:rPr lang="en-US" sz="1200" b="1" spc="300" kern="0" dirty="0">
                 <a:solidFill>
-                  <a:srgbClr val="4A9EFF"/>
+                  <a:srgbClr val="9A7B66"/>
                 </a:solidFill>
                 <a:latin typeface="Calibri" pitchFamily="34" charset="0"/>
                 <a:ea typeface="Calibri" pitchFamily="34" charset="-122"/>
@@ -13037,11 +12965,11 @@
             <a:r>
               <a:rPr lang="en-US" sz="3200" b="1" dirty="0">
                 <a:solidFill>
-                  <a:srgbClr val="EAF1FA"/>
-                </a:solidFill>
-                <a:latin typeface="Bookman Old Style" pitchFamily="34" charset="0"/>
-                <a:ea typeface="Bookman Old Style" pitchFamily="34" charset="-122"/>
-                <a:cs typeface="Bookman Old Style" pitchFamily="34" charset="-120"/>
+                  <a:srgbClr val="33302B"/>
+                </a:solidFill>
+                <a:latin typeface="Georgia" pitchFamily="34" charset="0"/>
+                <a:ea typeface="Georgia" pitchFamily="34" charset="-122"/>
+                <a:cs typeface="Georgia" pitchFamily="34" charset="-120"/>
               </a:rPr>
               <a:t>O testemunho vende sem venderes</a:t>
             </a:r>
@@ -13066,13 +12994,18 @@
             </a:avLst>
           </a:prstGeom>
           <a:solidFill>
-            <a:srgbClr val="13283F"/>
+            <a:srgbClr val="FFFFFF"/>
           </a:solidFill>
-          <a:ln/>
+          <a:ln w="12700">
+            <a:solidFill>
+              <a:srgbClr val="E3D9CC"/>
+            </a:solidFill>
+            <a:prstDash val="solid"/>
+          </a:ln>
           <a:effectLst>
-            <a:outerShdw sx="100000" sy="100000" kx="0" ky="0" algn="bl" rotWithShape="0" blurRad="127000" dist="38100" dir="5400000">
-              <a:srgbClr val="000000">
-                <a:alpha val="28000"/>
+            <a:outerShdw sx="100000" sy="100000" kx="0" ky="0" algn="bl" rotWithShape="0" blurRad="114300" dist="38100" dir="5400000">
+              <a:srgbClr val="7A6A55">
+                <a:alpha val="12000"/>
               </a:srgbClr>
             </a:outerShdw>
           </a:effectLst>
@@ -13105,11 +13038,11 @@
             <a:r>
               <a:rPr lang="en-US" sz="3400" b="1" dirty="0">
                 <a:solidFill>
-                  <a:srgbClr val="C9A961"/>
-                </a:solidFill>
-                <a:latin typeface="Bookman Old Style" pitchFamily="34" charset="0"/>
-                <a:ea typeface="Bookman Old Style" pitchFamily="34" charset="-122"/>
-                <a:cs typeface="Bookman Old Style" pitchFamily="34" charset="-120"/>
+                  <a:srgbClr val="B1937E"/>
+                </a:solidFill>
+                <a:latin typeface="Georgia" pitchFamily="34" charset="0"/>
+                <a:ea typeface="Georgia" pitchFamily="34" charset="-122"/>
+                <a:cs typeface="Georgia" pitchFamily="34" charset="-120"/>
               </a:rPr>
               <a:t>+confiança</a:t>
             </a:r>
@@ -13144,7 +13077,7 @@
             <a:r>
               <a:rPr lang="en-US" sz="1500" b="1" dirty="0">
                 <a:solidFill>
-                  <a:srgbClr val="EAF1FA"/>
+                  <a:srgbClr val="33302B"/>
                 </a:solidFill>
                 <a:latin typeface="Calibri" pitchFamily="34" charset="0"/>
                 <a:ea typeface="Calibri" pitchFamily="34" charset="-122"/>
@@ -13173,7 +13106,7 @@
           <a:noFill/>
           <a:ln w="9525">
             <a:solidFill>
-              <a:srgbClr val="5C708A">
+              <a:srgbClr val="A89A86">
                 <a:alpha val="60000"/>
               </a:srgbClr>
             </a:solidFill>
@@ -13208,7 +13141,7 @@
             <a:r>
               <a:rPr lang="en-US" sz="1300" dirty="0">
                 <a:solidFill>
-                  <a:srgbClr val="9FB2C9"/>
+                  <a:srgbClr val="8A7E72"/>
                 </a:solidFill>
                 <a:latin typeface="Calibri" pitchFamily="34" charset="0"/>
                 <a:ea typeface="Calibri" pitchFamily="34" charset="-122"/>
@@ -13237,13 +13170,18 @@
             </a:avLst>
           </a:prstGeom>
           <a:solidFill>
-            <a:srgbClr val="13283F"/>
+            <a:srgbClr val="FFFFFF"/>
           </a:solidFill>
-          <a:ln/>
+          <a:ln w="12700">
+            <a:solidFill>
+              <a:srgbClr val="E3D9CC"/>
+            </a:solidFill>
+            <a:prstDash val="solid"/>
+          </a:ln>
           <a:effectLst>
-            <a:outerShdw sx="100000" sy="100000" kx="0" ky="0" algn="bl" rotWithShape="0" blurRad="127000" dist="38100" dir="5400000">
-              <a:srgbClr val="000000">
-                <a:alpha val="28000"/>
+            <a:outerShdw sx="100000" sy="100000" kx="0" ky="0" algn="bl" rotWithShape="0" blurRad="114300" dist="38100" dir="5400000">
+              <a:srgbClr val="7A6A55">
+                <a:alpha val="12000"/>
               </a:srgbClr>
             </a:outerShdw>
           </a:effectLst>
@@ -13276,11 +13214,11 @@
             <a:r>
               <a:rPr lang="en-US" sz="4600" b="1" dirty="0">
                 <a:solidFill>
-                  <a:srgbClr val="4A9EFF"/>
-                </a:solidFill>
-                <a:latin typeface="Bookman Old Style" pitchFamily="34" charset="0"/>
-                <a:ea typeface="Bookman Old Style" pitchFamily="34" charset="-122"/>
-                <a:cs typeface="Bookman Old Style" pitchFamily="34" charset="-120"/>
+                  <a:srgbClr val="9A7B66"/>
+                </a:solidFill>
+                <a:latin typeface="Georgia" pitchFamily="34" charset="0"/>
+                <a:ea typeface="Georgia" pitchFamily="34" charset="-122"/>
+                <a:cs typeface="Georgia" pitchFamily="34" charset="-120"/>
               </a:rPr>
               <a:t>pico</a:t>
             </a:r>
@@ -13315,7 +13253,7 @@
             <a:r>
               <a:rPr lang="en-US" sz="1500" b="1" dirty="0">
                 <a:solidFill>
-                  <a:srgbClr val="EAF1FA"/>
+                  <a:srgbClr val="33302B"/>
                 </a:solidFill>
                 <a:latin typeface="Calibri" pitchFamily="34" charset="0"/>
                 <a:ea typeface="Calibri" pitchFamily="34" charset="-122"/>
@@ -13344,7 +13282,7 @@
           <a:noFill/>
           <a:ln w="9525">
             <a:solidFill>
-              <a:srgbClr val="5C708A">
+              <a:srgbClr val="A89A86">
                 <a:alpha val="60000"/>
               </a:srgbClr>
             </a:solidFill>
@@ -13379,7 +13317,7 @@
             <a:r>
               <a:rPr lang="en-US" sz="1300" dirty="0">
                 <a:solidFill>
-                  <a:srgbClr val="9FB2C9"/>
+                  <a:srgbClr val="8A7E72"/>
                 </a:solidFill>
                 <a:latin typeface="Calibri" pitchFamily="34" charset="0"/>
                 <a:ea typeface="Calibri" pitchFamily="34" charset="-122"/>
@@ -13408,13 +13346,18 @@
             </a:avLst>
           </a:prstGeom>
           <a:solidFill>
-            <a:srgbClr val="13283F"/>
+            <a:srgbClr val="FFFFFF"/>
           </a:solidFill>
-          <a:ln/>
+          <a:ln w="12700">
+            <a:solidFill>
+              <a:srgbClr val="E3D9CC"/>
+            </a:solidFill>
+            <a:prstDash val="solid"/>
+          </a:ln>
           <a:effectLst>
-            <a:outerShdw sx="100000" sy="100000" kx="0" ky="0" algn="bl" rotWithShape="0" blurRad="127000" dist="38100" dir="5400000">
-              <a:srgbClr val="000000">
-                <a:alpha val="28000"/>
+            <a:outerShdw sx="100000" sy="100000" kx="0" ky="0" algn="bl" rotWithShape="0" blurRad="114300" dist="38100" dir="5400000">
+              <a:srgbClr val="7A6A55">
+                <a:alpha val="12000"/>
               </a:srgbClr>
             </a:outerShdw>
           </a:effectLst>
@@ -13447,11 +13390,11 @@
             <a:r>
               <a:rPr lang="en-US" sz="4600" b="1" dirty="0">
                 <a:solidFill>
-                  <a:srgbClr val="4A9EFF"/>
-                </a:solidFill>
-                <a:latin typeface="Bookman Old Style" pitchFamily="34" charset="0"/>
-                <a:ea typeface="Bookman Old Style" pitchFamily="34" charset="-122"/>
-                <a:cs typeface="Bookman Old Style" pitchFamily="34" charset="-120"/>
+                  <a:srgbClr val="9A7B66"/>
+                </a:solidFill>
+                <a:latin typeface="Georgia" pitchFamily="34" charset="0"/>
+                <a:ea typeface="Georgia" pitchFamily="34" charset="-122"/>
+                <a:cs typeface="Georgia" pitchFamily="34" charset="-120"/>
               </a:rPr>
               <a:t>loop</a:t>
             </a:r>
@@ -13486,7 +13429,7 @@
             <a:r>
               <a:rPr lang="en-US" sz="1500" b="1" dirty="0">
                 <a:solidFill>
-                  <a:srgbClr val="EAF1FA"/>
+                  <a:srgbClr val="33302B"/>
                 </a:solidFill>
                 <a:latin typeface="Calibri" pitchFamily="34" charset="0"/>
                 <a:ea typeface="Calibri" pitchFamily="34" charset="-122"/>
@@ -13515,7 +13458,7 @@
           <a:noFill/>
           <a:ln w="9525">
             <a:solidFill>
-              <a:srgbClr val="5C708A">
+              <a:srgbClr val="A89A86">
                 <a:alpha val="60000"/>
               </a:srgbClr>
             </a:solidFill>
@@ -13550,7 +13493,7 @@
             <a:r>
               <a:rPr lang="en-US" sz="1300" dirty="0">
                 <a:solidFill>
-                  <a:srgbClr val="9FB2C9"/>
+                  <a:srgbClr val="8A7E72"/>
                 </a:solidFill>
                 <a:latin typeface="Calibri" pitchFamily="34" charset="0"/>
                 <a:ea typeface="Calibri" pitchFamily="34" charset="-122"/>
@@ -13579,7 +13522,7 @@
           <a:noFill/>
           <a:ln w="9525">
             <a:solidFill>
-              <a:srgbClr val="5C708A">
+              <a:srgbClr val="A89A86">
                 <a:alpha val="60000"/>
               </a:srgbClr>
             </a:solidFill>
@@ -13614,7 +13557,7 @@
             <a:r>
               <a:rPr lang="en-US" sz="900" dirty="0">
                 <a:solidFill>
-                  <a:srgbClr val="5C708A"/>
+                  <a:srgbClr val="A89A86"/>
                 </a:solidFill>
                 <a:latin typeface="Calibri" pitchFamily="34" charset="0"/>
                 <a:ea typeface="Calibri" pitchFamily="34" charset="-122"/>
@@ -13653,7 +13596,7 @@
             <a:r>
               <a:rPr lang="en-US" sz="900" dirty="0">
                 <a:solidFill>
-                  <a:srgbClr val="5C708A"/>
+                  <a:srgbClr val="A89A86"/>
                 </a:solidFill>
                 <a:latin typeface="Calibri" pitchFamily="34" charset="0"/>
                 <a:ea typeface="Calibri" pitchFamily="34" charset="-122"/>
@@ -13679,7 +13622,7 @@
     <p:bg>
       <p:bgPr>
         <a:solidFill>
-          <a:srgbClr val="0B1D33"/>
+          <a:srgbClr val="F8F6F3"/>
         </a:solidFill>
       </p:bgPr>
     </p:bg>
@@ -13699,51 +13642,7 @@
       </p:grpSpPr>
       <p:sp>
         <p:nvSpPr>
-          <p:cNvPr id="2" name="Shape 0"/>
-          <p:cNvSpPr/>
-          <p:nvPr/>
-        </p:nvSpPr>
-        <p:spPr>
-          <a:xfrm>
-            <a:off x="7772400" y="-1371600"/>
-            <a:ext cx="5486400" cy="5486400"/>
-          </a:xfrm>
-          <a:prstGeom prst="ellipse">
-            <a:avLst/>
-          </a:prstGeom>
-          <a:solidFill>
-            <a:srgbClr val="4A9EFF">
-              <a:alpha val="10000"/>
-            </a:srgbClr>
-          </a:solidFill>
-          <a:ln/>
-        </p:spPr>
-      </p:sp>
-      <p:sp>
-        <p:nvSpPr>
-          <p:cNvPr id="3" name="Shape 1"/>
-          <p:cNvSpPr/>
-          <p:nvPr/>
-        </p:nvSpPr>
-        <p:spPr>
-          <a:xfrm>
-            <a:off x="-1371600" y="4114800"/>
-            <a:ext cx="4572000" cy="4572000"/>
-          </a:xfrm>
-          <a:prstGeom prst="ellipse">
-            <a:avLst/>
-          </a:prstGeom>
-          <a:solidFill>
-            <a:srgbClr val="C9A961">
-              <a:alpha val="8000"/>
-            </a:srgbClr>
-          </a:solidFill>
-          <a:ln/>
-        </p:spPr>
-      </p:sp>
-      <p:sp>
-        <p:nvSpPr>
-          <p:cNvPr id="4" name="Text 2"/>
+          <p:cNvPr id="2" name="Text 0"/>
           <p:cNvSpPr/>
           <p:nvPr/>
         </p:nvSpPr>
@@ -13768,11 +13667,11 @@
             <a:r>
               <a:rPr lang="en-US" sz="15000" b="1" dirty="0">
                 <a:solidFill>
-                  <a:srgbClr val="16314F"/>
-                </a:solidFill>
-                <a:latin typeface="Bookman Old Style" pitchFamily="34" charset="0"/>
-                <a:ea typeface="Bookman Old Style" pitchFamily="34" charset="-122"/>
-                <a:cs typeface="Bookman Old Style" pitchFamily="34" charset="-120"/>
+                  <a:srgbClr val="EADFD0"/>
+                </a:solidFill>
+                <a:latin typeface="Georgia" pitchFamily="34" charset="0"/>
+                <a:ea typeface="Georgia" pitchFamily="34" charset="-122"/>
+                <a:cs typeface="Georgia" pitchFamily="34" charset="-120"/>
               </a:rPr>
               <a:t>B</a:t>
             </a:r>
@@ -13782,7 +13681,7 @@
       </p:sp>
       <p:sp>
         <p:nvSpPr>
-          <p:cNvPr id="5" name="Text 3"/>
+          <p:cNvPr id="3" name="Text 1"/>
           <p:cNvSpPr/>
           <p:nvPr/>
         </p:nvSpPr>
@@ -13807,7 +13706,7 @@
             <a:r>
               <a:rPr lang="en-US" sz="1300" b="1" spc="400" kern="0" dirty="0">
                 <a:solidFill>
-                  <a:srgbClr val="C9A961"/>
+                  <a:srgbClr val="B1937E"/>
                 </a:solidFill>
                 <a:latin typeface="Calibri" pitchFamily="34" charset="0"/>
                 <a:ea typeface="Calibri" pitchFamily="34" charset="-122"/>
@@ -13821,7 +13720,7 @@
       </p:sp>
       <p:sp>
         <p:nvSpPr>
-          <p:cNvPr id="6" name="Text 4"/>
+          <p:cNvPr id="4" name="Text 2"/>
           <p:cNvSpPr/>
           <p:nvPr/>
         </p:nvSpPr>
@@ -13847,23 +13746,23 @@
               <a:buNone/>
             </a:pPr>
             <a:r>
-              <a:rPr lang="en-US" sz="4400" b="1" dirty="0">
-                <a:solidFill>
-                  <a:srgbClr val="EAF1FA"/>
-                </a:solidFill>
-                <a:latin typeface="Bookman Old Style" pitchFamily="34" charset="0"/>
-                <a:ea typeface="Bookman Old Style" pitchFamily="34" charset="-122"/>
-                <a:cs typeface="Bookman Old Style" pitchFamily="34" charset="-120"/>
+              <a:rPr lang="en-US" sz="4000" b="1" dirty="0">
+                <a:solidFill>
+                  <a:srgbClr val="33302B"/>
+                </a:solidFill>
+                <a:latin typeface="Georgia" pitchFamily="34" charset="0"/>
+                <a:ea typeface="Georgia" pitchFamily="34" charset="-122"/>
+                <a:cs typeface="Georgia" pitchFamily="34" charset="-120"/>
               </a:rPr>
               <a:t>Subir o Ticket &amp; Escalar</a:t>
             </a:r>
-            <a:endParaRPr lang="en-US" sz="4400" dirty="0"/>
-          </a:p>
-        </p:txBody>
-      </p:sp>
-      <p:sp>
-        <p:nvSpPr>
-          <p:cNvPr id="7" name="Text 5"/>
+            <a:endParaRPr lang="en-US" sz="4000" dirty="0"/>
+          </a:p>
+        </p:txBody>
+      </p:sp>
+      <p:sp>
+        <p:nvSpPr>
+          <p:cNvPr id="5" name="Text 3"/>
           <p:cNvSpPr/>
           <p:nvPr/>
         </p:nvSpPr>
@@ -13888,7 +13787,7 @@
             <a:r>
               <a:rPr lang="en-US" sz="1600" dirty="0">
                 <a:solidFill>
-                  <a:srgbClr val="9FB2C9"/>
+                  <a:srgbClr val="8A7E72"/>
                 </a:solidFill>
                 <a:latin typeface="Calibri" pitchFamily="34" charset="0"/>
                 <a:ea typeface="Calibri" pitchFamily="34" charset="-122"/>
@@ -13902,7 +13801,7 @@
       </p:sp>
       <p:sp>
         <p:nvSpPr>
-          <p:cNvPr id="8" name="Shape 6"/>
+          <p:cNvPr id="6" name="Shape 4"/>
           <p:cNvSpPr/>
           <p:nvPr/>
         </p:nvSpPr>
@@ -13917,7 +13816,7 @@
           <a:noFill/>
           <a:ln w="9525">
             <a:solidFill>
-              <a:srgbClr val="5C708A">
+              <a:srgbClr val="A89A86">
                 <a:alpha val="60000"/>
               </a:srgbClr>
             </a:solidFill>
@@ -13927,7 +13826,7 @@
       </p:sp>
       <p:sp>
         <p:nvSpPr>
-          <p:cNvPr id="9" name="Text 7"/>
+          <p:cNvPr id="7" name="Text 5"/>
           <p:cNvSpPr/>
           <p:nvPr/>
         </p:nvSpPr>
@@ -13952,7 +13851,7 @@
             <a:r>
               <a:rPr lang="en-US" sz="900" dirty="0">
                 <a:solidFill>
-                  <a:srgbClr val="5C708A"/>
+                  <a:srgbClr val="A89A86"/>
                 </a:solidFill>
                 <a:latin typeface="Calibri" pitchFamily="34" charset="0"/>
                 <a:ea typeface="Calibri" pitchFamily="34" charset="-122"/>
@@ -13966,7 +13865,7 @@
       </p:sp>
       <p:sp>
         <p:nvSpPr>
-          <p:cNvPr id="10" name="Text 8"/>
+          <p:cNvPr id="8" name="Text 6"/>
           <p:cNvSpPr/>
           <p:nvPr/>
         </p:nvSpPr>
@@ -13991,7 +13890,7 @@
             <a:r>
               <a:rPr lang="en-US" sz="900" dirty="0">
                 <a:solidFill>
-                  <a:srgbClr val="5C708A"/>
+                  <a:srgbClr val="A89A86"/>
                 </a:solidFill>
                 <a:latin typeface="Calibri" pitchFamily="34" charset="0"/>
                 <a:ea typeface="Calibri" pitchFamily="34" charset="-122"/>
@@ -14017,7 +13916,7 @@
     <p:bg>
       <p:bgPr>
         <a:solidFill>
-          <a:srgbClr val="0B1D33"/>
+          <a:srgbClr val="F8F6F3"/>
         </a:solidFill>
       </p:bgPr>
     </p:bg>
@@ -14062,7 +13961,7 @@
             <a:r>
               <a:rPr lang="en-US" sz="1200" b="1" spc="300" kern="0" dirty="0">
                 <a:solidFill>
-                  <a:srgbClr val="4A9EFF"/>
+                  <a:srgbClr val="9A7B66"/>
                 </a:solidFill>
                 <a:latin typeface="Calibri" pitchFamily="34" charset="0"/>
                 <a:ea typeface="Calibri" pitchFamily="34" charset="-122"/>
@@ -14104,11 +14003,11 @@
             <a:r>
               <a:rPr lang="en-US" sz="3200" b="1" dirty="0">
                 <a:solidFill>
-                  <a:srgbClr val="EAF1FA"/>
-                </a:solidFill>
-                <a:latin typeface="Bookman Old Style" pitchFamily="34" charset="0"/>
-                <a:ea typeface="Bookman Old Style" pitchFamily="34" charset="-122"/>
-                <a:cs typeface="Bookman Old Style" pitchFamily="34" charset="-120"/>
+                  <a:srgbClr val="33302B"/>
+                </a:solidFill>
+                <a:latin typeface="Georgia" pitchFamily="34" charset="0"/>
+                <a:ea typeface="Georgia" pitchFamily="34" charset="-122"/>
+                <a:cs typeface="Georgia" pitchFamily="34" charset="-120"/>
               </a:rPr>
               <a:t>Upsells que sobem o ticket</a:t>
             </a:r>
@@ -14133,13 +14032,18 @@
             </a:avLst>
           </a:prstGeom>
           <a:solidFill>
-            <a:srgbClr val="13283F"/>
+            <a:srgbClr val="FFFFFF"/>
           </a:solidFill>
-          <a:ln/>
+          <a:ln w="12700">
+            <a:solidFill>
+              <a:srgbClr val="E3D9CC"/>
+            </a:solidFill>
+            <a:prstDash val="solid"/>
+          </a:ln>
           <a:effectLst>
-            <a:outerShdw sx="100000" sy="100000" kx="0" ky="0" algn="bl" rotWithShape="0" blurRad="127000" dist="38100" dir="5400000">
-              <a:srgbClr val="000000">
-                <a:alpha val="28000"/>
+            <a:outerShdw sx="100000" sy="100000" kx="0" ky="0" algn="bl" rotWithShape="0" blurRad="114300" dist="38100" dir="5400000">
+              <a:srgbClr val="7A6A55">
+                <a:alpha val="12000"/>
               </a:srgbClr>
             </a:outerShdw>
           </a:effectLst>
@@ -14160,9 +14064,14 @@
             <a:avLst/>
           </a:prstGeom>
           <a:solidFill>
-            <a:srgbClr val="16314F"/>
+            <a:srgbClr val="EADFD0"/>
           </a:solidFill>
-          <a:ln/>
+          <a:ln w="9525">
+            <a:solidFill>
+              <a:srgbClr val="E3D9CC"/>
+            </a:solidFill>
+            <a:prstDash val="solid"/>
+          </a:ln>
         </p:spPr>
       </p:sp>
       <p:pic>
@@ -14216,11 +14125,11 @@
             <a:r>
               <a:rPr lang="en-US" sz="1800" b="1" dirty="0">
                 <a:solidFill>
-                  <a:srgbClr val="C9A961"/>
-                </a:solidFill>
-                <a:latin typeface="Bookman Old Style" pitchFamily="34" charset="0"/>
-                <a:ea typeface="Bookman Old Style" pitchFamily="34" charset="-122"/>
-                <a:cs typeface="Bookman Old Style" pitchFamily="34" charset="-120"/>
+                  <a:srgbClr val="B1937E"/>
+                </a:solidFill>
+                <a:latin typeface="Georgia" pitchFamily="34" charset="0"/>
+                <a:ea typeface="Georgia" pitchFamily="34" charset="-122"/>
+                <a:cs typeface="Georgia" pitchFamily="34" charset="-120"/>
               </a:rPr>
               <a:t>Álbuns premium</a:t>
             </a:r>
@@ -14255,7 +14164,7 @@
             <a:r>
               <a:rPr lang="en-US" sz="1350" dirty="0">
                 <a:solidFill>
-                  <a:srgbClr val="9FB2C9"/>
+                  <a:srgbClr val="8A7E72"/>
                 </a:solidFill>
                 <a:latin typeface="Calibri" pitchFamily="34" charset="0"/>
                 <a:ea typeface="Calibri" pitchFamily="34" charset="-122"/>
@@ -14284,13 +14193,18 @@
             </a:avLst>
           </a:prstGeom>
           <a:solidFill>
-            <a:srgbClr val="13283F"/>
+            <a:srgbClr val="FFFFFF"/>
           </a:solidFill>
-          <a:ln/>
+          <a:ln w="12700">
+            <a:solidFill>
+              <a:srgbClr val="E3D9CC"/>
+            </a:solidFill>
+            <a:prstDash val="solid"/>
+          </a:ln>
           <a:effectLst>
-            <a:outerShdw sx="100000" sy="100000" kx="0" ky="0" algn="bl" rotWithShape="0" blurRad="127000" dist="38100" dir="5400000">
-              <a:srgbClr val="000000">
-                <a:alpha val="28000"/>
+            <a:outerShdw sx="100000" sy="100000" kx="0" ky="0" algn="bl" rotWithShape="0" blurRad="114300" dist="38100" dir="5400000">
+              <a:srgbClr val="7A6A55">
+                <a:alpha val="12000"/>
               </a:srgbClr>
             </a:outerShdw>
           </a:effectLst>
@@ -14311,9 +14225,14 @@
             <a:avLst/>
           </a:prstGeom>
           <a:solidFill>
-            <a:srgbClr val="16314F"/>
+            <a:srgbClr val="EADFD0"/>
           </a:solidFill>
-          <a:ln/>
+          <a:ln w="9525">
+            <a:solidFill>
+              <a:srgbClr val="E3D9CC"/>
+            </a:solidFill>
+            <a:prstDash val="solid"/>
+          </a:ln>
         </p:spPr>
       </p:sp>
       <p:pic>
@@ -14367,11 +14286,11 @@
             <a:r>
               <a:rPr lang="en-US" sz="1800" b="1" dirty="0">
                 <a:solidFill>
-                  <a:srgbClr val="C9A961"/>
-                </a:solidFill>
-                <a:latin typeface="Bookman Old Style" pitchFamily="34" charset="0"/>
-                <a:ea typeface="Bookman Old Style" pitchFamily="34" charset="-122"/>
-                <a:cs typeface="Bookman Old Style" pitchFamily="34" charset="-120"/>
+                  <a:srgbClr val="B1937E"/>
+                </a:solidFill>
+                <a:latin typeface="Georgia" pitchFamily="34" charset="0"/>
+                <a:ea typeface="Georgia" pitchFamily="34" charset="-122"/>
+                <a:cs typeface="Georgia" pitchFamily="34" charset="-120"/>
               </a:rPr>
               <a:t>Vídeos adicionais</a:t>
             </a:r>
@@ -14406,7 +14325,7 @@
             <a:r>
               <a:rPr lang="en-US" sz="1350" dirty="0">
                 <a:solidFill>
-                  <a:srgbClr val="9FB2C9"/>
+                  <a:srgbClr val="8A7E72"/>
                 </a:solidFill>
                 <a:latin typeface="Calibri" pitchFamily="34" charset="0"/>
                 <a:ea typeface="Calibri" pitchFamily="34" charset="-122"/>
@@ -14435,13 +14354,18 @@
             </a:avLst>
           </a:prstGeom>
           <a:solidFill>
-            <a:srgbClr val="13283F"/>
+            <a:srgbClr val="FFFFFF"/>
           </a:solidFill>
-          <a:ln/>
+          <a:ln w="12700">
+            <a:solidFill>
+              <a:srgbClr val="E3D9CC"/>
+            </a:solidFill>
+            <a:prstDash val="solid"/>
+          </a:ln>
           <a:effectLst>
-            <a:outerShdw sx="100000" sy="100000" kx="0" ky="0" algn="bl" rotWithShape="0" blurRad="127000" dist="38100" dir="5400000">
-              <a:srgbClr val="000000">
-                <a:alpha val="28000"/>
+            <a:outerShdw sx="100000" sy="100000" kx="0" ky="0" algn="bl" rotWithShape="0" blurRad="114300" dist="38100" dir="5400000">
+              <a:srgbClr val="7A6A55">
+                <a:alpha val="12000"/>
               </a:srgbClr>
             </a:outerShdw>
           </a:effectLst>
@@ -14462,9 +14386,14 @@
             <a:avLst/>
           </a:prstGeom>
           <a:solidFill>
-            <a:srgbClr val="16314F"/>
+            <a:srgbClr val="EADFD0"/>
           </a:solidFill>
-          <a:ln/>
+          <a:ln w="9525">
+            <a:solidFill>
+              <a:srgbClr val="E3D9CC"/>
+            </a:solidFill>
+            <a:prstDash val="solid"/>
+          </a:ln>
         </p:spPr>
       </p:sp>
       <p:pic>
@@ -14518,11 +14447,11 @@
             <a:r>
               <a:rPr lang="en-US" sz="1800" b="1" dirty="0">
                 <a:solidFill>
-                  <a:srgbClr val="C9A961"/>
-                </a:solidFill>
-                <a:latin typeface="Bookman Old Style" pitchFamily="34" charset="0"/>
-                <a:ea typeface="Bookman Old Style" pitchFamily="34" charset="-122"/>
-                <a:cs typeface="Bookman Old Style" pitchFamily="34" charset="-120"/>
+                  <a:srgbClr val="B1937E"/>
+                </a:solidFill>
+                <a:latin typeface="Georgia" pitchFamily="34" charset="0"/>
+                <a:ea typeface="Georgia" pitchFamily="34" charset="-122"/>
+                <a:cs typeface="Georgia" pitchFamily="34" charset="-120"/>
               </a:rPr>
               <a:t>Sessões de aniversário</a:t>
             </a:r>
@@ -14557,7 +14486,7 @@
             <a:r>
               <a:rPr lang="en-US" sz="1350" dirty="0">
                 <a:solidFill>
-                  <a:srgbClr val="9FB2C9"/>
+                  <a:srgbClr val="8A7E72"/>
                 </a:solidFill>
                 <a:latin typeface="Calibri" pitchFamily="34" charset="0"/>
                 <a:ea typeface="Calibri" pitchFamily="34" charset="-122"/>
@@ -14586,13 +14515,18 @@
             </a:avLst>
           </a:prstGeom>
           <a:solidFill>
-            <a:srgbClr val="13283F"/>
+            <a:srgbClr val="FFFFFF"/>
           </a:solidFill>
-          <a:ln/>
+          <a:ln w="12700">
+            <a:solidFill>
+              <a:srgbClr val="E3D9CC"/>
+            </a:solidFill>
+            <a:prstDash val="solid"/>
+          </a:ln>
           <a:effectLst>
-            <a:outerShdw sx="100000" sy="100000" kx="0" ky="0" algn="bl" rotWithShape="0" blurRad="127000" dist="38100" dir="5400000">
-              <a:srgbClr val="000000">
-                <a:alpha val="28000"/>
+            <a:outerShdw sx="100000" sy="100000" kx="0" ky="0" algn="bl" rotWithShape="0" blurRad="114300" dist="38100" dir="5400000">
+              <a:srgbClr val="7A6A55">
+                <a:alpha val="12000"/>
               </a:srgbClr>
             </a:outerShdw>
           </a:effectLst>
@@ -14613,9 +14547,14 @@
             <a:avLst/>
           </a:prstGeom>
           <a:solidFill>
-            <a:srgbClr val="16314F"/>
+            <a:srgbClr val="EADFD0"/>
           </a:solidFill>
-          <a:ln/>
+          <a:ln w="9525">
+            <a:solidFill>
+              <a:srgbClr val="E3D9CC"/>
+            </a:solidFill>
+            <a:prstDash val="solid"/>
+          </a:ln>
         </p:spPr>
       </p:sp>
       <p:pic>
@@ -14669,11 +14608,11 @@
             <a:r>
               <a:rPr lang="en-US" sz="1800" b="1" dirty="0">
                 <a:solidFill>
-                  <a:srgbClr val="C9A961"/>
-                </a:solidFill>
-                <a:latin typeface="Bookman Old Style" pitchFamily="34" charset="0"/>
-                <a:ea typeface="Bookman Old Style" pitchFamily="34" charset="-122"/>
-                <a:cs typeface="Bookman Old Style" pitchFamily="34" charset="-120"/>
+                  <a:srgbClr val="B1937E"/>
+                </a:solidFill>
+                <a:latin typeface="Georgia" pitchFamily="34" charset="0"/>
+                <a:ea typeface="Georgia" pitchFamily="34" charset="-122"/>
+                <a:cs typeface="Georgia" pitchFamily="34" charset="-120"/>
               </a:rPr>
               <a:t>Impressões em parede</a:t>
             </a:r>
@@ -14708,7 +14647,7 @@
             <a:r>
               <a:rPr lang="en-US" sz="1350" dirty="0">
                 <a:solidFill>
-                  <a:srgbClr val="9FB2C9"/>
+                  <a:srgbClr val="8A7E72"/>
                 </a:solidFill>
                 <a:latin typeface="Calibri" pitchFamily="34" charset="0"/>
                 <a:ea typeface="Calibri" pitchFamily="34" charset="-122"/>
@@ -14737,7 +14676,7 @@
           <a:noFill/>
           <a:ln w="9525">
             <a:solidFill>
-              <a:srgbClr val="5C708A">
+              <a:srgbClr val="A89A86">
                 <a:alpha val="60000"/>
               </a:srgbClr>
             </a:solidFill>
@@ -14772,7 +14711,7 @@
             <a:r>
               <a:rPr lang="en-US" sz="900" dirty="0">
                 <a:solidFill>
-                  <a:srgbClr val="5C708A"/>
+                  <a:srgbClr val="A89A86"/>
                 </a:solidFill>
                 <a:latin typeface="Calibri" pitchFamily="34" charset="0"/>
                 <a:ea typeface="Calibri" pitchFamily="34" charset="-122"/>
@@ -14811,7 +14750,7 @@
             <a:r>
               <a:rPr lang="en-US" sz="900" dirty="0">
                 <a:solidFill>
-                  <a:srgbClr val="5C708A"/>
+                  <a:srgbClr val="A89A86"/>
                 </a:solidFill>
                 <a:latin typeface="Calibri" pitchFamily="34" charset="0"/>
                 <a:ea typeface="Calibri" pitchFamily="34" charset="-122"/>
@@ -14837,7 +14776,7 @@
     <p:bg>
       <p:bgPr>
         <a:solidFill>
-          <a:srgbClr val="0B1D33"/>
+          <a:srgbClr val="F8F6F3"/>
         </a:solidFill>
       </p:bgPr>
     </p:bg>
@@ -14882,7 +14821,7 @@
             <a:r>
               <a:rPr lang="en-US" sz="1200" b="1" spc="300" kern="0" dirty="0">
                 <a:solidFill>
-                  <a:srgbClr val="4A9EFF"/>
+                  <a:srgbClr val="9A7B66"/>
                 </a:solidFill>
                 <a:latin typeface="Calibri" pitchFamily="34" charset="0"/>
                 <a:ea typeface="Calibri" pitchFamily="34" charset="-122"/>
@@ -14924,11 +14863,11 @@
             <a:r>
               <a:rPr lang="en-US" sz="3200" b="1" dirty="0">
                 <a:solidFill>
-                  <a:srgbClr val="EAF1FA"/>
-                </a:solidFill>
-                <a:latin typeface="Bookman Old Style" pitchFamily="34" charset="0"/>
-                <a:ea typeface="Bookman Old Style" pitchFamily="34" charset="-122"/>
-                <a:cs typeface="Bookman Old Style" pitchFamily="34" charset="-120"/>
+                  <a:srgbClr val="33302B"/>
+                </a:solidFill>
+                <a:latin typeface="Georgia" pitchFamily="34" charset="0"/>
+                <a:ea typeface="Georgia" pitchFamily="34" charset="-122"/>
+                <a:cs typeface="Georgia" pitchFamily="34" charset="-120"/>
               </a:rPr>
               <a:t>Subir o ticket é o caminho mais curto</a:t>
             </a:r>
@@ -14953,13 +14892,18 @@
             </a:avLst>
           </a:prstGeom>
           <a:solidFill>
-            <a:srgbClr val="13283F"/>
+            <a:srgbClr val="FFFFFF"/>
           </a:solidFill>
-          <a:ln/>
+          <a:ln w="12700">
+            <a:solidFill>
+              <a:srgbClr val="E3D9CC"/>
+            </a:solidFill>
+            <a:prstDash val="solid"/>
+          </a:ln>
           <a:effectLst>
-            <a:outerShdw sx="100000" sy="100000" kx="0" ky="0" algn="bl" rotWithShape="0" blurRad="127000" dist="38100" dir="5400000">
-              <a:srgbClr val="000000">
-                <a:alpha val="28000"/>
+            <a:outerShdw sx="100000" sy="100000" kx="0" ky="0" algn="bl" rotWithShape="0" blurRad="114300" dist="38100" dir="5400000">
+              <a:srgbClr val="7A6A55">
+                <a:alpha val="12000"/>
               </a:srgbClr>
             </a:outerShdw>
           </a:effectLst>
@@ -14992,11 +14936,11 @@
             <a:r>
               <a:rPr lang="en-US" sz="4600" b="1" dirty="0">
                 <a:solidFill>
-                  <a:srgbClr val="C9A961"/>
-                </a:solidFill>
-                <a:latin typeface="Bookman Old Style" pitchFamily="34" charset="0"/>
-                <a:ea typeface="Bookman Old Style" pitchFamily="34" charset="-122"/>
-                <a:cs typeface="Bookman Old Style" pitchFamily="34" charset="-120"/>
+                  <a:srgbClr val="B1937E"/>
+                </a:solidFill>
+                <a:latin typeface="Georgia" pitchFamily="34" charset="0"/>
+                <a:ea typeface="Georgia" pitchFamily="34" charset="-122"/>
+                <a:cs typeface="Georgia" pitchFamily="34" charset="-120"/>
               </a:rPr>
               <a:t>+1.000€</a:t>
             </a:r>
@@ -15031,7 +14975,7 @@
             <a:r>
               <a:rPr lang="en-US" sz="1500" b="1" dirty="0">
                 <a:solidFill>
-                  <a:srgbClr val="EAF1FA"/>
+                  <a:srgbClr val="33302B"/>
                 </a:solidFill>
                 <a:latin typeface="Calibri" pitchFamily="34" charset="0"/>
                 <a:ea typeface="Calibri" pitchFamily="34" charset="-122"/>
@@ -15060,7 +15004,7 @@
           <a:noFill/>
           <a:ln w="9525">
             <a:solidFill>
-              <a:srgbClr val="5C708A">
+              <a:srgbClr val="A89A86">
                 <a:alpha val="60000"/>
               </a:srgbClr>
             </a:solidFill>
@@ -15095,7 +15039,7 @@
             <a:r>
               <a:rPr lang="en-US" sz="1300" dirty="0">
                 <a:solidFill>
-                  <a:srgbClr val="9FB2C9"/>
+                  <a:srgbClr val="8A7E72"/>
                 </a:solidFill>
                 <a:latin typeface="Calibri" pitchFamily="34" charset="0"/>
                 <a:ea typeface="Calibri" pitchFamily="34" charset="-122"/>
@@ -15124,13 +15068,18 @@
             </a:avLst>
           </a:prstGeom>
           <a:solidFill>
-            <a:srgbClr val="13283F"/>
+            <a:srgbClr val="FFFFFF"/>
           </a:solidFill>
-          <a:ln/>
+          <a:ln w="12700">
+            <a:solidFill>
+              <a:srgbClr val="E3D9CC"/>
+            </a:solidFill>
+            <a:prstDash val="solid"/>
+          </a:ln>
           <a:effectLst>
-            <a:outerShdw sx="100000" sy="100000" kx="0" ky="0" algn="bl" rotWithShape="0" blurRad="127000" dist="38100" dir="5400000">
-              <a:srgbClr val="000000">
-                <a:alpha val="28000"/>
+            <a:outerShdw sx="100000" sy="100000" kx="0" ky="0" algn="bl" rotWithShape="0" blurRad="114300" dist="38100" dir="5400000">
+              <a:srgbClr val="7A6A55">
+                <a:alpha val="12000"/>
               </a:srgbClr>
             </a:outerShdw>
           </a:effectLst>
@@ -15163,11 +15112,11 @@
             <a:r>
               <a:rPr lang="en-US" sz="4600" b="1" dirty="0">
                 <a:solidFill>
-                  <a:srgbClr val="4A9EFF"/>
-                </a:solidFill>
-                <a:latin typeface="Bookman Old Style" pitchFamily="34" charset="0"/>
-                <a:ea typeface="Bookman Old Style" pitchFamily="34" charset="-122"/>
-                <a:cs typeface="Bookman Old Style" pitchFamily="34" charset="-120"/>
+                  <a:srgbClr val="9A7B66"/>
+                </a:solidFill>
+                <a:latin typeface="Georgia" pitchFamily="34" charset="0"/>
+                <a:ea typeface="Georgia" pitchFamily="34" charset="-122"/>
+                <a:cs typeface="Georgia" pitchFamily="34" charset="-120"/>
               </a:rPr>
               <a:t>0</a:t>
             </a:r>
@@ -15202,7 +15151,7 @@
             <a:r>
               <a:rPr lang="en-US" sz="1500" b="1" dirty="0">
                 <a:solidFill>
-                  <a:srgbClr val="EAF1FA"/>
+                  <a:srgbClr val="33302B"/>
                 </a:solidFill>
                 <a:latin typeface="Calibri" pitchFamily="34" charset="0"/>
                 <a:ea typeface="Calibri" pitchFamily="34" charset="-122"/>
@@ -15231,7 +15180,7 @@
           <a:noFill/>
           <a:ln w="9525">
             <a:solidFill>
-              <a:srgbClr val="5C708A">
+              <a:srgbClr val="A89A86">
                 <a:alpha val="60000"/>
               </a:srgbClr>
             </a:solidFill>
@@ -15266,7 +15215,7 @@
             <a:r>
               <a:rPr lang="en-US" sz="1300" dirty="0">
                 <a:solidFill>
-                  <a:srgbClr val="9FB2C9"/>
+                  <a:srgbClr val="8A7E72"/>
                 </a:solidFill>
                 <a:latin typeface="Calibri" pitchFamily="34" charset="0"/>
                 <a:ea typeface="Calibri" pitchFamily="34" charset="-122"/>
@@ -15295,13 +15244,18 @@
             </a:avLst>
           </a:prstGeom>
           <a:solidFill>
-            <a:srgbClr val="13283F"/>
+            <a:srgbClr val="FFFFFF"/>
           </a:solidFill>
-          <a:ln/>
+          <a:ln w="12700">
+            <a:solidFill>
+              <a:srgbClr val="E3D9CC"/>
+            </a:solidFill>
+            <a:prstDash val="solid"/>
+          </a:ln>
           <a:effectLst>
-            <a:outerShdw sx="100000" sy="100000" kx="0" ky="0" algn="bl" rotWithShape="0" blurRad="127000" dist="38100" dir="5400000">
-              <a:srgbClr val="000000">
-                <a:alpha val="28000"/>
+            <a:outerShdw sx="100000" sy="100000" kx="0" ky="0" algn="bl" rotWithShape="0" blurRad="114300" dist="38100" dir="5400000">
+              <a:srgbClr val="7A6A55">
+                <a:alpha val="12000"/>
               </a:srgbClr>
             </a:outerShdw>
           </a:effectLst>
@@ -15334,11 +15288,11 @@
             <a:r>
               <a:rPr lang="en-US" sz="4600" b="1" dirty="0">
                 <a:solidFill>
-                  <a:srgbClr val="4A9EFF"/>
-                </a:solidFill>
-                <a:latin typeface="Bookman Old Style" pitchFamily="34" charset="0"/>
-                <a:ea typeface="Bookman Old Style" pitchFamily="34" charset="-122"/>
-                <a:cs typeface="Bookman Old Style" pitchFamily="34" charset="-120"/>
+                  <a:srgbClr val="9A7B66"/>
+                </a:solidFill>
+                <a:latin typeface="Georgia" pitchFamily="34" charset="0"/>
+                <a:ea typeface="Georgia" pitchFamily="34" charset="-122"/>
+                <a:cs typeface="Georgia" pitchFamily="34" charset="-120"/>
               </a:rPr>
               <a:t>100k</a:t>
             </a:r>
@@ -15373,7 +15327,7 @@
             <a:r>
               <a:rPr lang="en-US" sz="1500" b="1" dirty="0">
                 <a:solidFill>
-                  <a:srgbClr val="EAF1FA"/>
+                  <a:srgbClr val="33302B"/>
                 </a:solidFill>
                 <a:latin typeface="Calibri" pitchFamily="34" charset="0"/>
                 <a:ea typeface="Calibri" pitchFamily="34" charset="-122"/>
@@ -15402,7 +15356,7 @@
           <a:noFill/>
           <a:ln w="9525">
             <a:solidFill>
-              <a:srgbClr val="5C708A">
+              <a:srgbClr val="A89A86">
                 <a:alpha val="60000"/>
               </a:srgbClr>
             </a:solidFill>
@@ -15437,7 +15391,7 @@
             <a:r>
               <a:rPr lang="en-US" sz="1300" dirty="0">
                 <a:solidFill>
-                  <a:srgbClr val="9FB2C9"/>
+                  <a:srgbClr val="8A7E72"/>
                 </a:solidFill>
                 <a:latin typeface="Calibri" pitchFamily="34" charset="0"/>
                 <a:ea typeface="Calibri" pitchFamily="34" charset="-122"/>
@@ -15466,7 +15420,7 @@
           <a:noFill/>
           <a:ln w="9525">
             <a:solidFill>
-              <a:srgbClr val="5C708A">
+              <a:srgbClr val="A89A86">
                 <a:alpha val="60000"/>
               </a:srgbClr>
             </a:solidFill>
@@ -15501,7 +15455,7 @@
             <a:r>
               <a:rPr lang="en-US" sz="900" dirty="0">
                 <a:solidFill>
-                  <a:srgbClr val="5C708A"/>
+                  <a:srgbClr val="A89A86"/>
                 </a:solidFill>
                 <a:latin typeface="Calibri" pitchFamily="34" charset="0"/>
                 <a:ea typeface="Calibri" pitchFamily="34" charset="-122"/>
@@ -15540,7 +15494,7 @@
             <a:r>
               <a:rPr lang="en-US" sz="900" dirty="0">
                 <a:solidFill>
-                  <a:srgbClr val="5C708A"/>
+                  <a:srgbClr val="A89A86"/>
                 </a:solidFill>
                 <a:latin typeface="Calibri" pitchFamily="34" charset="0"/>
                 <a:ea typeface="Calibri" pitchFamily="34" charset="-122"/>
